--- a/olist_분석_포트폴리오.pptx
+++ b/olist_분석_포트폴리오.pptx
@@ -4,21 +4,18 @@
   <p:sldMasterIdLst>
     <p:sldMasterId id="2147483648" r:id="rId1"/>
   </p:sldMasterIdLst>
-  <p:notesMasterIdLst>
-    <p:notesMasterId r:id="rId11"/>
-  </p:notesMasterIdLst>
   <p:sldIdLst>
-    <p:sldId id="256" r:id="rId2"/>
-    <p:sldId id="257" r:id="rId3"/>
-    <p:sldId id="258" r:id="rId4"/>
-    <p:sldId id="259" r:id="rId5"/>
-    <p:sldId id="260" r:id="rId6"/>
-    <p:sldId id="261" r:id="rId7"/>
-    <p:sldId id="262" r:id="rId8"/>
-    <p:sldId id="263" r:id="rId9"/>
-    <p:sldId id="264" r:id="rId10"/>
+    <p:sldId id="256" r:id="rId7"/>
+    <p:sldId id="257" r:id="rId9"/>
+    <p:sldId id="258" r:id="rId10"/>
+    <p:sldId id="259" r:id="rId11"/>
+    <p:sldId id="260" r:id="rId12"/>
+    <p:sldId id="261" r:id="rId13"/>
+    <p:sldId id="262" r:id="rId14"/>
+    <p:sldId id="263" r:id="rId15"/>
+    <p:sldId id="264" r:id="rId16"/>
   </p:sldIdLst>
-  <p:sldSz cx="9144000" cy="5143500" type="screen16x9"/>
+  <p:sldSz cx="9144000" cy="5143500" type="screen4x3"/>
   <p:notesSz cx="6858000" cy="9144000"/>
   <p:defaultTextStyle>
     <a:defPPr>
@@ -115,31 +112,12 @@
       </a:defRPr>
     </a:lvl9pPr>
   </p:defaultTextStyle>
-  <p:extLst>
-    <p:ext uri="{EFAFB233-063F-42B5-8137-9DF3F51BA10A}">
-      <p15:sldGuideLst xmlns:p15="http://schemas.microsoft.com/office/powerpoint/2012/main">
-        <p15:guide id="1" orient="horz" pos="2160">
-          <p15:clr>
-            <a:srgbClr val="A4A3A4"/>
-          </p15:clr>
-        </p15:guide>
-        <p15:guide id="2" pos="2880">
-          <p15:clr>
-            <a:srgbClr val="A4A3A4"/>
-          </p15:clr>
-        </p15:guide>
-      </p15:sldGuideLst>
-    </p:ext>
-  </p:extLst>
 </p:presentation>
 </file>
 
 <file path=ppt/charts/chart1.xml><?xml version="1.0" encoding="utf-8"?>
-<c:chartSpace xmlns:c="http://schemas.openxmlformats.org/drawingml/2006/chart" xmlns:a="http://schemas.openxmlformats.org/drawingml/2006/main" xmlns:r="http://schemas.openxmlformats.org/officeDocument/2006/relationships" xmlns:c16r2="http://schemas.microsoft.com/office/drawing/2015/06/chart">
+<c:chartSpace xmlns:c="http://schemas.openxmlformats.org/drawingml/2006/chart" xmlns:a="http://schemas.openxmlformats.org/drawingml/2006/main" xmlns:r="http://schemas.openxmlformats.org/officeDocument/2006/relationships">
   <c:date1904 val="0"/>
-  <c:lang val="ko-KR"/>
-  <c:roundedCorners val="1"/>
-  <c:style val="2"/>
   <c:chart>
     <c:title>
       <c:tx>
@@ -148,53 +126,25 @@
           <a:lstStyle/>
           <a:p>
             <a:r>
-              <a:rPr lang="ko-KR" altLang="en-US" sz="1100" b="1">
+              <a:rPr sz="1100" b="1">
                 <a:solidFill>
                   <a:srgbClr val="1F2D29"/>
                 </a:solidFill>
                 <a:latin typeface="Malgun Gothic"/>
               </a:rPr>
-              <a:t>월별 주문 수 </a:t>
-            </a:r>
-            <a:r>
-              <a:rPr lang="en-US" altLang="ko-KR" sz="1100" b="1">
-                <a:solidFill>
-                  <a:srgbClr val="1F2D29"/>
-                </a:solidFill>
-                <a:latin typeface="Malgun Gothic"/>
-              </a:rPr>
-              <a:t>(</a:t>
-            </a:r>
-            <a:r>
-              <a:rPr lang="ko-KR" altLang="en-US" sz="1100" b="1">
-                <a:solidFill>
-                  <a:srgbClr val="1F2D29"/>
-                </a:solidFill>
-                <a:latin typeface="Malgun Gothic"/>
-              </a:rPr>
-              <a:t>건</a:t>
-            </a:r>
-            <a:r>
-              <a:rPr lang="en-US" altLang="ko-KR" sz="1100" b="1">
-                <a:solidFill>
-                  <a:srgbClr val="1F2D29"/>
-                </a:solidFill>
-                <a:latin typeface="Malgun Gothic"/>
-              </a:rPr>
-              <a:t>)</a:t>
+              <a:t>월별 주문 수 (건)</a:t>
             </a:r>
           </a:p>
         </c:rich>
       </c:tx>
+      <c:layout/>
       <c:overlay val="0"/>
     </c:title>
     <c:autoTitleDeleted val="0"/>
     <c:plotArea>
-      <c:layout/>
       <c:barChart>
         <c:barDir val="col"/>
         <c:grouping val="clustered"/>
-        <c:varyColors val="1"/>
         <c:ser>
           <c:idx val="0"/>
           <c:order val="0"/>
@@ -209,306 +159,165 @@
               </c:strCache>
             </c:strRef>
           </c:tx>
-          <c:invertIfNegative val="1"/>
           <c:dPt>
             <c:idx val="0"/>
-            <c:invertIfNegative val="1"/>
-            <c:bubble3D val="0"/>
             <c:spPr>
               <a:solidFill>
                 <a:srgbClr val="2A9D8F"/>
               </a:solidFill>
             </c:spPr>
-            <c:extLst>
-              <c:ext xmlns:c16="http://schemas.microsoft.com/office/drawing/2014/chart" uri="{C3380CC4-5D6E-409C-BE32-E72D297353CC}">
-                <c16:uniqueId val="{00000001-4E14-4DDE-B5C3-7FBABF3029DC}"/>
-              </c:ext>
-            </c:extLst>
           </c:dPt>
           <c:dPt>
             <c:idx val="1"/>
-            <c:invertIfNegative val="1"/>
-            <c:bubble3D val="0"/>
             <c:spPr>
               <a:solidFill>
                 <a:srgbClr val="2A9D8F"/>
               </a:solidFill>
             </c:spPr>
-            <c:extLst>
-              <c:ext xmlns:c16="http://schemas.microsoft.com/office/drawing/2014/chart" uri="{C3380CC4-5D6E-409C-BE32-E72D297353CC}">
-                <c16:uniqueId val="{00000003-4E14-4DDE-B5C3-7FBABF3029DC}"/>
-              </c:ext>
-            </c:extLst>
           </c:dPt>
           <c:dPt>
             <c:idx val="2"/>
-            <c:invertIfNegative val="1"/>
-            <c:bubble3D val="0"/>
             <c:spPr>
               <a:solidFill>
                 <a:srgbClr val="2A9D8F"/>
               </a:solidFill>
             </c:spPr>
-            <c:extLst>
-              <c:ext xmlns:c16="http://schemas.microsoft.com/office/drawing/2014/chart" uri="{C3380CC4-5D6E-409C-BE32-E72D297353CC}">
-                <c16:uniqueId val="{00000005-4E14-4DDE-B5C3-7FBABF3029DC}"/>
-              </c:ext>
-            </c:extLst>
           </c:dPt>
           <c:dPt>
             <c:idx val="3"/>
-            <c:invertIfNegative val="1"/>
-            <c:bubble3D val="0"/>
             <c:spPr>
               <a:solidFill>
                 <a:srgbClr val="2A9D8F"/>
               </a:solidFill>
             </c:spPr>
-            <c:extLst>
-              <c:ext xmlns:c16="http://schemas.microsoft.com/office/drawing/2014/chart" uri="{C3380CC4-5D6E-409C-BE32-E72D297353CC}">
-                <c16:uniqueId val="{00000007-4E14-4DDE-B5C3-7FBABF3029DC}"/>
-              </c:ext>
-            </c:extLst>
           </c:dPt>
           <c:dPt>
             <c:idx val="4"/>
-            <c:invertIfNegative val="1"/>
-            <c:bubble3D val="0"/>
             <c:spPr>
               <a:solidFill>
                 <a:srgbClr val="2A9D8F"/>
               </a:solidFill>
             </c:spPr>
-            <c:extLst>
-              <c:ext xmlns:c16="http://schemas.microsoft.com/office/drawing/2014/chart" uri="{C3380CC4-5D6E-409C-BE32-E72D297353CC}">
-                <c16:uniqueId val="{00000009-4E14-4DDE-B5C3-7FBABF3029DC}"/>
-              </c:ext>
-            </c:extLst>
           </c:dPt>
           <c:dPt>
             <c:idx val="5"/>
-            <c:invertIfNegative val="1"/>
-            <c:bubble3D val="0"/>
             <c:spPr>
               <a:solidFill>
                 <a:srgbClr val="2A9D8F"/>
               </a:solidFill>
             </c:spPr>
-            <c:extLst>
-              <c:ext xmlns:c16="http://schemas.microsoft.com/office/drawing/2014/chart" uri="{C3380CC4-5D6E-409C-BE32-E72D297353CC}">
-                <c16:uniqueId val="{0000000B-4E14-4DDE-B5C3-7FBABF3029DC}"/>
-              </c:ext>
-            </c:extLst>
           </c:dPt>
           <c:dPt>
             <c:idx val="6"/>
-            <c:invertIfNegative val="1"/>
-            <c:bubble3D val="0"/>
             <c:spPr>
               <a:solidFill>
                 <a:srgbClr val="2A9D8F"/>
               </a:solidFill>
             </c:spPr>
-            <c:extLst>
-              <c:ext xmlns:c16="http://schemas.microsoft.com/office/drawing/2014/chart" uri="{C3380CC4-5D6E-409C-BE32-E72D297353CC}">
-                <c16:uniqueId val="{0000000D-4E14-4DDE-B5C3-7FBABF3029DC}"/>
-              </c:ext>
-            </c:extLst>
           </c:dPt>
           <c:dPt>
             <c:idx val="7"/>
-            <c:invertIfNegative val="1"/>
-            <c:bubble3D val="0"/>
             <c:spPr>
               <a:solidFill>
                 <a:srgbClr val="2A9D8F"/>
               </a:solidFill>
             </c:spPr>
-            <c:extLst>
-              <c:ext xmlns:c16="http://schemas.microsoft.com/office/drawing/2014/chart" uri="{C3380CC4-5D6E-409C-BE32-E72D297353CC}">
-                <c16:uniqueId val="{0000000F-4E14-4DDE-B5C3-7FBABF3029DC}"/>
-              </c:ext>
-            </c:extLst>
           </c:dPt>
           <c:dPt>
             <c:idx val="8"/>
-            <c:invertIfNegative val="1"/>
-            <c:bubble3D val="0"/>
             <c:spPr>
               <a:solidFill>
                 <a:srgbClr val="2A9D8F"/>
               </a:solidFill>
             </c:spPr>
-            <c:extLst>
-              <c:ext xmlns:c16="http://schemas.microsoft.com/office/drawing/2014/chart" uri="{C3380CC4-5D6E-409C-BE32-E72D297353CC}">
-                <c16:uniqueId val="{00000011-4E14-4DDE-B5C3-7FBABF3029DC}"/>
-              </c:ext>
-            </c:extLst>
           </c:dPt>
           <c:dPt>
             <c:idx val="9"/>
-            <c:invertIfNegative val="1"/>
-            <c:bubble3D val="0"/>
             <c:spPr>
               <a:solidFill>
                 <a:srgbClr val="2A9D8F"/>
               </a:solidFill>
             </c:spPr>
-            <c:extLst>
-              <c:ext xmlns:c16="http://schemas.microsoft.com/office/drawing/2014/chart" uri="{C3380CC4-5D6E-409C-BE32-E72D297353CC}">
-                <c16:uniqueId val="{00000013-4E14-4DDE-B5C3-7FBABF3029DC}"/>
-              </c:ext>
-            </c:extLst>
           </c:dPt>
           <c:dPt>
             <c:idx val="10"/>
-            <c:invertIfNegative val="1"/>
-            <c:bubble3D val="0"/>
             <c:spPr>
               <a:solidFill>
                 <a:srgbClr val="2A9D8F"/>
               </a:solidFill>
             </c:spPr>
-            <c:extLst>
-              <c:ext xmlns:c16="http://schemas.microsoft.com/office/drawing/2014/chart" uri="{C3380CC4-5D6E-409C-BE32-E72D297353CC}">
-                <c16:uniqueId val="{00000015-4E14-4DDE-B5C3-7FBABF3029DC}"/>
-              </c:ext>
-            </c:extLst>
           </c:dPt>
           <c:dPt>
             <c:idx val="11"/>
-            <c:invertIfNegative val="1"/>
-            <c:bubble3D val="0"/>
             <c:spPr>
               <a:solidFill>
                 <a:srgbClr val="2A9D8F"/>
               </a:solidFill>
             </c:spPr>
-            <c:extLst>
-              <c:ext xmlns:c16="http://schemas.microsoft.com/office/drawing/2014/chart" uri="{C3380CC4-5D6E-409C-BE32-E72D297353CC}">
-                <c16:uniqueId val="{00000017-4E14-4DDE-B5C3-7FBABF3029DC}"/>
-              </c:ext>
-            </c:extLst>
           </c:dPt>
           <c:dPt>
             <c:idx val="12"/>
-            <c:invertIfNegative val="1"/>
-            <c:bubble3D val="0"/>
             <c:spPr>
               <a:solidFill>
                 <a:srgbClr val="0B3D2E"/>
               </a:solidFill>
             </c:spPr>
-            <c:extLst>
-              <c:ext xmlns:c16="http://schemas.microsoft.com/office/drawing/2014/chart" uri="{C3380CC4-5D6E-409C-BE32-E72D297353CC}">
-                <c16:uniqueId val="{00000019-4E14-4DDE-B5C3-7FBABF3029DC}"/>
-              </c:ext>
-            </c:extLst>
           </c:dPt>
           <c:dPt>
             <c:idx val="13"/>
-            <c:invertIfNegative val="1"/>
-            <c:bubble3D val="0"/>
             <c:spPr>
               <a:solidFill>
                 <a:srgbClr val="0B3D2E"/>
               </a:solidFill>
             </c:spPr>
-            <c:extLst>
-              <c:ext xmlns:c16="http://schemas.microsoft.com/office/drawing/2014/chart" uri="{C3380CC4-5D6E-409C-BE32-E72D297353CC}">
-                <c16:uniqueId val="{0000001B-4E14-4DDE-B5C3-7FBABF3029DC}"/>
-              </c:ext>
-            </c:extLst>
           </c:dPt>
           <c:dPt>
             <c:idx val="14"/>
-            <c:invertIfNegative val="1"/>
-            <c:bubble3D val="0"/>
             <c:spPr>
               <a:solidFill>
                 <a:srgbClr val="0B3D2E"/>
               </a:solidFill>
             </c:spPr>
-            <c:extLst>
-              <c:ext xmlns:c16="http://schemas.microsoft.com/office/drawing/2014/chart" uri="{C3380CC4-5D6E-409C-BE32-E72D297353CC}">
-                <c16:uniqueId val="{0000001D-4E14-4DDE-B5C3-7FBABF3029DC}"/>
-              </c:ext>
-            </c:extLst>
           </c:dPt>
           <c:dPt>
             <c:idx val="15"/>
-            <c:invertIfNegative val="1"/>
-            <c:bubble3D val="0"/>
             <c:spPr>
               <a:solidFill>
                 <a:srgbClr val="0B3D2E"/>
               </a:solidFill>
             </c:spPr>
-            <c:extLst>
-              <c:ext xmlns:c16="http://schemas.microsoft.com/office/drawing/2014/chart" uri="{C3380CC4-5D6E-409C-BE32-E72D297353CC}">
-                <c16:uniqueId val="{0000001F-4E14-4DDE-B5C3-7FBABF3029DC}"/>
-              </c:ext>
-            </c:extLst>
           </c:dPt>
           <c:dPt>
             <c:idx val="16"/>
-            <c:invertIfNegative val="1"/>
-            <c:bubble3D val="0"/>
             <c:spPr>
               <a:solidFill>
                 <a:srgbClr val="0B3D2E"/>
               </a:solidFill>
             </c:spPr>
-            <c:extLst>
-              <c:ext xmlns:c16="http://schemas.microsoft.com/office/drawing/2014/chart" uri="{C3380CC4-5D6E-409C-BE32-E72D297353CC}">
-                <c16:uniqueId val="{00000021-4E14-4DDE-B5C3-7FBABF3029DC}"/>
-              </c:ext>
-            </c:extLst>
           </c:dPt>
           <c:dPt>
             <c:idx val="17"/>
-            <c:invertIfNegative val="1"/>
-            <c:bubble3D val="0"/>
             <c:spPr>
               <a:solidFill>
                 <a:srgbClr val="0B3D2E"/>
               </a:solidFill>
             </c:spPr>
-            <c:extLst>
-              <c:ext xmlns:c16="http://schemas.microsoft.com/office/drawing/2014/chart" uri="{C3380CC4-5D6E-409C-BE32-E72D297353CC}">
-                <c16:uniqueId val="{00000023-4E14-4DDE-B5C3-7FBABF3029DC}"/>
-              </c:ext>
-            </c:extLst>
           </c:dPt>
           <c:dPt>
             <c:idx val="18"/>
-            <c:invertIfNegative val="1"/>
-            <c:bubble3D val="0"/>
             <c:spPr>
               <a:solidFill>
                 <a:srgbClr val="0B3D2E"/>
               </a:solidFill>
             </c:spPr>
-            <c:extLst>
-              <c:ext xmlns:c16="http://schemas.microsoft.com/office/drawing/2014/chart" uri="{C3380CC4-5D6E-409C-BE32-E72D297353CC}">
-                <c16:uniqueId val="{00000025-4E14-4DDE-B5C3-7FBABF3029DC}"/>
-              </c:ext>
-            </c:extLst>
           </c:dPt>
           <c:dPt>
             <c:idx val="19"/>
-            <c:invertIfNegative val="1"/>
-            <c:bubble3D val="0"/>
             <c:spPr>
               <a:solidFill>
                 <a:srgbClr val="0B3D2E"/>
               </a:solidFill>
             </c:spPr>
-            <c:extLst>
-              <c:ext xmlns:c16="http://schemas.microsoft.com/office/drawing/2014/chart" uri="{C3380CC4-5D6E-409C-BE32-E72D297353CC}">
-                <c16:uniqueId val="{00000027-4E14-4DDE-B5C3-7FBABF3029DC}"/>
-              </c:ext>
-            </c:extLst>
           </c:dPt>
           <c:cat>
             <c:strRef>
@@ -647,20 +456,7 @@
               </c:numCache>
             </c:numRef>
           </c:val>
-          <c:extLst>
-            <c:ext xmlns:c16="http://schemas.microsoft.com/office/drawing/2014/chart" uri="{C3380CC4-5D6E-409C-BE32-E72D297353CC}">
-              <c16:uniqueId val="{00000028-4E14-4DDE-B5C3-7FBABF3029DC}"/>
-            </c:ext>
-          </c:extLst>
         </c:ser>
-        <c:dLbls>
-          <c:showLegendKey val="0"/>
-          <c:showVal val="0"/>
-          <c:showCatName val="0"/>
-          <c:showSerName val="0"/>
-          <c:showPercent val="0"/>
-          <c:showBubbleSize val="0"/>
-        </c:dLbls>
         <c:gapWidth val="40"/>
         <c:axId val="-2068027336"/>
         <c:axId val="-2113994440"/>
@@ -672,7 +468,6 @@
         </c:scaling>
         <c:delete val="0"/>
         <c:axPos val="b"/>
-        <c:numFmt formatCode="General" sourceLinked="0"/>
         <c:majorTickMark val="out"/>
         <c:minorTickMark val="none"/>
         <c:tickLblPos val="nextTo"/>
@@ -690,7 +485,6 @@
             <a:pPr>
               <a:defRPr sz="1000"/>
             </a:pPr>
-            <a:endParaRPr lang="ko-KR"/>
           </a:p>
         </c:txPr>
         <c:crossAx val="-2113994440"/>
@@ -703,9 +497,8 @@
       <c:valAx>
         <c:axId val="-2113994440"/>
         <c:scaling>
-          <c:orientation val="minMax"/>
-          <c:max val="8000"/>
-          <c:min val="0"/>
+          <c:max val="8000.0"/>
+          <c:min val="0.0"/>
         </c:scaling>
         <c:delete val="0"/>
         <c:axPos val="l"/>
@@ -734,17 +527,13 @@
             <a:pPr>
               <a:defRPr sz="900"/>
             </a:pPr>
-            <a:endParaRPr lang="ko-KR"/>
           </a:p>
         </c:txPr>
         <c:crossAx val="-2068027336"/>
         <c:crosses val="autoZero"/>
-        <c:crossBetween val="between"/>
       </c:valAx>
     </c:plotArea>
-    <c:plotVisOnly val="1"/>
     <c:dispBlanksAs val="gap"/>
-    <c:showDLblsOverMax val="1"/>
   </c:chart>
   <c:txPr>
     <a:bodyPr/>
@@ -768,11 +557,7 @@
 </file>
 
 <file path=ppt/charts/chart2.xml><?xml version="1.0" encoding="utf-8"?>
-<c:chartSpace xmlns:c="http://schemas.openxmlformats.org/drawingml/2006/chart" xmlns:a="http://schemas.openxmlformats.org/drawingml/2006/main" xmlns:r="http://schemas.openxmlformats.org/officeDocument/2006/relationships" xmlns:c16r2="http://schemas.microsoft.com/office/drawing/2015/06/chart">
-  <c:date1904 val="1"/>
-  <c:lang val="ko-KR"/>
-  <c:roundedCorners val="1"/>
-  <c:style val="2"/>
+<c:chartSpace xmlns:c="http://schemas.openxmlformats.org/drawingml/2006/chart" xmlns:a="http://schemas.openxmlformats.org/drawingml/2006/main" xmlns:r="http://schemas.openxmlformats.org/officeDocument/2006/relationships">
   <c:chart>
     <c:title>
       <c:tx>
@@ -781,31 +566,22 @@
           <a:lstStyle/>
           <a:p>
             <a:r>
-              <a:rPr lang="ko-KR" altLang="en-US" sz="1100" b="1">
+              <a:rPr sz="1100" b="1">
                 <a:solidFill>
                   <a:srgbClr val="1F2D29"/>
                 </a:solidFill>
                 <a:latin typeface="Malgun Gothic"/>
               </a:rPr>
-              <a:t>고객 구성 </a:t>
-            </a:r>
-            <a:r>
-              <a:rPr lang="en-US" altLang="ko-KR" sz="1100" b="1">
-                <a:solidFill>
-                  <a:srgbClr val="1F2D29"/>
-                </a:solidFill>
-                <a:latin typeface="Malgun Gothic"/>
-              </a:rPr>
-              <a:t>(%)</a:t>
+              <a:t>고객 구성 (%)</a:t>
             </a:r>
           </a:p>
         </c:rich>
       </c:tx>
+      <c:layout/>
       <c:overlay val="0"/>
     </c:title>
     <c:autoTitleDeleted val="0"/>
     <c:plotArea>
-      <c:layout/>
       <c:pieChart>
         <c:varyColors val="1"/>
         <c:ser>
@@ -824,7 +600,6 @@
           </c:tx>
           <c:dPt>
             <c:idx val="0"/>
-            <c:bubble3D val="0"/>
             <c:spPr>
               <a:solidFill>
                 <a:srgbClr val="7B8F89"/>
@@ -835,15 +610,9 @@
                 </a:solidFill>
               </a:ln>
             </c:spPr>
-            <c:extLst>
-              <c:ext xmlns:c16="http://schemas.microsoft.com/office/drawing/2014/chart" uri="{C3380CC4-5D6E-409C-BE32-E72D297353CC}">
-                <c16:uniqueId val="{00000001-41F3-437A-826E-067A989BD1EA}"/>
-              </c:ext>
-            </c:extLst>
           </c:dPt>
           <c:dPt>
             <c:idx val="1"/>
-            <c:bubble3D val="0"/>
             <c:spPr>
               <a:solidFill>
                 <a:srgbClr val="9AAAA5"/>
@@ -854,15 +623,9 @@
                 </a:solidFill>
               </a:ln>
             </c:spPr>
-            <c:extLst>
-              <c:ext xmlns:c16="http://schemas.microsoft.com/office/drawing/2014/chart" uri="{C3380CC4-5D6E-409C-BE32-E72D297353CC}">
-                <c16:uniqueId val="{00000003-41F3-437A-826E-067A989BD1EA}"/>
-              </c:ext>
-            </c:extLst>
           </c:dPt>
           <c:dPt>
             <c:idx val="2"/>
-            <c:bubble3D val="0"/>
             <c:spPr>
               <a:solidFill>
                 <a:srgbClr val="C3CCC9"/>
@@ -873,15 +636,9 @@
                 </a:solidFill>
               </a:ln>
             </c:spPr>
-            <c:extLst>
-              <c:ext xmlns:c16="http://schemas.microsoft.com/office/drawing/2014/chart" uri="{C3380CC4-5D6E-409C-BE32-E72D297353CC}">
-                <c16:uniqueId val="{00000005-41F3-437A-826E-067A989BD1EA}"/>
-              </c:ext>
-            </c:extLst>
           </c:dPt>
           <c:dPt>
             <c:idx val="3"/>
-            <c:bubble3D val="0"/>
             <c:spPr>
               <a:solidFill>
                 <a:srgbClr val="D9534F"/>
@@ -892,15 +649,9 @@
                 </a:solidFill>
               </a:ln>
             </c:spPr>
-            <c:extLst>
-              <c:ext xmlns:c16="http://schemas.microsoft.com/office/drawing/2014/chart" uri="{C3380CC4-5D6E-409C-BE32-E72D297353CC}">
-                <c16:uniqueId val="{00000007-41F3-437A-826E-067A989BD1EA}"/>
-              </c:ext>
-            </c:extLst>
           </c:dPt>
           <c:dPt>
             <c:idx val="4"/>
-            <c:bubble3D val="0"/>
             <c:spPr>
               <a:solidFill>
                 <a:srgbClr val="E3E8E6"/>
@@ -911,43 +662,7 @@
                 </a:solidFill>
               </a:ln>
             </c:spPr>
-            <c:extLst>
-              <c:ext xmlns:c16="http://schemas.microsoft.com/office/drawing/2014/chart" uri="{C3380CC4-5D6E-409C-BE32-E72D297353CC}">
-                <c16:uniqueId val="{00000009-41F3-437A-826E-067A989BD1EA}"/>
-              </c:ext>
-            </c:extLst>
           </c:dPt>
-          <c:dLbls>
-            <c:numFmt formatCode="0.0&quot;%&quot;" sourceLinked="0"/>
-            <c:spPr>
-              <a:noFill/>
-              <a:ln>
-                <a:noFill/>
-              </a:ln>
-              <a:effectLst/>
-            </c:spPr>
-            <c:txPr>
-              <a:bodyPr/>
-              <a:lstStyle/>
-              <a:p>
-                <a:pPr>
-                  <a:defRPr sz="1000"/>
-                </a:pPr>
-                <a:endParaRPr lang="ko-KR"/>
-              </a:p>
-            </c:txPr>
-            <c:dLblPos val="outEnd"/>
-            <c:showLegendKey val="0"/>
-            <c:showVal val="1"/>
-            <c:showCatName val="0"/>
-            <c:showSerName val="0"/>
-            <c:showPercent val="0"/>
-            <c:showBubbleSize val="0"/>
-            <c:showLeaderLines val="1"/>
-            <c:extLst>
-              <c:ext xmlns:c15="http://schemas.microsoft.com/office/drawing/2012/chart" uri="{CE6537A1-D6FC-4f65-9D91-7224C49458BB}"/>
-            </c:extLst>
-          </c:dLbls>
           <c:cat>
             <c:strRef>
               <c:f>Sheet1!$A$2:$A$6</c:f>
@@ -978,7 +693,7 @@
                 <c:formatCode>General</c:formatCode>
                 <c:ptCount val="5"/>
                 <c:pt idx="0">
-                  <c:v>2.2000000000000002</c:v>
+                  <c:v>2.2</c:v>
                 </c:pt>
                 <c:pt idx="1">
                   <c:v>15.6</c:v>
@@ -990,18 +705,23 @@
                   <c:v>22.7</c:v>
                 </c:pt>
                 <c:pt idx="4">
-                  <c:v>36.299999999999997</c:v>
+                  <c:v>36.3</c:v>
                 </c:pt>
               </c:numCache>
             </c:numRef>
           </c:val>
-          <c:extLst>
-            <c:ext xmlns:c16="http://schemas.microsoft.com/office/drawing/2014/chart" uri="{C3380CC4-5D6E-409C-BE32-E72D297353CC}">
-              <c16:uniqueId val="{0000000A-41F3-437A-826E-067A989BD1EA}"/>
-            </c:ext>
-          </c:extLst>
         </c:ser>
         <c:dLbls>
+          <c:numFmt formatCode="0.0&quot;%&quot;" sourceLinked="0"/>
+          <c:txPr>
+            <a:bodyPr/>
+            <a:lstStyle/>
+            <a:p>
+              <a:pPr>
+                <a:defRPr sz="1000"/>
+              </a:pPr>
+            </a:p>
+          </c:txPr>
           <c:dLblPos val="outEnd"/>
           <c:showLegendKey val="0"/>
           <c:showVal val="1"/>
@@ -1011,7 +731,6 @@
           <c:showBubbleSize val="0"/>
           <c:showLeaderLines val="1"/>
         </c:dLbls>
-        <c:firstSliceAng val="0"/>
       </c:pieChart>
     </c:plotArea>
     <c:legend>
@@ -1024,13 +743,10 @@
           <a:pPr>
             <a:defRPr sz="1000"/>
           </a:pPr>
-          <a:endParaRPr lang="ko-KR"/>
         </a:p>
       </c:txPr>
     </c:legend>
-    <c:plotVisOnly val="1"/>
     <c:dispBlanksAs val="gap"/>
-    <c:showDLblsOverMax val="1"/>
   </c:chart>
   <c:txPr>
     <a:bodyPr/>
@@ -1054,11 +770,7 @@
 </file>
 
 <file path=ppt/charts/chart3.xml><?xml version="1.0" encoding="utf-8"?>
-<c:chartSpace xmlns:c="http://schemas.openxmlformats.org/drawingml/2006/chart" xmlns:a="http://schemas.openxmlformats.org/drawingml/2006/main" xmlns:r="http://schemas.openxmlformats.org/officeDocument/2006/relationships" xmlns:c16r2="http://schemas.microsoft.com/office/drawing/2015/06/chart">
-  <c:date1904 val="1"/>
-  <c:lang val="ko-KR"/>
-  <c:roundedCorners val="1"/>
-  <c:style val="2"/>
+<c:chartSpace xmlns:c="http://schemas.openxmlformats.org/drawingml/2006/chart" xmlns:a="http://schemas.openxmlformats.org/drawingml/2006/main" xmlns:r="http://schemas.openxmlformats.org/officeDocument/2006/relationships">
   <c:chart>
     <c:title>
       <c:tx>
@@ -1067,31 +779,22 @@
           <a:lstStyle/>
           <a:p>
             <a:r>
-              <a:rPr lang="ko-KR" altLang="en-US" sz="1100" b="1">
+              <a:rPr sz="1100" b="1">
                 <a:solidFill>
                   <a:srgbClr val="1F2D29"/>
                 </a:solidFill>
                 <a:latin typeface="Malgun Gothic"/>
               </a:rPr>
-              <a:t>매출 구성 </a:t>
-            </a:r>
-            <a:r>
-              <a:rPr lang="en-US" altLang="ko-KR" sz="1100" b="1">
-                <a:solidFill>
-                  <a:srgbClr val="1F2D29"/>
-                </a:solidFill>
-                <a:latin typeface="Malgun Gothic"/>
-              </a:rPr>
-              <a:t>(%)</a:t>
+              <a:t>매출 구성 (%)</a:t>
             </a:r>
           </a:p>
         </c:rich>
       </c:tx>
+      <c:layout/>
       <c:overlay val="0"/>
     </c:title>
     <c:autoTitleDeleted val="0"/>
     <c:plotArea>
-      <c:layout/>
       <c:pieChart>
         <c:varyColors val="1"/>
         <c:ser>
@@ -1110,7 +813,6 @@
           </c:tx>
           <c:dPt>
             <c:idx val="0"/>
-            <c:bubble3D val="0"/>
             <c:spPr>
               <a:solidFill>
                 <a:srgbClr val="7B8F89"/>
@@ -1121,15 +823,9 @@
                 </a:solidFill>
               </a:ln>
             </c:spPr>
-            <c:extLst>
-              <c:ext xmlns:c16="http://schemas.microsoft.com/office/drawing/2014/chart" uri="{C3380CC4-5D6E-409C-BE32-E72D297353CC}">
-                <c16:uniqueId val="{00000001-45AD-4401-AC6B-26400DC4BA55}"/>
-              </c:ext>
-            </c:extLst>
           </c:dPt>
           <c:dPt>
             <c:idx val="1"/>
-            <c:bubble3D val="0"/>
             <c:spPr>
               <a:solidFill>
                 <a:srgbClr val="9AAAA5"/>
@@ -1140,15 +836,9 @@
                 </a:solidFill>
               </a:ln>
             </c:spPr>
-            <c:extLst>
-              <c:ext xmlns:c16="http://schemas.microsoft.com/office/drawing/2014/chart" uri="{C3380CC4-5D6E-409C-BE32-E72D297353CC}">
-                <c16:uniqueId val="{00000003-45AD-4401-AC6B-26400DC4BA55}"/>
-              </c:ext>
-            </c:extLst>
           </c:dPt>
           <c:dPt>
             <c:idx val="2"/>
-            <c:bubble3D val="0"/>
             <c:spPr>
               <a:solidFill>
                 <a:srgbClr val="C3CCC9"/>
@@ -1159,15 +849,9 @@
                 </a:solidFill>
               </a:ln>
             </c:spPr>
-            <c:extLst>
-              <c:ext xmlns:c16="http://schemas.microsoft.com/office/drawing/2014/chart" uri="{C3380CC4-5D6E-409C-BE32-E72D297353CC}">
-                <c16:uniqueId val="{00000005-45AD-4401-AC6B-26400DC4BA55}"/>
-              </c:ext>
-            </c:extLst>
           </c:dPt>
           <c:dPt>
             <c:idx val="3"/>
-            <c:bubble3D val="0"/>
             <c:spPr>
               <a:solidFill>
                 <a:srgbClr val="D9534F"/>
@@ -1178,15 +862,9 @@
                 </a:solidFill>
               </a:ln>
             </c:spPr>
-            <c:extLst>
-              <c:ext xmlns:c16="http://schemas.microsoft.com/office/drawing/2014/chart" uri="{C3380CC4-5D6E-409C-BE32-E72D297353CC}">
-                <c16:uniqueId val="{00000007-45AD-4401-AC6B-26400DC4BA55}"/>
-              </c:ext>
-            </c:extLst>
           </c:dPt>
           <c:dPt>
             <c:idx val="4"/>
-            <c:bubble3D val="0"/>
             <c:spPr>
               <a:solidFill>
                 <a:srgbClr val="E3E8E6"/>
@@ -1197,43 +875,7 @@
                 </a:solidFill>
               </a:ln>
             </c:spPr>
-            <c:extLst>
-              <c:ext xmlns:c16="http://schemas.microsoft.com/office/drawing/2014/chart" uri="{C3380CC4-5D6E-409C-BE32-E72D297353CC}">
-                <c16:uniqueId val="{00000009-45AD-4401-AC6B-26400DC4BA55}"/>
-              </c:ext>
-            </c:extLst>
           </c:dPt>
-          <c:dLbls>
-            <c:numFmt formatCode="0.0&quot;%&quot;" sourceLinked="0"/>
-            <c:spPr>
-              <a:noFill/>
-              <a:ln>
-                <a:noFill/>
-              </a:ln>
-              <a:effectLst/>
-            </c:spPr>
-            <c:txPr>
-              <a:bodyPr/>
-              <a:lstStyle/>
-              <a:p>
-                <a:pPr>
-                  <a:defRPr sz="1000"/>
-                </a:pPr>
-                <a:endParaRPr lang="ko-KR"/>
-              </a:p>
-            </c:txPr>
-            <c:dLblPos val="outEnd"/>
-            <c:showLegendKey val="0"/>
-            <c:showVal val="1"/>
-            <c:showCatName val="0"/>
-            <c:showSerName val="0"/>
-            <c:showPercent val="0"/>
-            <c:showBubbleSize val="0"/>
-            <c:showLeaderLines val="1"/>
-            <c:extLst>
-              <c:ext xmlns:c15="http://schemas.microsoft.com/office/drawing/2012/chart" uri="{CE6537A1-D6FC-4f65-9D91-7224C49458BB}"/>
-            </c:extLst>
-          </c:dLbls>
           <c:cat>
             <c:strRef>
               <c:f>Sheet1!$A$2:$A$6</c:f>
@@ -1264,7 +906,7 @@
                 <c:formatCode>General</c:formatCode>
                 <c:ptCount val="5"/>
                 <c:pt idx="0">
-                  <c:v>4.0999999999999996</c:v>
+                  <c:v>4.1</c:v>
                 </c:pt>
                 <c:pt idx="1">
                   <c:v>29.5</c:v>
@@ -1273,7 +915,7 @@
                   <c:v>9.1</c:v>
                 </c:pt>
                 <c:pt idx="3">
-                  <c:v>43</c:v>
+                  <c:v>43.0</c:v>
                 </c:pt>
                 <c:pt idx="4">
                   <c:v>14.3</c:v>
@@ -1281,13 +923,18 @@
               </c:numCache>
             </c:numRef>
           </c:val>
-          <c:extLst>
-            <c:ext xmlns:c16="http://schemas.microsoft.com/office/drawing/2014/chart" uri="{C3380CC4-5D6E-409C-BE32-E72D297353CC}">
-              <c16:uniqueId val="{0000000A-45AD-4401-AC6B-26400DC4BA55}"/>
-            </c:ext>
-          </c:extLst>
         </c:ser>
         <c:dLbls>
+          <c:numFmt formatCode="0.0&quot;%&quot;" sourceLinked="0"/>
+          <c:txPr>
+            <a:bodyPr/>
+            <a:lstStyle/>
+            <a:p>
+              <a:pPr>
+                <a:defRPr sz="1000"/>
+              </a:pPr>
+            </a:p>
+          </c:txPr>
           <c:dLblPos val="outEnd"/>
           <c:showLegendKey val="0"/>
           <c:showVal val="1"/>
@@ -1297,7 +944,6 @@
           <c:showBubbleSize val="0"/>
           <c:showLeaderLines val="1"/>
         </c:dLbls>
-        <c:firstSliceAng val="0"/>
       </c:pieChart>
     </c:plotArea>
     <c:legend>
@@ -1310,13 +956,10 @@
           <a:pPr>
             <a:defRPr sz="1000"/>
           </a:pPr>
-          <a:endParaRPr lang="ko-KR"/>
         </a:p>
       </c:txPr>
     </c:legend>
-    <c:plotVisOnly val="1"/>
     <c:dispBlanksAs val="gap"/>
-    <c:showDLblsOverMax val="1"/>
   </c:chart>
   <c:txPr>
     <a:bodyPr/>
@@ -1340,11 +983,8 @@
 </file>
 
 <file path=ppt/charts/chart4.xml><?xml version="1.0" encoding="utf-8"?>
-<c:chartSpace xmlns:c="http://schemas.openxmlformats.org/drawingml/2006/chart" xmlns:a="http://schemas.openxmlformats.org/drawingml/2006/main" xmlns:r="http://schemas.openxmlformats.org/officeDocument/2006/relationships" xmlns:c16r2="http://schemas.microsoft.com/office/drawing/2015/06/chart">
+<c:chartSpace xmlns:c="http://schemas.openxmlformats.org/drawingml/2006/chart" xmlns:a="http://schemas.openxmlformats.org/drawingml/2006/main" xmlns:r="http://schemas.openxmlformats.org/officeDocument/2006/relationships">
   <c:date1904 val="0"/>
-  <c:lang val="ko-KR"/>
-  <c:roundedCorners val="1"/>
-  <c:style val="2"/>
   <c:chart>
     <c:title>
       <c:tx>
@@ -1353,71 +993,25 @@
           <a:lstStyle/>
           <a:p>
             <a:r>
-              <a:rPr lang="ko-KR" altLang="en-US" sz="1100" b="1">
+              <a:rPr sz="1100" b="1">
                 <a:solidFill>
                   <a:srgbClr val="1F2D29"/>
                 </a:solidFill>
                 <a:latin typeface="Malgun Gothic"/>
               </a:rPr>
-              <a:t>첫 구매 후 기간별</a:t>
-            </a:r>
-            <a:r>
-              <a:rPr lang="en-US" altLang="ko-KR" sz="1100" b="1">
-                <a:solidFill>
-                  <a:srgbClr val="1F2D29"/>
-                </a:solidFill>
-                <a:latin typeface="Malgun Gothic"/>
-              </a:rPr>
-              <a:t>, </a:t>
-            </a:r>
-            <a:r>
-              <a:rPr lang="ko-KR" altLang="en-US" sz="1100" b="1">
-                <a:solidFill>
-                  <a:srgbClr val="1F2D29"/>
-                </a:solidFill>
-                <a:latin typeface="Malgun Gothic"/>
-              </a:rPr>
-              <a:t>아직 안 산 고객이 다음 </a:t>
-            </a:r>
-            <a:r>
-              <a:rPr lang="en-US" altLang="ko-KR" sz="1100" b="1">
-                <a:solidFill>
-                  <a:srgbClr val="1F2D29"/>
-                </a:solidFill>
-                <a:latin typeface="Malgun Gothic"/>
-              </a:rPr>
-              <a:t>90</a:t>
-            </a:r>
-            <a:r>
-              <a:rPr lang="ko-KR" altLang="en-US" sz="1100" b="1">
-                <a:solidFill>
-                  <a:srgbClr val="1F2D29"/>
-                </a:solidFill>
-                <a:latin typeface="Malgun Gothic"/>
-              </a:rPr>
-              <a:t>일 안에 다시 산 비율 </a:t>
-            </a:r>
-            <a:r>
-              <a:rPr lang="en-US" altLang="ko-KR" sz="1100" b="1">
-                <a:solidFill>
-                  <a:srgbClr val="1F2D29"/>
-                </a:solidFill>
-                <a:latin typeface="Malgun Gothic"/>
-              </a:rPr>
-              <a:t>(%)</a:t>
+              <a:t>첫 구매 후 기간별, 아직 안 산 고객이 다음 90일 안에 다시 산 비율 (%)</a:t>
             </a:r>
           </a:p>
         </c:rich>
       </c:tx>
+      <c:layout/>
       <c:overlay val="0"/>
     </c:title>
     <c:autoTitleDeleted val="0"/>
     <c:plotArea>
-      <c:layout/>
       <c:barChart>
         <c:barDir val="col"/>
         <c:grouping val="clustered"/>
-        <c:varyColors val="1"/>
         <c:ser>
           <c:idx val="0"/>
           <c:order val="0"/>
@@ -1432,115 +1026,46 @@
               </c:strCache>
             </c:strRef>
           </c:tx>
-          <c:invertIfNegative val="1"/>
           <c:dPt>
             <c:idx val="0"/>
-            <c:invertIfNegative val="1"/>
-            <c:bubble3D val="0"/>
             <c:spPr>
               <a:solidFill>
                 <a:srgbClr val="B4BFBB"/>
               </a:solidFill>
             </c:spPr>
-            <c:extLst>
-              <c:ext xmlns:c16="http://schemas.microsoft.com/office/drawing/2014/chart" uri="{C3380CC4-5D6E-409C-BE32-E72D297353CC}">
-                <c16:uniqueId val="{00000001-2EE1-4688-B356-81AE9604BD82}"/>
-              </c:ext>
-            </c:extLst>
           </c:dPt>
           <c:dPt>
             <c:idx val="1"/>
-            <c:invertIfNegative val="1"/>
-            <c:bubble3D val="0"/>
             <c:spPr>
               <a:solidFill>
                 <a:srgbClr val="B4BFBB"/>
               </a:solidFill>
             </c:spPr>
-            <c:extLst>
-              <c:ext xmlns:c16="http://schemas.microsoft.com/office/drawing/2014/chart" uri="{C3380CC4-5D6E-409C-BE32-E72D297353CC}">
-                <c16:uniqueId val="{00000003-2EE1-4688-B356-81AE9604BD82}"/>
-              </c:ext>
-            </c:extLst>
           </c:dPt>
           <c:dPt>
             <c:idx val="2"/>
-            <c:invertIfNegative val="1"/>
-            <c:bubble3D val="0"/>
             <c:spPr>
               <a:solidFill>
                 <a:srgbClr val="2A9D8F"/>
               </a:solidFill>
             </c:spPr>
-            <c:extLst>
-              <c:ext xmlns:c16="http://schemas.microsoft.com/office/drawing/2014/chart" uri="{C3380CC4-5D6E-409C-BE32-E72D297353CC}">
-                <c16:uniqueId val="{00000005-2EE1-4688-B356-81AE9604BD82}"/>
-              </c:ext>
-            </c:extLst>
           </c:dPt>
           <c:dPt>
             <c:idx val="3"/>
-            <c:invertIfNegative val="1"/>
-            <c:bubble3D val="0"/>
             <c:spPr>
               <a:solidFill>
                 <a:srgbClr val="2A9D8F"/>
               </a:solidFill>
             </c:spPr>
-            <c:extLst>
-              <c:ext xmlns:c16="http://schemas.microsoft.com/office/drawing/2014/chart" uri="{C3380CC4-5D6E-409C-BE32-E72D297353CC}">
-                <c16:uniqueId val="{00000007-2EE1-4688-B356-81AE9604BD82}"/>
-              </c:ext>
-            </c:extLst>
           </c:dPt>
           <c:dPt>
             <c:idx val="4"/>
-            <c:invertIfNegative val="1"/>
-            <c:bubble3D val="0"/>
             <c:spPr>
               <a:solidFill>
                 <a:srgbClr val="7B8F89"/>
               </a:solidFill>
             </c:spPr>
-            <c:extLst>
-              <c:ext xmlns:c16="http://schemas.microsoft.com/office/drawing/2014/chart" uri="{C3380CC4-5D6E-409C-BE32-E72D297353CC}">
-                <c16:uniqueId val="{00000009-2EE1-4688-B356-81AE9604BD82}"/>
-              </c:ext>
-            </c:extLst>
           </c:dPt>
-          <c:dLbls>
-            <c:numFmt formatCode="0.00" sourceLinked="0"/>
-            <c:spPr>
-              <a:noFill/>
-              <a:ln>
-                <a:noFill/>
-              </a:ln>
-              <a:effectLst/>
-            </c:spPr>
-            <c:txPr>
-              <a:bodyPr/>
-              <a:lstStyle/>
-              <a:p>
-                <a:pPr>
-                  <a:defRPr sz="1000"/>
-                </a:pPr>
-                <a:endParaRPr lang="ko-KR"/>
-              </a:p>
-            </c:txPr>
-            <c:dLblPos val="outEnd"/>
-            <c:showLegendKey val="0"/>
-            <c:showVal val="1"/>
-            <c:showCatName val="0"/>
-            <c:showSerName val="0"/>
-            <c:showPercent val="0"/>
-            <c:showBubbleSize val="0"/>
-            <c:showLeaderLines val="0"/>
-            <c:extLst>
-              <c:ext xmlns:c15="http://schemas.microsoft.com/office/drawing/2012/chart" uri="{CE6537A1-D6FC-4f65-9D91-7224C49458BB}">
-                <c15:showLeaderLines val="0"/>
-              </c:ext>
-            </c:extLst>
-          </c:dLbls>
           <c:cat>
             <c:strRef>
               <c:f>Sheet1!$A$2:$A$6</c:f>
@@ -1580,7 +1105,7 @@
                   <c:v>0.71</c:v>
                 </c:pt>
                 <c:pt idx="3">
-                  <c:v>0.57999999999999996</c:v>
+                  <c:v>0.58</c:v>
                 </c:pt>
                 <c:pt idx="4">
                   <c:v>0.37</c:v>
@@ -1588,13 +1113,18 @@
               </c:numCache>
             </c:numRef>
           </c:val>
-          <c:extLst>
-            <c:ext xmlns:c16="http://schemas.microsoft.com/office/drawing/2014/chart" uri="{C3380CC4-5D6E-409C-BE32-E72D297353CC}">
-              <c16:uniqueId val="{0000000A-2EE1-4688-B356-81AE9604BD82}"/>
-            </c:ext>
-          </c:extLst>
         </c:ser>
         <c:dLbls>
+          <c:numFmt formatCode="0.00" sourceLinked="0"/>
+          <c:txPr>
+            <a:bodyPr/>
+            <a:lstStyle/>
+            <a:p>
+              <a:pPr>
+                <a:defRPr sz="1000"/>
+              </a:pPr>
+            </a:p>
+          </c:txPr>
           <c:dLblPos val="outEnd"/>
           <c:showLegendKey val="0"/>
           <c:showVal val="1"/>
@@ -1602,6 +1132,7 @@
           <c:showSerName val="0"/>
           <c:showPercent val="0"/>
           <c:showBubbleSize val="0"/>
+          <c:showLeaderLines val="1"/>
         </c:dLbls>
         <c:gapWidth val="45"/>
         <c:axId val="-2068027336"/>
@@ -1614,7 +1145,6 @@
         </c:scaling>
         <c:delete val="0"/>
         <c:axPos val="b"/>
-        <c:numFmt formatCode="General" sourceLinked="0"/>
         <c:majorTickMark val="out"/>
         <c:minorTickMark val="none"/>
         <c:tickLblPos val="nextTo"/>
@@ -1632,7 +1162,6 @@
             <a:pPr>
               <a:defRPr sz="1000"/>
             </a:pPr>
-            <a:endParaRPr lang="ko-KR"/>
           </a:p>
         </c:txPr>
         <c:crossAx val="-2113994440"/>
@@ -1645,24 +1174,19 @@
       <c:valAx>
         <c:axId val="-2113994440"/>
         <c:scaling>
-          <c:orientation val="minMax"/>
           <c:max val="1.7"/>
-          <c:min val="0"/>
+          <c:min val="0.0"/>
         </c:scaling>
-        <c:delete val="1"/>
+        <c:delete/>
         <c:axPos val="l"/>
-        <c:numFmt formatCode="General" sourceLinked="1"/>
         <c:majorTickMark val="out"/>
         <c:minorTickMark val="none"/>
         <c:tickLblPos val="nextTo"/>
         <c:crossAx val="-2068027336"/>
         <c:crosses val="autoZero"/>
-        <c:crossBetween val="between"/>
       </c:valAx>
     </c:plotArea>
-    <c:plotVisOnly val="1"/>
     <c:dispBlanksAs val="gap"/>
-    <c:showDLblsOverMax val="1"/>
   </c:chart>
   <c:txPr>
     <a:bodyPr/>
@@ -1686,7 +1210,7 @@
 </file>
 
 <file path=ppt/notesMasters/notesMaster1.xml><?xml version="1.0" encoding="utf-8"?>
-<p:notesMaster xmlns:a="http://schemas.openxmlformats.org/drawingml/2006/main" xmlns:r="http://schemas.openxmlformats.org/officeDocument/2006/relationships" xmlns:p="http://schemas.openxmlformats.org/presentationml/2006/main">
+<p:notesMaster xmlns:a="http://schemas.openxmlformats.org/drawingml/2006/main" xmlns:p="http://schemas.openxmlformats.org/presentationml/2006/main" xmlns:r="http://schemas.openxmlformats.org/officeDocument/2006/relationships">
   <p:cSld>
     <p:bg>
       <p:bgRef idx="1001">
@@ -1707,16 +1231,241 @@
           <a:chExt cx="0" cy="0"/>
         </a:xfrm>
       </p:grpSpPr>
+      <p:sp>
+        <p:nvSpPr>
+          <p:cNvPr id="2" name="Header Placeholder 1"/>
+          <p:cNvSpPr>
+            <a:spLocks noGrp="1"/>
+          </p:cNvSpPr>
+          <p:nvPr>
+            <p:ph type="hdr" sz="quarter"/>
+          </p:nvPr>
+        </p:nvSpPr>
+        <p:spPr>
+          <a:xfrm>
+            <a:off x="0" y="0"/>
+            <a:ext cx="2971800" cy="457200"/>
+          </a:xfrm>
+          <a:prstGeom prst="rect">
+            <a:avLst/>
+          </a:prstGeom>
+        </p:spPr>
+        <p:txBody>
+          <a:bodyPr vert="horz" lIns="91440" tIns="45720" rIns="91440" bIns="45720" rtlCol="0"/>
+          <a:lstStyle>
+            <a:lvl1pPr algn="l">
+              <a:defRPr sz="1200"/>
+            </a:lvl1pPr>
+          </a:lstStyle>
+          <a:p>
+            <a:endParaRPr lang="en-US"/>
+          </a:p>
+        </p:txBody>
+      </p:sp>
+      <p:sp>
+        <p:nvSpPr>
+          <p:cNvPr id="3" name="Date Placeholder 2"/>
+          <p:cNvSpPr>
+            <a:spLocks noGrp="1"/>
+          </p:cNvSpPr>
+          <p:nvPr>
+            <p:ph type="dt" idx="1"/>
+          </p:nvPr>
+        </p:nvSpPr>
+        <p:spPr>
+          <a:xfrm>
+            <a:off x="3884613" y="0"/>
+            <a:ext cx="2971800" cy="457200"/>
+          </a:xfrm>
+          <a:prstGeom prst="rect">
+            <a:avLst/>
+          </a:prstGeom>
+        </p:spPr>
+        <p:txBody>
+          <a:bodyPr vert="horz" lIns="91440" tIns="45720" rIns="91440" bIns="45720" rtlCol="0"/>
+          <a:lstStyle>
+            <a:lvl1pPr algn="r">
+              <a:defRPr sz="1200"/>
+            </a:lvl1pPr>
+          </a:lstStyle>
+          <a:p>
+            <a:fld id="{0F89C1C7-3DCD-1040-A9CF-14679D8B5DDD}" type="datetimeFigureOut">
+              <a:rPr lang="en-US" smtClean="0"/>
+              <a:t>10/17/16</a:t>
+            </a:fld>
+            <a:endParaRPr lang="en-US"/>
+          </a:p>
+        </p:txBody>
+      </p:sp>
+      <p:sp>
+        <p:nvSpPr>
+          <p:cNvPr id="4" name="Slide Image Placeholder 3"/>
+          <p:cNvSpPr>
+            <a:spLocks noGrp="1" noRot="1" noChangeAspect="1"/>
+          </p:cNvSpPr>
+          <p:nvPr>
+            <p:ph type="sldImg" idx="2"/>
+          </p:nvPr>
+        </p:nvSpPr>
+        <p:spPr>
+          <a:xfrm>
+            <a:off x="1143000" y="685800"/>
+            <a:ext cx="4572000" cy="3429000"/>
+          </a:xfrm>
+          <a:prstGeom prst="rect">
+            <a:avLst/>
+          </a:prstGeom>
+          <a:noFill/>
+          <a:ln w="12700">
+            <a:solidFill>
+              <a:prstClr val="black"/>
+            </a:solidFill>
+          </a:ln>
+        </p:spPr>
+        <p:txBody>
+          <a:bodyPr vert="horz" lIns="91440" tIns="45720" rIns="91440" bIns="45720" rtlCol="0" anchor="ctr"/>
+          <a:lstStyle/>
+          <a:p>
+            <a:endParaRPr lang="en-US"/>
+          </a:p>
+        </p:txBody>
+      </p:sp>
+      <p:sp>
+        <p:nvSpPr>
+          <p:cNvPr id="5" name="Notes Placeholder 4"/>
+          <p:cNvSpPr>
+            <a:spLocks noGrp="1"/>
+          </p:cNvSpPr>
+          <p:nvPr>
+            <p:ph type="body" sz="quarter" idx="3"/>
+          </p:nvPr>
+        </p:nvSpPr>
+        <p:spPr>
+          <a:xfrm>
+            <a:off x="685800" y="4343400"/>
+            <a:ext cx="5486400" cy="4114800"/>
+          </a:xfrm>
+          <a:prstGeom prst="rect">
+            <a:avLst/>
+          </a:prstGeom>
+        </p:spPr>
+        <p:txBody>
+          <a:bodyPr vert="horz" lIns="91440" tIns="45720" rIns="91440" bIns="45720" rtlCol="0"/>
+          <a:lstStyle/>
+          <a:p>
+            <a:pPr lvl="0"/>
+            <a:r>
+              <a:rPr lang="en-US" smtClean="0"/>
+              <a:t>Click to edit Master text styles</a:t>
+            </a:r>
+          </a:p>
+          <a:p>
+            <a:pPr lvl="1"/>
+            <a:r>
+              <a:rPr lang="en-US" smtClean="0"/>
+              <a:t>Second level</a:t>
+            </a:r>
+          </a:p>
+          <a:p>
+            <a:pPr lvl="2"/>
+            <a:r>
+              <a:rPr lang="en-US" smtClean="0"/>
+              <a:t>Third level</a:t>
+            </a:r>
+          </a:p>
+          <a:p>
+            <a:pPr lvl="3"/>
+            <a:r>
+              <a:rPr lang="en-US" smtClean="0"/>
+              <a:t>Fourth level</a:t>
+            </a:r>
+          </a:p>
+          <a:p>
+            <a:pPr lvl="4"/>
+            <a:r>
+              <a:rPr lang="en-US" smtClean="0"/>
+              <a:t>Fifth level</a:t>
+            </a:r>
+            <a:endParaRPr lang="en-US"/>
+          </a:p>
+        </p:txBody>
+      </p:sp>
+      <p:sp>
+        <p:nvSpPr>
+          <p:cNvPr id="6" name="Footer Placeholder 5"/>
+          <p:cNvSpPr>
+            <a:spLocks noGrp="1"/>
+          </p:cNvSpPr>
+          <p:nvPr>
+            <p:ph type="ftr" sz="quarter" idx="4"/>
+          </p:nvPr>
+        </p:nvSpPr>
+        <p:spPr>
+          <a:xfrm>
+            <a:off x="0" y="8685213"/>
+            <a:ext cx="2971800" cy="457200"/>
+          </a:xfrm>
+          <a:prstGeom prst="rect">
+            <a:avLst/>
+          </a:prstGeom>
+        </p:spPr>
+        <p:txBody>
+          <a:bodyPr vert="horz" lIns="91440" tIns="45720" rIns="91440" bIns="45720" rtlCol="0" anchor="b"/>
+          <a:lstStyle>
+            <a:lvl1pPr algn="l">
+              <a:defRPr sz="1200"/>
+            </a:lvl1pPr>
+          </a:lstStyle>
+          <a:p>
+            <a:endParaRPr lang="en-US"/>
+          </a:p>
+        </p:txBody>
+      </p:sp>
+      <p:sp>
+        <p:nvSpPr>
+          <p:cNvPr id="7" name="Slide Number Placeholder 6"/>
+          <p:cNvSpPr>
+            <a:spLocks noGrp="1"/>
+          </p:cNvSpPr>
+          <p:nvPr>
+            <p:ph type="sldNum" sz="quarter" idx="5"/>
+          </p:nvPr>
+        </p:nvSpPr>
+        <p:spPr>
+          <a:xfrm>
+            <a:off x="3884613" y="8685213"/>
+            <a:ext cx="2971800" cy="457200"/>
+          </a:xfrm>
+          <a:prstGeom prst="rect">
+            <a:avLst/>
+          </a:prstGeom>
+        </p:spPr>
+        <p:txBody>
+          <a:bodyPr vert="horz" lIns="91440" tIns="45720" rIns="91440" bIns="45720" rtlCol="0" anchor="b"/>
+          <a:lstStyle>
+            <a:lvl1pPr algn="r">
+              <a:defRPr sz="1200"/>
+            </a:lvl1pPr>
+          </a:lstStyle>
+          <a:p>
+            <a:fld id="{BB5E49A5-4136-284D-997B-48E1D791AD67}" type="slidenum">
+              <a:rPr lang="en-US" smtClean="0"/>
+              <a:t>‹#›</a:t>
+            </a:fld>
+            <a:endParaRPr lang="en-US"/>
+          </a:p>
+        </p:txBody>
+      </p:sp>
     </p:spTree>
     <p:extLst>
       <p:ext uri="{BB962C8B-B14F-4D97-AF65-F5344CB8AC3E}">
-        <p14:creationId xmlns:p14="http://schemas.microsoft.com/office/powerpoint/2010/main" val="114859850"/>
+        <p14:creationId xmlns:p14="http://schemas.microsoft.com/office/powerpoint/2010/main" val="2623252185"/>
       </p:ext>
     </p:extLst>
   </p:cSld>
   <p:clrMap bg1="lt1" tx1="dk1" bg2="lt2" tx2="dk2" accent1="accent1" accent2="accent2" accent3="accent3" accent4="accent4" accent5="accent5" accent6="accent6" hlink="hlink" folHlink="folHlink"/>
   <p:notesStyle>
-    <a:lvl1pPr marL="0" algn="l" defTabSz="914400" rtl="0" eaLnBrk="1" latinLnBrk="1" hangingPunct="1">
+    <a:lvl1pPr marL="0" algn="l" defTabSz="457200" rtl="0" eaLnBrk="1" latinLnBrk="0" hangingPunct="1">
       <a:defRPr sz="1200" kern="1200">
         <a:solidFill>
           <a:schemeClr val="tx1"/>
@@ -1726,7 +1475,7 @@
         <a:cs typeface="+mn-cs"/>
       </a:defRPr>
     </a:lvl1pPr>
-    <a:lvl2pPr marL="457200" algn="l" defTabSz="914400" rtl="0" eaLnBrk="1" latinLnBrk="1" hangingPunct="1">
+    <a:lvl2pPr marL="457200" algn="l" defTabSz="457200" rtl="0" eaLnBrk="1" latinLnBrk="0" hangingPunct="1">
       <a:defRPr sz="1200" kern="1200">
         <a:solidFill>
           <a:schemeClr val="tx1"/>
@@ -1736,7 +1485,7 @@
         <a:cs typeface="+mn-cs"/>
       </a:defRPr>
     </a:lvl2pPr>
-    <a:lvl3pPr marL="914400" algn="l" defTabSz="914400" rtl="0" eaLnBrk="1" latinLnBrk="1" hangingPunct="1">
+    <a:lvl3pPr marL="914400" algn="l" defTabSz="457200" rtl="0" eaLnBrk="1" latinLnBrk="0" hangingPunct="1">
       <a:defRPr sz="1200" kern="1200">
         <a:solidFill>
           <a:schemeClr val="tx1"/>
@@ -1746,7 +1495,7 @@
         <a:cs typeface="+mn-cs"/>
       </a:defRPr>
     </a:lvl3pPr>
-    <a:lvl4pPr marL="1371600" algn="l" defTabSz="914400" rtl="0" eaLnBrk="1" latinLnBrk="1" hangingPunct="1">
+    <a:lvl4pPr marL="1371600" algn="l" defTabSz="457200" rtl="0" eaLnBrk="1" latinLnBrk="0" hangingPunct="1">
       <a:defRPr sz="1200" kern="1200">
         <a:solidFill>
           <a:schemeClr val="tx1"/>
@@ -1756,7 +1505,7 @@
         <a:cs typeface="+mn-cs"/>
       </a:defRPr>
     </a:lvl4pPr>
-    <a:lvl5pPr marL="1828800" algn="l" defTabSz="914400" rtl="0" eaLnBrk="1" latinLnBrk="1" hangingPunct="1">
+    <a:lvl5pPr marL="1828800" algn="l" defTabSz="457200" rtl="0" eaLnBrk="1" latinLnBrk="0" hangingPunct="1">
       <a:defRPr sz="1200" kern="1200">
         <a:solidFill>
           <a:schemeClr val="tx1"/>
@@ -1766,7 +1515,7 @@
         <a:cs typeface="+mn-cs"/>
       </a:defRPr>
     </a:lvl5pPr>
-    <a:lvl6pPr marL="2286000" algn="l" defTabSz="914400" rtl="0" eaLnBrk="1" latinLnBrk="1" hangingPunct="1">
+    <a:lvl6pPr marL="2286000" algn="l" defTabSz="457200" rtl="0" eaLnBrk="1" latinLnBrk="0" hangingPunct="1">
       <a:defRPr sz="1200" kern="1200">
         <a:solidFill>
           <a:schemeClr val="tx1"/>
@@ -1776,7 +1525,7 @@
         <a:cs typeface="+mn-cs"/>
       </a:defRPr>
     </a:lvl6pPr>
-    <a:lvl7pPr marL="2743200" algn="l" defTabSz="914400" rtl="0" eaLnBrk="1" latinLnBrk="1" hangingPunct="1">
+    <a:lvl7pPr marL="2743200" algn="l" defTabSz="457200" rtl="0" eaLnBrk="1" latinLnBrk="0" hangingPunct="1">
       <a:defRPr sz="1200" kern="1200">
         <a:solidFill>
           <a:schemeClr val="tx1"/>
@@ -1786,7 +1535,7 @@
         <a:cs typeface="+mn-cs"/>
       </a:defRPr>
     </a:lvl7pPr>
-    <a:lvl8pPr marL="3200400" algn="l" defTabSz="914400" rtl="0" eaLnBrk="1" latinLnBrk="1" hangingPunct="1">
+    <a:lvl8pPr marL="3200400" algn="l" defTabSz="457200" rtl="0" eaLnBrk="1" latinLnBrk="0" hangingPunct="1">
       <a:defRPr sz="1200" kern="1200">
         <a:solidFill>
           <a:schemeClr val="tx1"/>
@@ -1796,7 +1545,7 @@
         <a:cs typeface="+mn-cs"/>
       </a:defRPr>
     </a:lvl8pPr>
-    <a:lvl9pPr marL="3657600" algn="l" defTabSz="914400" rtl="0" eaLnBrk="1" latinLnBrk="1" hangingPunct="1">
+    <a:lvl9pPr marL="3657600" algn="l" defTabSz="457200" rtl="0" eaLnBrk="1" latinLnBrk="0" hangingPunct="1">
       <a:defRPr sz="1200" kern="1200">
         <a:solidFill>
           <a:schemeClr val="tx1"/>
@@ -1811,7 +1560,7 @@
 </file>
 
 <file path=ppt/notesSlides/notesSlide1.xml><?xml version="1.0" encoding="utf-8"?>
-<p:notes xmlns:a="http://schemas.openxmlformats.org/drawingml/2006/main" xmlns:r="http://schemas.openxmlformats.org/officeDocument/2006/relationships" xmlns:p="http://schemas.openxmlformats.org/presentationml/2006/main">
+<p:notes xmlns:a="http://schemas.openxmlformats.org/drawingml/2006/main" xmlns:p="http://schemas.openxmlformats.org/presentationml/2006/main" xmlns:r="http://schemas.openxmlformats.org/officeDocument/2006/relationships">
   <p:cSld>
     <p:spTree>
       <p:nvGrpSpPr>
@@ -1831,7 +1580,7 @@
         <p:nvSpPr>
           <p:cNvPr id="2" name="Slide Image Placeholder 1"/>
           <p:cNvSpPr>
-            <a:spLocks noGrp="1" noRot="1" noChangeAspect="1"/>
+            <a:spLocks noGrp="1"/>
           </p:cNvSpPr>
           <p:nvPr>
             <p:ph type="sldImg" idx="2"/>
@@ -1846,7 +1595,7 @@
             <a:spLocks noGrp="1"/>
           </p:cNvSpPr>
           <p:nvPr>
-            <p:ph type="body" sz="quarter" idx="3"/>
+            <p:ph type="body" idx="3" sz="quarter"/>
           </p:nvPr>
         </p:nvSpPr>
         <p:spPr/>
@@ -1867,7 +1616,7 @@
             <a:spLocks noGrp="1"/>
           </p:cNvSpPr>
           <p:nvPr>
-            <p:ph type="sldNum" sz="quarter" idx="5"/>
+            <p:ph type="sldNum" idx="5" sz="quarter"/>
           </p:nvPr>
         </p:nvSpPr>
         <p:spPr/>
@@ -1881,7 +1630,7 @@
 </file>
 
 <file path=ppt/notesSlides/notesSlide2.xml><?xml version="1.0" encoding="utf-8"?>
-<p:notes xmlns:a="http://schemas.openxmlformats.org/drawingml/2006/main" xmlns:r="http://schemas.openxmlformats.org/officeDocument/2006/relationships" xmlns:p="http://schemas.openxmlformats.org/presentationml/2006/main">
+<p:notes xmlns:a="http://schemas.openxmlformats.org/drawingml/2006/main" xmlns:p="http://schemas.openxmlformats.org/presentationml/2006/main" xmlns:r="http://schemas.openxmlformats.org/officeDocument/2006/relationships">
   <p:cSld>
     <p:spTree>
       <p:nvGrpSpPr>
@@ -1901,7 +1650,7 @@
         <p:nvSpPr>
           <p:cNvPr id="2" name="Slide Image Placeholder 1"/>
           <p:cNvSpPr>
-            <a:spLocks noGrp="1" noRot="1" noChangeAspect="1"/>
+            <a:spLocks noGrp="1"/>
           </p:cNvSpPr>
           <p:nvPr>
             <p:ph type="sldImg" idx="2"/>
@@ -1916,7 +1665,7 @@
             <a:spLocks noGrp="1"/>
           </p:cNvSpPr>
           <p:nvPr>
-            <p:ph type="body" sz="quarter" idx="3"/>
+            <p:ph type="body" idx="3" sz="quarter"/>
           </p:nvPr>
         </p:nvSpPr>
         <p:spPr/>
@@ -1937,7 +1686,7 @@
             <a:spLocks noGrp="1"/>
           </p:cNvSpPr>
           <p:nvPr>
-            <p:ph type="sldNum" sz="quarter" idx="5"/>
+            <p:ph type="sldNum" idx="5" sz="quarter"/>
           </p:nvPr>
         </p:nvSpPr>
         <p:spPr/>
@@ -1951,7 +1700,7 @@
 </file>
 
 <file path=ppt/notesSlides/notesSlide3.xml><?xml version="1.0" encoding="utf-8"?>
-<p:notes xmlns:a="http://schemas.openxmlformats.org/drawingml/2006/main" xmlns:r="http://schemas.openxmlformats.org/officeDocument/2006/relationships" xmlns:p="http://schemas.openxmlformats.org/presentationml/2006/main">
+<p:notes xmlns:a="http://schemas.openxmlformats.org/drawingml/2006/main" xmlns:p="http://schemas.openxmlformats.org/presentationml/2006/main" xmlns:r="http://schemas.openxmlformats.org/officeDocument/2006/relationships">
   <p:cSld>
     <p:spTree>
       <p:nvGrpSpPr>
@@ -1971,7 +1720,7 @@
         <p:nvSpPr>
           <p:cNvPr id="2" name="Slide Image Placeholder 1"/>
           <p:cNvSpPr>
-            <a:spLocks noGrp="1" noRot="1" noChangeAspect="1"/>
+            <a:spLocks noGrp="1"/>
           </p:cNvSpPr>
           <p:nvPr>
             <p:ph type="sldImg" idx="2"/>
@@ -1986,7 +1735,7 @@
             <a:spLocks noGrp="1"/>
           </p:cNvSpPr>
           <p:nvPr>
-            <p:ph type="body" sz="quarter" idx="3"/>
+            <p:ph type="body" idx="3" sz="quarter"/>
           </p:nvPr>
         </p:nvSpPr>
         <p:spPr/>
@@ -2007,7 +1756,7 @@
             <a:spLocks noGrp="1"/>
           </p:cNvSpPr>
           <p:nvPr>
-            <p:ph type="sldNum" sz="quarter" idx="5"/>
+            <p:ph type="sldNum" idx="5" sz="quarter"/>
           </p:nvPr>
         </p:nvSpPr>
         <p:spPr/>
@@ -2021,7 +1770,7 @@
 </file>
 
 <file path=ppt/notesSlides/notesSlide4.xml><?xml version="1.0" encoding="utf-8"?>
-<p:notes xmlns:a="http://schemas.openxmlformats.org/drawingml/2006/main" xmlns:r="http://schemas.openxmlformats.org/officeDocument/2006/relationships" xmlns:p="http://schemas.openxmlformats.org/presentationml/2006/main">
+<p:notes xmlns:a="http://schemas.openxmlformats.org/drawingml/2006/main" xmlns:p="http://schemas.openxmlformats.org/presentationml/2006/main" xmlns:r="http://schemas.openxmlformats.org/officeDocument/2006/relationships">
   <p:cSld>
     <p:spTree>
       <p:nvGrpSpPr>
@@ -2041,7 +1790,7 @@
         <p:nvSpPr>
           <p:cNvPr id="2" name="Slide Image Placeholder 1"/>
           <p:cNvSpPr>
-            <a:spLocks noGrp="1" noRot="1" noChangeAspect="1"/>
+            <a:spLocks noGrp="1"/>
           </p:cNvSpPr>
           <p:nvPr>
             <p:ph type="sldImg" idx="2"/>
@@ -2056,7 +1805,7 @@
             <a:spLocks noGrp="1"/>
           </p:cNvSpPr>
           <p:nvPr>
-            <p:ph type="body" sz="quarter" idx="3"/>
+            <p:ph type="body" idx="3" sz="quarter"/>
           </p:nvPr>
         </p:nvSpPr>
         <p:spPr/>
@@ -2077,7 +1826,7 @@
             <a:spLocks noGrp="1"/>
           </p:cNvSpPr>
           <p:nvPr>
-            <p:ph type="sldNum" sz="quarter" idx="5"/>
+            <p:ph type="sldNum" idx="5" sz="quarter"/>
           </p:nvPr>
         </p:nvSpPr>
         <p:spPr/>
@@ -2091,7 +1840,7 @@
 </file>
 
 <file path=ppt/notesSlides/notesSlide5.xml><?xml version="1.0" encoding="utf-8"?>
-<p:notes xmlns:a="http://schemas.openxmlformats.org/drawingml/2006/main" xmlns:r="http://schemas.openxmlformats.org/officeDocument/2006/relationships" xmlns:p="http://schemas.openxmlformats.org/presentationml/2006/main">
+<p:notes xmlns:a="http://schemas.openxmlformats.org/drawingml/2006/main" xmlns:p="http://schemas.openxmlformats.org/presentationml/2006/main" xmlns:r="http://schemas.openxmlformats.org/officeDocument/2006/relationships">
   <p:cSld>
     <p:spTree>
       <p:nvGrpSpPr>
@@ -2111,7 +1860,7 @@
         <p:nvSpPr>
           <p:cNvPr id="2" name="Slide Image Placeholder 1"/>
           <p:cNvSpPr>
-            <a:spLocks noGrp="1" noRot="1" noChangeAspect="1"/>
+            <a:spLocks noGrp="1"/>
           </p:cNvSpPr>
           <p:nvPr>
             <p:ph type="sldImg" idx="2"/>
@@ -2126,7 +1875,7 @@
             <a:spLocks noGrp="1"/>
           </p:cNvSpPr>
           <p:nvPr>
-            <p:ph type="body" sz="quarter" idx="3"/>
+            <p:ph type="body" idx="3" sz="quarter"/>
           </p:nvPr>
         </p:nvSpPr>
         <p:spPr/>
@@ -2147,7 +1896,7 @@
             <a:spLocks noGrp="1"/>
           </p:cNvSpPr>
           <p:nvPr>
-            <p:ph type="sldNum" sz="quarter" idx="5"/>
+            <p:ph type="sldNum" idx="5" sz="quarter"/>
           </p:nvPr>
         </p:nvSpPr>
         <p:spPr/>
@@ -2161,7 +1910,7 @@
 </file>
 
 <file path=ppt/notesSlides/notesSlide6.xml><?xml version="1.0" encoding="utf-8"?>
-<p:notes xmlns:a="http://schemas.openxmlformats.org/drawingml/2006/main" xmlns:r="http://schemas.openxmlformats.org/officeDocument/2006/relationships" xmlns:p="http://schemas.openxmlformats.org/presentationml/2006/main">
+<p:notes xmlns:a="http://schemas.openxmlformats.org/drawingml/2006/main" xmlns:p="http://schemas.openxmlformats.org/presentationml/2006/main" xmlns:r="http://schemas.openxmlformats.org/officeDocument/2006/relationships">
   <p:cSld>
     <p:spTree>
       <p:nvGrpSpPr>
@@ -2181,7 +1930,7 @@
         <p:nvSpPr>
           <p:cNvPr id="2" name="Slide Image Placeholder 1"/>
           <p:cNvSpPr>
-            <a:spLocks noGrp="1" noRot="1" noChangeAspect="1"/>
+            <a:spLocks noGrp="1"/>
           </p:cNvSpPr>
           <p:nvPr>
             <p:ph type="sldImg" idx="2"/>
@@ -2196,7 +1945,7 @@
             <a:spLocks noGrp="1"/>
           </p:cNvSpPr>
           <p:nvPr>
-            <p:ph type="body" sz="quarter" idx="3"/>
+            <p:ph type="body" idx="3" sz="quarter"/>
           </p:nvPr>
         </p:nvSpPr>
         <p:spPr/>
@@ -2217,7 +1966,7 @@
             <a:spLocks noGrp="1"/>
           </p:cNvSpPr>
           <p:nvPr>
-            <p:ph type="sldNum" sz="quarter" idx="5"/>
+            <p:ph type="sldNum" idx="5" sz="quarter"/>
           </p:nvPr>
         </p:nvSpPr>
         <p:spPr/>
@@ -2231,7 +1980,7 @@
 </file>
 
 <file path=ppt/notesSlides/notesSlide7.xml><?xml version="1.0" encoding="utf-8"?>
-<p:notes xmlns:a="http://schemas.openxmlformats.org/drawingml/2006/main" xmlns:r="http://schemas.openxmlformats.org/officeDocument/2006/relationships" xmlns:p="http://schemas.openxmlformats.org/presentationml/2006/main">
+<p:notes xmlns:a="http://schemas.openxmlformats.org/drawingml/2006/main" xmlns:p="http://schemas.openxmlformats.org/presentationml/2006/main" xmlns:r="http://schemas.openxmlformats.org/officeDocument/2006/relationships">
   <p:cSld>
     <p:spTree>
       <p:nvGrpSpPr>
@@ -2251,7 +2000,7 @@
         <p:nvSpPr>
           <p:cNvPr id="2" name="Slide Image Placeholder 1"/>
           <p:cNvSpPr>
-            <a:spLocks noGrp="1" noRot="1" noChangeAspect="1"/>
+            <a:spLocks noGrp="1"/>
           </p:cNvSpPr>
           <p:nvPr>
             <p:ph type="sldImg" idx="2"/>
@@ -2266,7 +2015,7 @@
             <a:spLocks noGrp="1"/>
           </p:cNvSpPr>
           <p:nvPr>
-            <p:ph type="body" sz="quarter" idx="3"/>
+            <p:ph type="body" idx="3" sz="quarter"/>
           </p:nvPr>
         </p:nvSpPr>
         <p:spPr/>
@@ -2287,7 +2036,7 @@
             <a:spLocks noGrp="1"/>
           </p:cNvSpPr>
           <p:nvPr>
-            <p:ph type="sldNum" sz="quarter" idx="5"/>
+            <p:ph type="sldNum" idx="5" sz="quarter"/>
           </p:nvPr>
         </p:nvSpPr>
         <p:spPr/>
@@ -2301,7 +2050,7 @@
 </file>
 
 <file path=ppt/notesSlides/notesSlide8.xml><?xml version="1.0" encoding="utf-8"?>
-<p:notes xmlns:a="http://schemas.openxmlformats.org/drawingml/2006/main" xmlns:r="http://schemas.openxmlformats.org/officeDocument/2006/relationships" xmlns:p="http://schemas.openxmlformats.org/presentationml/2006/main">
+<p:notes xmlns:a="http://schemas.openxmlformats.org/drawingml/2006/main" xmlns:p="http://schemas.openxmlformats.org/presentationml/2006/main" xmlns:r="http://schemas.openxmlformats.org/officeDocument/2006/relationships">
   <p:cSld>
     <p:spTree>
       <p:nvGrpSpPr>
@@ -2321,7 +2070,7 @@
         <p:nvSpPr>
           <p:cNvPr id="2" name="Slide Image Placeholder 1"/>
           <p:cNvSpPr>
-            <a:spLocks noGrp="1" noRot="1" noChangeAspect="1"/>
+            <a:spLocks noGrp="1"/>
           </p:cNvSpPr>
           <p:nvPr>
             <p:ph type="sldImg" idx="2"/>
@@ -2336,7 +2085,7 @@
             <a:spLocks noGrp="1"/>
           </p:cNvSpPr>
           <p:nvPr>
-            <p:ph type="body" sz="quarter" idx="3"/>
+            <p:ph type="body" idx="3" sz="quarter"/>
           </p:nvPr>
         </p:nvSpPr>
         <p:spPr/>
@@ -2357,7 +2106,7 @@
             <a:spLocks noGrp="1"/>
           </p:cNvSpPr>
           <p:nvPr>
-            <p:ph type="sldNum" sz="quarter" idx="5"/>
+            <p:ph type="sldNum" idx="5" sz="quarter"/>
           </p:nvPr>
         </p:nvSpPr>
         <p:spPr/>
@@ -2371,7 +2120,7 @@
 </file>
 
 <file path=ppt/notesSlides/notesSlide9.xml><?xml version="1.0" encoding="utf-8"?>
-<p:notes xmlns:a="http://schemas.openxmlformats.org/drawingml/2006/main" xmlns:r="http://schemas.openxmlformats.org/officeDocument/2006/relationships" xmlns:p="http://schemas.openxmlformats.org/presentationml/2006/main">
+<p:notes xmlns:a="http://schemas.openxmlformats.org/drawingml/2006/main" xmlns:p="http://schemas.openxmlformats.org/presentationml/2006/main" xmlns:r="http://schemas.openxmlformats.org/officeDocument/2006/relationships">
   <p:cSld>
     <p:spTree>
       <p:nvGrpSpPr>
@@ -2391,7 +2140,7 @@
         <p:nvSpPr>
           <p:cNvPr id="2" name="Slide Image Placeholder 1"/>
           <p:cNvSpPr>
-            <a:spLocks noGrp="1" noRot="1" noChangeAspect="1"/>
+            <a:spLocks noGrp="1"/>
           </p:cNvSpPr>
           <p:nvPr>
             <p:ph type="sldImg" idx="2"/>
@@ -2406,7 +2155,7 @@
             <a:spLocks noGrp="1"/>
           </p:cNvSpPr>
           <p:nvPr>
-            <p:ph type="body" sz="quarter" idx="3"/>
+            <p:ph type="body" idx="3" sz="quarter"/>
           </p:nvPr>
         </p:nvSpPr>
         <p:spPr/>
@@ -2427,7 +2176,7 @@
             <a:spLocks noGrp="1"/>
           </p:cNvSpPr>
           <p:nvPr>
-            <p:ph type="sldNum" sz="quarter" idx="5"/>
+            <p:ph type="sldNum" idx="5" sz="quarter"/>
           </p:nvPr>
         </p:nvSpPr>
         <p:spPr/>
@@ -2478,9 +2227,10 @@
           <a:lstStyle/>
           <a:p>
             <a:r>
-              <a:rPr lang="en-US"/>
+              <a:rPr lang="en-US" smtClean="0"/>
               <a:t>Click to edit Master title style</a:t>
             </a:r>
+            <a:endParaRPr lang="en-US"/>
           </a:p>
         </p:txBody>
       </p:sp>
@@ -2596,9 +2346,10 @@
           </a:lstStyle>
           <a:p>
             <a:r>
-              <a:rPr lang="en-US"/>
+              <a:rPr lang="en-US" smtClean="0"/>
               <a:t>Click to edit Master subtitle style</a:t>
             </a:r>
+            <a:endParaRPr lang="en-US"/>
           </a:p>
         </p:txBody>
       </p:sp>
@@ -2619,7 +2370,7 @@
           <a:p>
             <a:fld id="{5BCAD085-E8A6-8845-BD4E-CB4CCA059FC4}" type="datetimeFigureOut">
               <a:rPr lang="en-US" smtClean="0"/>
-              <a:t>10/2/2026</a:t>
+              <a:t>1/27/13</a:t>
             </a:fld>
             <a:endParaRPr lang="en-US"/>
           </a:p>
@@ -2713,9 +2464,10 @@
           <a:lstStyle/>
           <a:p>
             <a:r>
-              <a:rPr lang="en-US"/>
+              <a:rPr lang="en-US" smtClean="0"/>
               <a:t>Click to edit Master title style</a:t>
             </a:r>
+            <a:endParaRPr lang="en-US"/>
           </a:p>
         </p:txBody>
       </p:sp>
@@ -2736,37 +2488,38 @@
           <a:p>
             <a:pPr lvl="0"/>
             <a:r>
-              <a:rPr lang="en-US"/>
+              <a:rPr lang="en-US" smtClean="0"/>
               <a:t>Click to edit Master text styles</a:t>
             </a:r>
           </a:p>
           <a:p>
             <a:pPr lvl="1"/>
             <a:r>
-              <a:rPr lang="en-US"/>
+              <a:rPr lang="en-US" smtClean="0"/>
               <a:t>Second level</a:t>
             </a:r>
           </a:p>
           <a:p>
             <a:pPr lvl="2"/>
             <a:r>
-              <a:rPr lang="en-US"/>
+              <a:rPr lang="en-US" smtClean="0"/>
               <a:t>Third level</a:t>
             </a:r>
           </a:p>
           <a:p>
             <a:pPr lvl="3"/>
             <a:r>
-              <a:rPr lang="en-US"/>
+              <a:rPr lang="en-US" smtClean="0"/>
               <a:t>Fourth level</a:t>
             </a:r>
           </a:p>
           <a:p>
             <a:pPr lvl="4"/>
             <a:r>
-              <a:rPr lang="en-US"/>
+              <a:rPr lang="en-US" smtClean="0"/>
               <a:t>Fifth level</a:t>
             </a:r>
+            <a:endParaRPr lang="en-US"/>
           </a:p>
         </p:txBody>
       </p:sp>
@@ -2787,7 +2540,7 @@
           <a:p>
             <a:fld id="{5BCAD085-E8A6-8845-BD4E-CB4CCA059FC4}" type="datetimeFigureOut">
               <a:rPr lang="en-US" smtClean="0"/>
-              <a:t>10/2/2026</a:t>
+              <a:t>1/27/13</a:t>
             </a:fld>
             <a:endParaRPr lang="en-US"/>
           </a:p>
@@ -2886,9 +2639,10 @@
           <a:lstStyle/>
           <a:p>
             <a:r>
-              <a:rPr lang="en-US"/>
+              <a:rPr lang="en-US" smtClean="0"/>
               <a:t>Click to edit Master title style</a:t>
             </a:r>
+            <a:endParaRPr lang="en-US"/>
           </a:p>
         </p:txBody>
       </p:sp>
@@ -2914,37 +2668,38 @@
           <a:p>
             <a:pPr lvl="0"/>
             <a:r>
-              <a:rPr lang="en-US"/>
+              <a:rPr lang="en-US" smtClean="0"/>
               <a:t>Click to edit Master text styles</a:t>
             </a:r>
           </a:p>
           <a:p>
             <a:pPr lvl="1"/>
             <a:r>
-              <a:rPr lang="en-US"/>
+              <a:rPr lang="en-US" smtClean="0"/>
               <a:t>Second level</a:t>
             </a:r>
           </a:p>
           <a:p>
             <a:pPr lvl="2"/>
             <a:r>
-              <a:rPr lang="en-US"/>
+              <a:rPr lang="en-US" smtClean="0"/>
               <a:t>Third level</a:t>
             </a:r>
           </a:p>
           <a:p>
             <a:pPr lvl="3"/>
             <a:r>
-              <a:rPr lang="en-US"/>
+              <a:rPr lang="en-US" smtClean="0"/>
               <a:t>Fourth level</a:t>
             </a:r>
           </a:p>
           <a:p>
             <a:pPr lvl="4"/>
             <a:r>
-              <a:rPr lang="en-US"/>
+              <a:rPr lang="en-US" smtClean="0"/>
               <a:t>Fifth level</a:t>
             </a:r>
+            <a:endParaRPr lang="en-US"/>
           </a:p>
         </p:txBody>
       </p:sp>
@@ -2965,7 +2720,7 @@
           <a:p>
             <a:fld id="{5BCAD085-E8A6-8845-BD4E-CB4CCA059FC4}" type="datetimeFigureOut">
               <a:rPr lang="en-US" smtClean="0"/>
-              <a:t>10/2/2026</a:t>
+              <a:t>1/27/13</a:t>
             </a:fld>
             <a:endParaRPr lang="en-US"/>
           </a:p>
@@ -3059,9 +2814,10 @@
           <a:lstStyle/>
           <a:p>
             <a:r>
-              <a:rPr lang="en-US"/>
+              <a:rPr lang="en-US" smtClean="0"/>
               <a:t>Click to edit Master title style</a:t>
             </a:r>
+            <a:endParaRPr lang="en-US"/>
           </a:p>
         </p:txBody>
       </p:sp>
@@ -3082,37 +2838,38 @@
           <a:p>
             <a:pPr lvl="0"/>
             <a:r>
-              <a:rPr lang="en-US"/>
+              <a:rPr lang="en-US" smtClean="0"/>
               <a:t>Click to edit Master text styles</a:t>
             </a:r>
           </a:p>
           <a:p>
             <a:pPr lvl="1"/>
             <a:r>
-              <a:rPr lang="en-US"/>
+              <a:rPr lang="en-US" smtClean="0"/>
               <a:t>Second level</a:t>
             </a:r>
           </a:p>
           <a:p>
             <a:pPr lvl="2"/>
             <a:r>
-              <a:rPr lang="en-US"/>
+              <a:rPr lang="en-US" smtClean="0"/>
               <a:t>Third level</a:t>
             </a:r>
           </a:p>
           <a:p>
             <a:pPr lvl="3"/>
             <a:r>
-              <a:rPr lang="en-US"/>
+              <a:rPr lang="en-US" smtClean="0"/>
               <a:t>Fourth level</a:t>
             </a:r>
           </a:p>
           <a:p>
             <a:pPr lvl="4"/>
             <a:r>
-              <a:rPr lang="en-US"/>
+              <a:rPr lang="en-US" smtClean="0"/>
               <a:t>Fifth level</a:t>
             </a:r>
+            <a:endParaRPr lang="en-US"/>
           </a:p>
         </p:txBody>
       </p:sp>
@@ -3133,7 +2890,7 @@
           <a:p>
             <a:fld id="{5BCAD085-E8A6-8845-BD4E-CB4CCA059FC4}" type="datetimeFigureOut">
               <a:rPr lang="en-US" smtClean="0"/>
-              <a:t>10/2/2026</a:t>
+              <a:t>1/27/13</a:t>
             </a:fld>
             <a:endParaRPr lang="en-US"/>
           </a:p>
@@ -3236,9 +2993,10 @@
           </a:lstStyle>
           <a:p>
             <a:r>
-              <a:rPr lang="en-US"/>
+              <a:rPr lang="en-US" smtClean="0"/>
               <a:t>Click to edit Master title style</a:t>
             </a:r>
+            <a:endParaRPr lang="en-US"/>
           </a:p>
         </p:txBody>
       </p:sp>
@@ -3355,7 +3113,7 @@
           <a:p>
             <a:pPr lvl="0"/>
             <a:r>
-              <a:rPr lang="en-US"/>
+              <a:rPr lang="en-US" smtClean="0"/>
               <a:t>Click to edit Master text styles</a:t>
             </a:r>
           </a:p>
@@ -3378,7 +3136,7 @@
           <a:p>
             <a:fld id="{5BCAD085-E8A6-8845-BD4E-CB4CCA059FC4}" type="datetimeFigureOut">
               <a:rPr lang="en-US" smtClean="0"/>
-              <a:t>10/2/2026</a:t>
+              <a:t>1/27/13</a:t>
             </a:fld>
             <a:endParaRPr lang="en-US"/>
           </a:p>
@@ -3472,9 +3230,10 @@
           <a:lstStyle/>
           <a:p>
             <a:r>
-              <a:rPr lang="en-US"/>
+              <a:rPr lang="en-US" smtClean="0"/>
               <a:t>Click to edit Master title style</a:t>
             </a:r>
+            <a:endParaRPr lang="en-US"/>
           </a:p>
         </p:txBody>
       </p:sp>
@@ -3528,37 +3287,38 @@
           <a:p>
             <a:pPr lvl="0"/>
             <a:r>
-              <a:rPr lang="en-US"/>
+              <a:rPr lang="en-US" smtClean="0"/>
               <a:t>Click to edit Master text styles</a:t>
             </a:r>
           </a:p>
           <a:p>
             <a:pPr lvl="1"/>
             <a:r>
-              <a:rPr lang="en-US"/>
+              <a:rPr lang="en-US" smtClean="0"/>
               <a:t>Second level</a:t>
             </a:r>
           </a:p>
           <a:p>
             <a:pPr lvl="2"/>
             <a:r>
-              <a:rPr lang="en-US"/>
+              <a:rPr lang="en-US" smtClean="0"/>
               <a:t>Third level</a:t>
             </a:r>
           </a:p>
           <a:p>
             <a:pPr lvl="3"/>
             <a:r>
-              <a:rPr lang="en-US"/>
+              <a:rPr lang="en-US" smtClean="0"/>
               <a:t>Fourth level</a:t>
             </a:r>
           </a:p>
           <a:p>
             <a:pPr lvl="4"/>
             <a:r>
-              <a:rPr lang="en-US"/>
+              <a:rPr lang="en-US" smtClean="0"/>
               <a:t>Fifth level</a:t>
             </a:r>
+            <a:endParaRPr lang="en-US"/>
           </a:p>
         </p:txBody>
       </p:sp>
@@ -3612,37 +3372,38 @@
           <a:p>
             <a:pPr lvl="0"/>
             <a:r>
-              <a:rPr lang="en-US"/>
+              <a:rPr lang="en-US" smtClean="0"/>
               <a:t>Click to edit Master text styles</a:t>
             </a:r>
           </a:p>
           <a:p>
             <a:pPr lvl="1"/>
             <a:r>
-              <a:rPr lang="en-US"/>
+              <a:rPr lang="en-US" smtClean="0"/>
               <a:t>Second level</a:t>
             </a:r>
           </a:p>
           <a:p>
             <a:pPr lvl="2"/>
             <a:r>
-              <a:rPr lang="en-US"/>
+              <a:rPr lang="en-US" smtClean="0"/>
               <a:t>Third level</a:t>
             </a:r>
           </a:p>
           <a:p>
             <a:pPr lvl="3"/>
             <a:r>
-              <a:rPr lang="en-US"/>
+              <a:rPr lang="en-US" smtClean="0"/>
               <a:t>Fourth level</a:t>
             </a:r>
           </a:p>
           <a:p>
             <a:pPr lvl="4"/>
             <a:r>
-              <a:rPr lang="en-US"/>
+              <a:rPr lang="en-US" smtClean="0"/>
               <a:t>Fifth level</a:t>
             </a:r>
+            <a:endParaRPr lang="en-US"/>
           </a:p>
         </p:txBody>
       </p:sp>
@@ -3663,7 +3424,7 @@
           <a:p>
             <a:fld id="{5BCAD085-E8A6-8845-BD4E-CB4CCA059FC4}" type="datetimeFigureOut">
               <a:rPr lang="en-US" smtClean="0"/>
-              <a:t>10/2/2026</a:t>
+              <a:t>1/27/13</a:t>
             </a:fld>
             <a:endParaRPr lang="en-US"/>
           </a:p>
@@ -3761,9 +3522,10 @@
           </a:lstStyle>
           <a:p>
             <a:r>
-              <a:rPr lang="en-US"/>
+              <a:rPr lang="en-US" smtClean="0"/>
               <a:t>Click to edit Master title style</a:t>
             </a:r>
+            <a:endParaRPr lang="en-US"/>
           </a:p>
         </p:txBody>
       </p:sp>
@@ -3826,7 +3588,7 @@
           <a:p>
             <a:pPr lvl="0"/>
             <a:r>
-              <a:rPr lang="en-US"/>
+              <a:rPr lang="en-US" smtClean="0"/>
               <a:t>Click to edit Master text styles</a:t>
             </a:r>
           </a:p>
@@ -3882,37 +3644,38 @@
           <a:p>
             <a:pPr lvl="0"/>
             <a:r>
-              <a:rPr lang="en-US"/>
+              <a:rPr lang="en-US" smtClean="0"/>
               <a:t>Click to edit Master text styles</a:t>
             </a:r>
           </a:p>
           <a:p>
             <a:pPr lvl="1"/>
             <a:r>
-              <a:rPr lang="en-US"/>
+              <a:rPr lang="en-US" smtClean="0"/>
               <a:t>Second level</a:t>
             </a:r>
           </a:p>
           <a:p>
             <a:pPr lvl="2"/>
             <a:r>
-              <a:rPr lang="en-US"/>
+              <a:rPr lang="en-US" smtClean="0"/>
               <a:t>Third level</a:t>
             </a:r>
           </a:p>
           <a:p>
             <a:pPr lvl="3"/>
             <a:r>
-              <a:rPr lang="en-US"/>
+              <a:rPr lang="en-US" smtClean="0"/>
               <a:t>Fourth level</a:t>
             </a:r>
           </a:p>
           <a:p>
             <a:pPr lvl="4"/>
             <a:r>
-              <a:rPr lang="en-US"/>
+              <a:rPr lang="en-US" smtClean="0"/>
               <a:t>Fifth level</a:t>
             </a:r>
+            <a:endParaRPr lang="en-US"/>
           </a:p>
         </p:txBody>
       </p:sp>
@@ -3975,7 +3738,7 @@
           <a:p>
             <a:pPr lvl="0"/>
             <a:r>
-              <a:rPr lang="en-US"/>
+              <a:rPr lang="en-US" smtClean="0"/>
               <a:t>Click to edit Master text styles</a:t>
             </a:r>
           </a:p>
@@ -4031,37 +3794,38 @@
           <a:p>
             <a:pPr lvl="0"/>
             <a:r>
-              <a:rPr lang="en-US"/>
+              <a:rPr lang="en-US" smtClean="0"/>
               <a:t>Click to edit Master text styles</a:t>
             </a:r>
           </a:p>
           <a:p>
             <a:pPr lvl="1"/>
             <a:r>
-              <a:rPr lang="en-US"/>
+              <a:rPr lang="en-US" smtClean="0"/>
               <a:t>Second level</a:t>
             </a:r>
           </a:p>
           <a:p>
             <a:pPr lvl="2"/>
             <a:r>
-              <a:rPr lang="en-US"/>
+              <a:rPr lang="en-US" smtClean="0"/>
               <a:t>Third level</a:t>
             </a:r>
           </a:p>
           <a:p>
             <a:pPr lvl="3"/>
             <a:r>
-              <a:rPr lang="en-US"/>
+              <a:rPr lang="en-US" smtClean="0"/>
               <a:t>Fourth level</a:t>
             </a:r>
           </a:p>
           <a:p>
             <a:pPr lvl="4"/>
             <a:r>
-              <a:rPr lang="en-US"/>
+              <a:rPr lang="en-US" smtClean="0"/>
               <a:t>Fifth level</a:t>
             </a:r>
+            <a:endParaRPr lang="en-US"/>
           </a:p>
         </p:txBody>
       </p:sp>
@@ -4082,7 +3846,7 @@
           <a:p>
             <a:fld id="{5BCAD085-E8A6-8845-BD4E-CB4CCA059FC4}" type="datetimeFigureOut">
               <a:rPr lang="en-US" smtClean="0"/>
-              <a:t>10/2/2026</a:t>
+              <a:t>1/27/13</a:t>
             </a:fld>
             <a:endParaRPr lang="en-US"/>
           </a:p>
@@ -4176,9 +3940,10 @@
           <a:lstStyle/>
           <a:p>
             <a:r>
-              <a:rPr lang="en-US"/>
+              <a:rPr lang="en-US" smtClean="0"/>
               <a:t>Click to edit Master title style</a:t>
             </a:r>
+            <a:endParaRPr lang="en-US"/>
           </a:p>
         </p:txBody>
       </p:sp>
@@ -4199,7 +3964,7 @@
           <a:p>
             <a:fld id="{5BCAD085-E8A6-8845-BD4E-CB4CCA059FC4}" type="datetimeFigureOut">
               <a:rPr lang="en-US" smtClean="0"/>
-              <a:t>10/2/2026</a:t>
+              <a:t>1/27/13</a:t>
             </a:fld>
             <a:endParaRPr lang="en-US"/>
           </a:p>
@@ -4294,7 +4059,7 @@
           <a:p>
             <a:fld id="{5BCAD085-E8A6-8845-BD4E-CB4CCA059FC4}" type="datetimeFigureOut">
               <a:rPr lang="en-US" smtClean="0"/>
-              <a:t>10/2/2026</a:t>
+              <a:t>1/27/13</a:t>
             </a:fld>
             <a:endParaRPr lang="en-US"/>
           </a:p>
@@ -4397,9 +4162,10 @@
           </a:lstStyle>
           <a:p>
             <a:r>
-              <a:rPr lang="en-US"/>
+              <a:rPr lang="en-US" smtClean="0"/>
               <a:t>Click to edit Master title style</a:t>
             </a:r>
+            <a:endParaRPr lang="en-US"/>
           </a:p>
         </p:txBody>
       </p:sp>
@@ -4453,37 +4219,38 @@
           <a:p>
             <a:pPr lvl="0"/>
             <a:r>
-              <a:rPr lang="en-US"/>
+              <a:rPr lang="en-US" smtClean="0"/>
               <a:t>Click to edit Master text styles</a:t>
             </a:r>
           </a:p>
           <a:p>
             <a:pPr lvl="1"/>
             <a:r>
-              <a:rPr lang="en-US"/>
+              <a:rPr lang="en-US" smtClean="0"/>
               <a:t>Second level</a:t>
             </a:r>
           </a:p>
           <a:p>
             <a:pPr lvl="2"/>
             <a:r>
-              <a:rPr lang="en-US"/>
+              <a:rPr lang="en-US" smtClean="0"/>
               <a:t>Third level</a:t>
             </a:r>
           </a:p>
           <a:p>
             <a:pPr lvl="3"/>
             <a:r>
-              <a:rPr lang="en-US"/>
+              <a:rPr lang="en-US" smtClean="0"/>
               <a:t>Fourth level</a:t>
             </a:r>
           </a:p>
           <a:p>
             <a:pPr lvl="4"/>
             <a:r>
-              <a:rPr lang="en-US"/>
+              <a:rPr lang="en-US" smtClean="0"/>
               <a:t>Fifth level</a:t>
             </a:r>
+            <a:endParaRPr lang="en-US"/>
           </a:p>
         </p:txBody>
       </p:sp>
@@ -4546,7 +4313,7 @@
           <a:p>
             <a:pPr lvl="0"/>
             <a:r>
-              <a:rPr lang="en-US"/>
+              <a:rPr lang="en-US" smtClean="0"/>
               <a:t>Click to edit Master text styles</a:t>
             </a:r>
           </a:p>
@@ -4569,7 +4336,7 @@
           <a:p>
             <a:fld id="{5BCAD085-E8A6-8845-BD4E-CB4CCA059FC4}" type="datetimeFigureOut">
               <a:rPr lang="en-US" smtClean="0"/>
-              <a:t>10/2/2026</a:t>
+              <a:t>1/27/13</a:t>
             </a:fld>
             <a:endParaRPr lang="en-US"/>
           </a:p>
@@ -4672,9 +4439,10 @@
           </a:lstStyle>
           <a:p>
             <a:r>
-              <a:rPr lang="en-US"/>
+              <a:rPr lang="en-US" smtClean="0"/>
               <a:t>Click to edit Master title style</a:t>
             </a:r>
+            <a:endParaRPr lang="en-US"/>
           </a:p>
         </p:txBody>
       </p:sp>
@@ -4798,7 +4566,7 @@
           <a:p>
             <a:pPr lvl="0"/>
             <a:r>
-              <a:rPr lang="en-US"/>
+              <a:rPr lang="en-US" smtClean="0"/>
               <a:t>Click to edit Master text styles</a:t>
             </a:r>
           </a:p>
@@ -4821,7 +4589,7 @@
           <a:p>
             <a:fld id="{5BCAD085-E8A6-8845-BD4E-CB4CCA059FC4}" type="datetimeFigureOut">
               <a:rPr lang="en-US" smtClean="0"/>
-              <a:t>10/2/2026</a:t>
+              <a:t>1/27/13</a:t>
             </a:fld>
             <a:endParaRPr lang="en-US"/>
           </a:p>
@@ -4930,9 +4698,10 @@
           <a:lstStyle/>
           <a:p>
             <a:r>
-              <a:rPr lang="en-US"/>
+              <a:rPr lang="en-US" smtClean="0"/>
               <a:t>Click to edit Master title style</a:t>
             </a:r>
+            <a:endParaRPr lang="en-US"/>
           </a:p>
         </p:txBody>
       </p:sp>
@@ -4963,37 +4732,38 @@
           <a:p>
             <a:pPr lvl="0"/>
             <a:r>
-              <a:rPr lang="en-US"/>
+              <a:rPr lang="en-US" smtClean="0"/>
               <a:t>Click to edit Master text styles</a:t>
             </a:r>
           </a:p>
           <a:p>
             <a:pPr lvl="1"/>
             <a:r>
-              <a:rPr lang="en-US"/>
+              <a:rPr lang="en-US" smtClean="0"/>
               <a:t>Second level</a:t>
             </a:r>
           </a:p>
           <a:p>
             <a:pPr lvl="2"/>
             <a:r>
-              <a:rPr lang="en-US"/>
+              <a:rPr lang="en-US" smtClean="0"/>
               <a:t>Third level</a:t>
             </a:r>
           </a:p>
           <a:p>
             <a:pPr lvl="3"/>
             <a:r>
-              <a:rPr lang="en-US"/>
+              <a:rPr lang="en-US" smtClean="0"/>
               <a:t>Fourth level</a:t>
             </a:r>
           </a:p>
           <a:p>
             <a:pPr lvl="4"/>
             <a:r>
-              <a:rPr lang="en-US"/>
+              <a:rPr lang="en-US" smtClean="0"/>
               <a:t>Fifth level</a:t>
             </a:r>
+            <a:endParaRPr lang="en-US"/>
           </a:p>
         </p:txBody>
       </p:sp>
@@ -5032,7 +4802,7 @@
           <a:p>
             <a:fld id="{5BCAD085-E8A6-8845-BD4E-CB4CCA059FC4}" type="datetimeFigureOut">
               <a:rPr lang="en-US" smtClean="0"/>
-              <a:t>10/2/2026</a:t>
+              <a:t>1/27/13</a:t>
             </a:fld>
             <a:endParaRPr lang="en-US"/>
           </a:p>
@@ -5391,7 +5161,7 @@
 </file>
 
 <file path=ppt/slides/slide1.xml><?xml version="1.0" encoding="utf-8"?>
-<p:sld xmlns:a="http://schemas.openxmlformats.org/drawingml/2006/main" xmlns:r="http://schemas.openxmlformats.org/officeDocument/2006/relationships" xmlns:p="http://schemas.openxmlformats.org/presentationml/2006/main">
+<p:sld xmlns:a="http://schemas.openxmlformats.org/drawingml/2006/main" xmlns:p="http://schemas.openxmlformats.org/presentationml/2006/main" xmlns:r="http://schemas.openxmlformats.org/officeDocument/2006/relationships">
   <p:cSld>
     <p:spTree>
       <p:nvGrpSpPr>
@@ -5399,14 +5169,7 @@
         <p:cNvGrpSpPr/>
         <p:nvPr/>
       </p:nvGrpSpPr>
-      <p:grpSpPr>
-        <a:xfrm>
-          <a:off x="0" y="0"/>
-          <a:ext cx="0" cy="0"/>
-          <a:chOff x="0" y="0"/>
-          <a:chExt cx="0" cy="0"/>
-        </a:xfrm>
-      </p:grpSpPr>
+      <p:grpSpPr/>
       <p:sp>
         <p:nvSpPr>
           <p:cNvPr id="2" name="Title"/>
@@ -5424,7 +5187,7 @@
           <a:noFill/>
         </p:spPr>
         <p:txBody>
-          <a:bodyPr wrap="square" lIns="0" tIns="0" rIns="0" bIns="0" anchor="t">
+          <a:bodyPr wrap="square" anchor="t" lIns="0" rIns="0" tIns="0" bIns="0">
             <a:spAutoFit/>
           </a:bodyPr>
           <a:lstStyle/>
@@ -5459,7 +5222,7 @@
           <a:noFill/>
         </p:spPr>
         <p:txBody>
-          <a:bodyPr wrap="square" lIns="0" tIns="0" rIns="0" bIns="0" anchor="t">
+          <a:bodyPr wrap="square" anchor="t" lIns="0" rIns="0" tIns="0" bIns="0">
             <a:spAutoFit/>
           </a:bodyPr>
           <a:lstStyle/>
@@ -5494,7 +5257,7 @@
           <a:noFill/>
         </p:spPr>
         <p:txBody>
-          <a:bodyPr wrap="square" lIns="0" tIns="0" rIns="0" bIns="0" anchor="t">
+          <a:bodyPr wrap="square" anchor="t" lIns="0" rIns="0" tIns="0" bIns="0">
             <a:spAutoFit/>
           </a:bodyPr>
           <a:lstStyle/>
@@ -5521,7 +5284,7 @@
 </file>
 
 <file path=ppt/slides/slide2.xml><?xml version="1.0" encoding="utf-8"?>
-<p:sld xmlns:a="http://schemas.openxmlformats.org/drawingml/2006/main" xmlns:r="http://schemas.openxmlformats.org/officeDocument/2006/relationships" xmlns:p="http://schemas.openxmlformats.org/presentationml/2006/main">
+<p:sld xmlns:a="http://schemas.openxmlformats.org/drawingml/2006/main" xmlns:p="http://schemas.openxmlformats.org/presentationml/2006/main" xmlns:r="http://schemas.openxmlformats.org/officeDocument/2006/relationships">
   <p:cSld>
     <p:spTree>
       <p:nvGrpSpPr>
@@ -5529,14 +5292,7 @@
         <p:cNvGrpSpPr/>
         <p:nvPr/>
       </p:nvGrpSpPr>
-      <p:grpSpPr>
-        <a:xfrm>
-          <a:off x="0" y="0"/>
-          <a:ext cx="0" cy="0"/>
-          <a:chOff x="0" y="0"/>
-          <a:chExt cx="0" cy="0"/>
-        </a:xfrm>
-      </p:grpSpPr>
+      <p:grpSpPr/>
       <p:sp>
         <p:nvSpPr>
           <p:cNvPr id="2" name="Section"/>
@@ -5554,7 +5310,7 @@
           <a:noFill/>
         </p:spPr>
         <p:txBody>
-          <a:bodyPr wrap="square" lIns="0" tIns="0" rIns="0" bIns="0" anchor="t">
+          <a:bodyPr wrap="square" anchor="t" lIns="0" rIns="0" tIns="0" bIns="0">
             <a:spAutoFit/>
           </a:bodyPr>
           <a:lstStyle/>
@@ -5589,7 +5345,7 @@
           <a:noFill/>
         </p:spPr>
         <p:txBody>
-          <a:bodyPr wrap="square" lIns="0" tIns="0" rIns="0" bIns="0" anchor="t">
+          <a:bodyPr wrap="square" anchor="t" lIns="0" rIns="0" tIns="0" bIns="0">
             <a:spAutoFit/>
           </a:bodyPr>
           <a:lstStyle/>
@@ -5624,7 +5380,7 @@
           <a:noFill/>
         </p:spPr>
         <p:txBody>
-          <a:bodyPr wrap="square" lIns="0" tIns="0" rIns="0" bIns="0" anchor="t">
+          <a:bodyPr wrap="square" anchor="t" lIns="0" rIns="0" tIns="0" bIns="0">
             <a:spAutoFit/>
           </a:bodyPr>
           <a:lstStyle/>
@@ -5659,7 +5415,7 @@
           <a:noFill/>
         </p:spPr>
         <p:txBody>
-          <a:bodyPr wrap="square" lIns="0" tIns="0" rIns="0" bIns="0" anchor="t">
+          <a:bodyPr wrap="square" anchor="t" lIns="0" rIns="0" tIns="0" bIns="0">
             <a:spAutoFit/>
           </a:bodyPr>
           <a:lstStyle/>
@@ -5691,7 +5447,7 @@
         </p:xfrm>
         <a:graphic>
           <a:graphicData uri="http://schemas.openxmlformats.org/drawingml/2006/chart">
-            <c:chart xmlns:c="http://schemas.openxmlformats.org/drawingml/2006/chart" xmlns:r="http://schemas.openxmlformats.org/officeDocument/2006/relationships" r:id="rId3"/>
+            <c:chart xmlns:c="http://schemas.openxmlformats.org/drawingml/2006/chart" r:id="rId2"/>
           </a:graphicData>
         </a:graphic>
       </p:graphicFrame>
@@ -5712,7 +5468,7 @@
           <a:noFill/>
         </p:spPr>
         <p:txBody>
-          <a:bodyPr wrap="square" lIns="0" tIns="0" rIns="0" bIns="0" anchor="t">
+          <a:bodyPr wrap="square" anchor="t" lIns="0" rIns="0" tIns="0" bIns="0">
             <a:spAutoFit/>
           </a:bodyPr>
           <a:lstStyle/>
@@ -5747,7 +5503,7 @@
           <a:noFill/>
         </p:spPr>
         <p:txBody>
-          <a:bodyPr wrap="square" lIns="0" tIns="0" rIns="0" bIns="0" anchor="t">
+          <a:bodyPr wrap="square" anchor="t" lIns="0" rIns="0" tIns="0" bIns="0">
             <a:spAutoFit/>
           </a:bodyPr>
           <a:lstStyle/>
@@ -5782,7 +5538,7 @@
           <a:noFill/>
         </p:spPr>
         <p:txBody>
-          <a:bodyPr wrap="square" lIns="0" tIns="0" rIns="0" bIns="0" anchor="t">
+          <a:bodyPr wrap="square" anchor="t" lIns="0" rIns="0" tIns="0" bIns="0">
             <a:spAutoFit/>
           </a:bodyPr>
           <a:lstStyle/>
@@ -5817,7 +5573,7 @@
           <a:noFill/>
         </p:spPr>
         <p:txBody>
-          <a:bodyPr wrap="square" lIns="0" tIns="0" rIns="0" bIns="0" anchor="t">
+          <a:bodyPr wrap="square" anchor="t" lIns="0" rIns="0" tIns="0" bIns="0">
             <a:spAutoFit/>
           </a:bodyPr>
           <a:lstStyle/>
@@ -5852,7 +5608,7 @@
           <a:noFill/>
         </p:spPr>
         <p:txBody>
-          <a:bodyPr wrap="square" lIns="0" tIns="0" rIns="0" bIns="0" anchor="t">
+          <a:bodyPr wrap="square" anchor="t" lIns="0" rIns="0" tIns="0" bIns="0">
             <a:spAutoFit/>
           </a:bodyPr>
           <a:lstStyle/>
@@ -5887,7 +5643,7 @@
           <a:noFill/>
         </p:spPr>
         <p:txBody>
-          <a:bodyPr wrap="square" lIns="0" tIns="0" rIns="0" bIns="0" anchor="t">
+          <a:bodyPr wrap="square" anchor="t" lIns="0" rIns="0" tIns="0" bIns="0">
             <a:spAutoFit/>
           </a:bodyPr>
           <a:lstStyle/>
@@ -5922,7 +5678,7 @@
           <a:noFill/>
         </p:spPr>
         <p:txBody>
-          <a:bodyPr wrap="square" lIns="0" tIns="0" rIns="0" bIns="0" anchor="t">
+          <a:bodyPr wrap="square" anchor="t" lIns="0" rIns="0" tIns="0" bIns="0">
             <a:spAutoFit/>
           </a:bodyPr>
           <a:lstStyle/>
@@ -5949,7 +5705,7 @@
 </file>
 
 <file path=ppt/slides/slide3.xml><?xml version="1.0" encoding="utf-8"?>
-<p:sld xmlns:a="http://schemas.openxmlformats.org/drawingml/2006/main" xmlns:r="http://schemas.openxmlformats.org/officeDocument/2006/relationships" xmlns:p="http://schemas.openxmlformats.org/presentationml/2006/main">
+<p:sld xmlns:a="http://schemas.openxmlformats.org/drawingml/2006/main" xmlns:p="http://schemas.openxmlformats.org/presentationml/2006/main" xmlns:r="http://schemas.openxmlformats.org/officeDocument/2006/relationships">
   <p:cSld>
     <p:spTree>
       <p:nvGrpSpPr>
@@ -5957,14 +5713,7 @@
         <p:cNvGrpSpPr/>
         <p:nvPr/>
       </p:nvGrpSpPr>
-      <p:grpSpPr>
-        <a:xfrm>
-          <a:off x="0" y="0"/>
-          <a:ext cx="0" cy="0"/>
-          <a:chOff x="0" y="0"/>
-          <a:chExt cx="0" cy="0"/>
-        </a:xfrm>
-      </p:grpSpPr>
+      <p:grpSpPr/>
       <p:sp>
         <p:nvSpPr>
           <p:cNvPr id="2" name="Section"/>
@@ -5982,7 +5731,7 @@
           <a:noFill/>
         </p:spPr>
         <p:txBody>
-          <a:bodyPr wrap="square" lIns="0" tIns="0" rIns="0" bIns="0" anchor="t">
+          <a:bodyPr wrap="square" anchor="t" lIns="0" rIns="0" tIns="0" bIns="0">
             <a:spAutoFit/>
           </a:bodyPr>
           <a:lstStyle/>
@@ -6017,7 +5766,7 @@
           <a:noFill/>
         </p:spPr>
         <p:txBody>
-          <a:bodyPr wrap="square" lIns="0" tIns="0" rIns="0" bIns="0" anchor="t">
+          <a:bodyPr wrap="square" anchor="t" lIns="0" rIns="0" tIns="0" bIns="0">
             <a:spAutoFit/>
           </a:bodyPr>
           <a:lstStyle/>
@@ -6052,7 +5801,7 @@
           <a:noFill/>
         </p:spPr>
         <p:txBody>
-          <a:bodyPr wrap="square" lIns="0" tIns="0" rIns="0" bIns="0" anchor="t">
+          <a:bodyPr wrap="square" anchor="t" lIns="0" rIns="0" tIns="0" bIns="0">
             <a:spAutoFit/>
           </a:bodyPr>
           <a:lstStyle/>
@@ -6087,7 +5836,7 @@
           <a:noFill/>
         </p:spPr>
         <p:txBody>
-          <a:bodyPr wrap="square" lIns="0" tIns="0" rIns="0" bIns="0" anchor="t">
+          <a:bodyPr wrap="square" anchor="t" lIns="0" rIns="0" tIns="0" bIns="0">
             <a:spAutoFit/>
           </a:bodyPr>
           <a:lstStyle/>
@@ -6122,7 +5871,7 @@
           <a:noFill/>
         </p:spPr>
         <p:txBody>
-          <a:bodyPr wrap="square" lIns="0" tIns="0" rIns="0" bIns="0" anchor="t">
+          <a:bodyPr wrap="square" anchor="t" lIns="0" rIns="0" tIns="0" bIns="0">
             <a:spAutoFit/>
           </a:bodyPr>
           <a:lstStyle/>
@@ -6159,39 +5908,15 @@
                 <a:tableStyleId>{2D5ABB26-0587-4C30-8999-92F81FD0307C}</a:tableStyleId>
               </a:tblPr>
               <a:tblGrid>
-                <a:gridCol w="1097280">
-                  <a:extLst>
-                    <a:ext uri="{9D8B030D-6E8A-4147-A177-3AD203B41FA5}">
-                      <a16:colId xmlns:a16="http://schemas.microsoft.com/office/drawing/2014/main" val="20000"/>
-                    </a:ext>
-                  </a:extLst>
-                </a:gridCol>
-                <a:gridCol w="2651760">
-                  <a:extLst>
-                    <a:ext uri="{9D8B030D-6E8A-4147-A177-3AD203B41FA5}">
-                      <a16:colId xmlns:a16="http://schemas.microsoft.com/office/drawing/2014/main" val="20001"/>
-                    </a:ext>
-                  </a:extLst>
-                </a:gridCol>
-                <a:gridCol w="914400">
-                  <a:extLst>
-                    <a:ext uri="{9D8B030D-6E8A-4147-A177-3AD203B41FA5}">
-                      <a16:colId xmlns:a16="http://schemas.microsoft.com/office/drawing/2014/main" val="20002"/>
-                    </a:ext>
-                  </a:extLst>
-                </a:gridCol>
-                <a:gridCol w="3566160">
-                  <a:extLst>
-                    <a:ext uri="{9D8B030D-6E8A-4147-A177-3AD203B41FA5}">
-                      <a16:colId xmlns:a16="http://schemas.microsoft.com/office/drawing/2014/main" val="20003"/>
-                    </a:ext>
-                  </a:extLst>
-                </a:gridCol>
+                <a:gridCol w="1097280"/>
+                <a:gridCol w="2651760"/>
+                <a:gridCol w="914400"/>
+                <a:gridCol w="3566160"/>
               </a:tblGrid>
               <a:tr h="338328">
                 <a:tc>
                   <a:txBody>
-                    <a:bodyPr/>
+                    <a:bodyPr wrap="square"/>
                     <a:lstStyle/>
                     <a:p>
                       <a:pPr algn="l"/>
@@ -6206,7 +5931,7 @@
                       </a:r>
                     </a:p>
                   </a:txBody>
-                  <a:tcPr marL="73152" marR="73152" marT="18288" marB="18288" anchor="ctr">
+                  <a:tcPr anchor="ctr" marL="73152" marR="73152" marT="18288" marB="18288">
                     <a:solidFill>
                       <a:srgbClr val="0B3D2E"/>
                     </a:solidFill>
@@ -6214,7 +5939,7 @@
                 </a:tc>
                 <a:tc>
                   <a:txBody>
-                    <a:bodyPr/>
+                    <a:bodyPr wrap="square"/>
                     <a:lstStyle/>
                     <a:p>
                       <a:pPr algn="l"/>
@@ -6229,7 +5954,7 @@
                       </a:r>
                     </a:p>
                   </a:txBody>
-                  <a:tcPr marL="73152" marR="73152" marT="18288" marB="18288" anchor="ctr">
+                  <a:tcPr anchor="ctr" marL="73152" marR="73152" marT="18288" marB="18288">
                     <a:solidFill>
                       <a:srgbClr val="0B3D2E"/>
                     </a:solidFill>
@@ -6237,7 +5962,7 @@
                 </a:tc>
                 <a:tc>
                   <a:txBody>
-                    <a:bodyPr/>
+                    <a:bodyPr wrap="square"/>
                     <a:lstStyle/>
                     <a:p>
                       <a:pPr algn="r"/>
@@ -6252,7 +5977,7 @@
                       </a:r>
                     </a:p>
                   </a:txBody>
-                  <a:tcPr marL="73152" marR="73152" marT="18288" marB="18288" anchor="ctr">
+                  <a:tcPr anchor="ctr" marL="73152" marR="73152" marT="18288" marB="18288">
                     <a:solidFill>
                       <a:srgbClr val="0B3D2E"/>
                     </a:solidFill>
@@ -6260,7 +5985,7 @@
                 </a:tc>
                 <a:tc>
                   <a:txBody>
-                    <a:bodyPr/>
+                    <a:bodyPr wrap="square"/>
                     <a:lstStyle/>
                     <a:p>
                       <a:pPr algn="l"/>
@@ -6275,22 +6000,17 @@
                       </a:r>
                     </a:p>
                   </a:txBody>
-                  <a:tcPr marL="73152" marR="73152" marT="18288" marB="18288" anchor="ctr">
+                  <a:tcPr anchor="ctr" marL="73152" marR="73152" marT="18288" marB="18288">
                     <a:solidFill>
                       <a:srgbClr val="0B3D2E"/>
                     </a:solidFill>
                   </a:tcPr>
                 </a:tc>
-                <a:extLst>
-                  <a:ext uri="{0D108BD9-81ED-4DB2-BD59-A6C34878D82A}">
-                    <a16:rowId xmlns:a16="http://schemas.microsoft.com/office/drawing/2014/main" val="10000"/>
-                  </a:ext>
-                </a:extLst>
               </a:tr>
               <a:tr h="338328">
                 <a:tc>
                   <a:txBody>
-                    <a:bodyPr/>
+                    <a:bodyPr wrap="square"/>
                     <a:lstStyle/>
                     <a:p>
                       <a:pPr algn="l"/>
@@ -6305,7 +6025,7 @@
                       </a:r>
                     </a:p>
                   </a:txBody>
-                  <a:tcPr marL="73152" marR="73152" marT="18288" marB="18288" anchor="ctr">
+                  <a:tcPr anchor="ctr" marL="73152" marR="73152" marT="18288" marB="18288">
                     <a:solidFill>
                       <a:srgbClr val="F0F4F2"/>
                     </a:solidFill>
@@ -6313,7 +6033,7 @@
                 </a:tc>
                 <a:tc>
                   <a:txBody>
-                    <a:bodyPr/>
+                    <a:bodyPr wrap="square"/>
                     <a:lstStyle/>
                     <a:p>
                       <a:pPr algn="l"/>
@@ -6328,7 +6048,7 @@
                       </a:r>
                     </a:p>
                   </a:txBody>
-                  <a:tcPr marL="73152" marR="73152" marT="18288" marB="18288" anchor="ctr">
+                  <a:tcPr anchor="ctr" marL="73152" marR="73152" marT="18288" marB="18288">
                     <a:solidFill>
                       <a:srgbClr val="F0F4F2"/>
                     </a:solidFill>
@@ -6336,7 +6056,7 @@
                 </a:tc>
                 <a:tc>
                   <a:txBody>
-                    <a:bodyPr/>
+                    <a:bodyPr wrap="square"/>
                     <a:lstStyle/>
                     <a:p>
                       <a:pPr algn="r"/>
@@ -6351,7 +6071,7 @@
                       </a:r>
                     </a:p>
                   </a:txBody>
-                  <a:tcPr marL="73152" marR="73152" marT="18288" marB="18288" anchor="ctr">
+                  <a:tcPr anchor="ctr" marL="73152" marR="73152" marT="18288" marB="18288">
                     <a:solidFill>
                       <a:srgbClr val="F0F4F2"/>
                     </a:solidFill>
@@ -6359,7 +6079,7 @@
                 </a:tc>
                 <a:tc>
                   <a:txBody>
-                    <a:bodyPr/>
+                    <a:bodyPr wrap="square"/>
                     <a:lstStyle/>
                     <a:p>
                       <a:pPr algn="l"/>
@@ -6374,22 +6094,17 @@
                       </a:r>
                     </a:p>
                   </a:txBody>
-                  <a:tcPr marL="73152" marR="73152" marT="18288" marB="18288" anchor="ctr">
+                  <a:tcPr anchor="ctr" marL="73152" marR="73152" marT="18288" marB="18288">
                     <a:solidFill>
                       <a:srgbClr val="F0F4F2"/>
                     </a:solidFill>
                   </a:tcPr>
                 </a:tc>
-                <a:extLst>
-                  <a:ext uri="{0D108BD9-81ED-4DB2-BD59-A6C34878D82A}">
-                    <a16:rowId xmlns:a16="http://schemas.microsoft.com/office/drawing/2014/main" val="10001"/>
-                  </a:ext>
-                </a:extLst>
               </a:tr>
               <a:tr h="338328">
                 <a:tc>
                   <a:txBody>
-                    <a:bodyPr/>
+                    <a:bodyPr wrap="square"/>
                     <a:lstStyle/>
                     <a:p>
                       <a:pPr algn="l"/>
@@ -6404,7 +6119,7 @@
                       </a:r>
                     </a:p>
                   </a:txBody>
-                  <a:tcPr marL="73152" marR="73152" marT="18288" marB="18288" anchor="ctr">
+                  <a:tcPr anchor="ctr" marL="73152" marR="73152" marT="18288" marB="18288">
                     <a:solidFill>
                       <a:srgbClr val="FFFFFF"/>
                     </a:solidFill>
@@ -6412,7 +6127,7 @@
                 </a:tc>
                 <a:tc>
                   <a:txBody>
-                    <a:bodyPr/>
+                    <a:bodyPr wrap="square"/>
                     <a:lstStyle/>
                     <a:p>
                       <a:pPr algn="l"/>
@@ -6427,7 +6142,7 @@
                       </a:r>
                     </a:p>
                   </a:txBody>
-                  <a:tcPr marL="73152" marR="73152" marT="18288" marB="18288" anchor="ctr">
+                  <a:tcPr anchor="ctr" marL="73152" marR="73152" marT="18288" marB="18288">
                     <a:solidFill>
                       <a:srgbClr val="FFFFFF"/>
                     </a:solidFill>
@@ -6435,7 +6150,7 @@
                 </a:tc>
                 <a:tc>
                   <a:txBody>
-                    <a:bodyPr/>
+                    <a:bodyPr wrap="square"/>
                     <a:lstStyle/>
                     <a:p>
                       <a:pPr algn="r"/>
@@ -6450,7 +6165,7 @@
                       </a:r>
                     </a:p>
                   </a:txBody>
-                  <a:tcPr marL="73152" marR="73152" marT="18288" marB="18288" anchor="ctr">
+                  <a:tcPr anchor="ctr" marL="73152" marR="73152" marT="18288" marB="18288">
                     <a:solidFill>
                       <a:srgbClr val="FFFFFF"/>
                     </a:solidFill>
@@ -6458,7 +6173,7 @@
                 </a:tc>
                 <a:tc>
                   <a:txBody>
-                    <a:bodyPr/>
+                    <a:bodyPr wrap="square"/>
                     <a:lstStyle/>
                     <a:p>
                       <a:pPr algn="l"/>
@@ -6473,22 +6188,17 @@
                       </a:r>
                     </a:p>
                   </a:txBody>
-                  <a:tcPr marL="73152" marR="73152" marT="18288" marB="18288" anchor="ctr">
+                  <a:tcPr anchor="ctr" marL="73152" marR="73152" marT="18288" marB="18288">
                     <a:solidFill>
                       <a:srgbClr val="FFFFFF"/>
                     </a:solidFill>
                   </a:tcPr>
                 </a:tc>
-                <a:extLst>
-                  <a:ext uri="{0D108BD9-81ED-4DB2-BD59-A6C34878D82A}">
-                    <a16:rowId xmlns:a16="http://schemas.microsoft.com/office/drawing/2014/main" val="10002"/>
-                  </a:ext>
-                </a:extLst>
               </a:tr>
               <a:tr h="338328">
                 <a:tc>
                   <a:txBody>
-                    <a:bodyPr/>
+                    <a:bodyPr wrap="square"/>
                     <a:lstStyle/>
                     <a:p>
                       <a:pPr algn="l"/>
@@ -6503,7 +6213,7 @@
                       </a:r>
                     </a:p>
                   </a:txBody>
-                  <a:tcPr marL="73152" marR="73152" marT="18288" marB="18288" anchor="ctr">
+                  <a:tcPr anchor="ctr" marL="73152" marR="73152" marT="18288" marB="18288">
                     <a:solidFill>
                       <a:srgbClr val="F0F4F2"/>
                     </a:solidFill>
@@ -6511,7 +6221,7 @@
                 </a:tc>
                 <a:tc>
                   <a:txBody>
-                    <a:bodyPr/>
+                    <a:bodyPr wrap="square"/>
                     <a:lstStyle/>
                     <a:p>
                       <a:pPr algn="l"/>
@@ -6526,7 +6236,7 @@
                       </a:r>
                     </a:p>
                   </a:txBody>
-                  <a:tcPr marL="73152" marR="73152" marT="18288" marB="18288" anchor="ctr">
+                  <a:tcPr anchor="ctr" marL="73152" marR="73152" marT="18288" marB="18288">
                     <a:solidFill>
                       <a:srgbClr val="F0F4F2"/>
                     </a:solidFill>
@@ -6534,7 +6244,7 @@
                 </a:tc>
                 <a:tc>
                   <a:txBody>
-                    <a:bodyPr/>
+                    <a:bodyPr wrap="square"/>
                     <a:lstStyle/>
                     <a:p>
                       <a:pPr algn="r"/>
@@ -6549,7 +6259,7 @@
                       </a:r>
                     </a:p>
                   </a:txBody>
-                  <a:tcPr marL="73152" marR="73152" marT="18288" marB="18288" anchor="ctr">
+                  <a:tcPr anchor="ctr" marL="73152" marR="73152" marT="18288" marB="18288">
                     <a:solidFill>
                       <a:srgbClr val="F0F4F2"/>
                     </a:solidFill>
@@ -6557,7 +6267,7 @@
                 </a:tc>
                 <a:tc>
                   <a:txBody>
-                    <a:bodyPr/>
+                    <a:bodyPr wrap="square"/>
                     <a:lstStyle/>
                     <a:p>
                       <a:pPr algn="l"/>
@@ -6572,22 +6282,17 @@
                       </a:r>
                     </a:p>
                   </a:txBody>
-                  <a:tcPr marL="73152" marR="73152" marT="18288" marB="18288" anchor="ctr">
+                  <a:tcPr anchor="ctr" marL="73152" marR="73152" marT="18288" marB="18288">
                     <a:solidFill>
                       <a:srgbClr val="F0F4F2"/>
                     </a:solidFill>
                   </a:tcPr>
                 </a:tc>
-                <a:extLst>
-                  <a:ext uri="{0D108BD9-81ED-4DB2-BD59-A6C34878D82A}">
-                    <a16:rowId xmlns:a16="http://schemas.microsoft.com/office/drawing/2014/main" val="10003"/>
-                  </a:ext>
-                </a:extLst>
               </a:tr>
               <a:tr h="338328">
                 <a:tc>
                   <a:txBody>
-                    <a:bodyPr/>
+                    <a:bodyPr wrap="square"/>
                     <a:lstStyle/>
                     <a:p>
                       <a:pPr algn="l"/>
@@ -6602,7 +6307,7 @@
                       </a:r>
                     </a:p>
                   </a:txBody>
-                  <a:tcPr marL="73152" marR="73152" marT="18288" marB="18288" anchor="ctr">
+                  <a:tcPr anchor="ctr" marL="73152" marR="73152" marT="18288" marB="18288">
                     <a:solidFill>
                       <a:srgbClr val="FFFFFF"/>
                     </a:solidFill>
@@ -6610,7 +6315,7 @@
                 </a:tc>
                 <a:tc>
                   <a:txBody>
-                    <a:bodyPr/>
+                    <a:bodyPr wrap="square"/>
                     <a:lstStyle/>
                     <a:p>
                       <a:pPr algn="l"/>
@@ -6625,7 +6330,7 @@
                       </a:r>
                     </a:p>
                   </a:txBody>
-                  <a:tcPr marL="73152" marR="73152" marT="18288" marB="18288" anchor="ctr">
+                  <a:tcPr anchor="ctr" marL="73152" marR="73152" marT="18288" marB="18288">
                     <a:solidFill>
                       <a:srgbClr val="FFFFFF"/>
                     </a:solidFill>
@@ -6633,7 +6338,7 @@
                 </a:tc>
                 <a:tc>
                   <a:txBody>
-                    <a:bodyPr/>
+                    <a:bodyPr wrap="square"/>
                     <a:lstStyle/>
                     <a:p>
                       <a:pPr algn="r"/>
@@ -6648,7 +6353,7 @@
                       </a:r>
                     </a:p>
                   </a:txBody>
-                  <a:tcPr marL="73152" marR="73152" marT="18288" marB="18288" anchor="ctr">
+                  <a:tcPr anchor="ctr" marL="73152" marR="73152" marT="18288" marB="18288">
                     <a:solidFill>
                       <a:srgbClr val="FFFFFF"/>
                     </a:solidFill>
@@ -6656,7 +6361,7 @@
                 </a:tc>
                 <a:tc>
                   <a:txBody>
-                    <a:bodyPr/>
+                    <a:bodyPr wrap="square"/>
                     <a:lstStyle/>
                     <a:p>
                       <a:pPr algn="l"/>
@@ -6671,22 +6376,17 @@
                       </a:r>
                     </a:p>
                   </a:txBody>
-                  <a:tcPr marL="73152" marR="73152" marT="18288" marB="18288" anchor="ctr">
+                  <a:tcPr anchor="ctr" marL="73152" marR="73152" marT="18288" marB="18288">
                     <a:solidFill>
                       <a:srgbClr val="FFFFFF"/>
                     </a:solidFill>
                   </a:tcPr>
                 </a:tc>
-                <a:extLst>
-                  <a:ext uri="{0D108BD9-81ED-4DB2-BD59-A6C34878D82A}">
-                    <a16:rowId xmlns:a16="http://schemas.microsoft.com/office/drawing/2014/main" val="10004"/>
-                  </a:ext>
-                </a:extLst>
               </a:tr>
               <a:tr h="338328">
                 <a:tc>
                   <a:txBody>
-                    <a:bodyPr/>
+                    <a:bodyPr wrap="square"/>
                     <a:lstStyle/>
                     <a:p>
                       <a:pPr algn="l"/>
@@ -6701,7 +6401,7 @@
                       </a:r>
                     </a:p>
                   </a:txBody>
-                  <a:tcPr marL="73152" marR="73152" marT="18288" marB="18288" anchor="ctr">
+                  <a:tcPr anchor="ctr" marL="73152" marR="73152" marT="18288" marB="18288">
                     <a:solidFill>
                       <a:srgbClr val="F0F4F2"/>
                     </a:solidFill>
@@ -6709,7 +6409,7 @@
                 </a:tc>
                 <a:tc>
                   <a:txBody>
-                    <a:bodyPr/>
+                    <a:bodyPr wrap="square"/>
                     <a:lstStyle/>
                     <a:p>
                       <a:pPr algn="l"/>
@@ -6724,7 +6424,7 @@
                       </a:r>
                     </a:p>
                   </a:txBody>
-                  <a:tcPr marL="73152" marR="73152" marT="18288" marB="18288" anchor="ctr">
+                  <a:tcPr anchor="ctr" marL="73152" marR="73152" marT="18288" marB="18288">
                     <a:solidFill>
                       <a:srgbClr val="F0F4F2"/>
                     </a:solidFill>
@@ -6732,7 +6432,7 @@
                 </a:tc>
                 <a:tc>
                   <a:txBody>
-                    <a:bodyPr/>
+                    <a:bodyPr wrap="square"/>
                     <a:lstStyle/>
                     <a:p>
                       <a:pPr algn="r"/>
@@ -6747,7 +6447,7 @@
                       </a:r>
                     </a:p>
                   </a:txBody>
-                  <a:tcPr marL="73152" marR="73152" marT="18288" marB="18288" anchor="ctr">
+                  <a:tcPr anchor="ctr" marL="73152" marR="73152" marT="18288" marB="18288">
                     <a:solidFill>
                       <a:srgbClr val="F0F4F2"/>
                     </a:solidFill>
@@ -6755,7 +6455,7 @@
                 </a:tc>
                 <a:tc>
                   <a:txBody>
-                    <a:bodyPr/>
+                    <a:bodyPr wrap="square"/>
                     <a:lstStyle/>
                     <a:p>
                       <a:pPr algn="l"/>
@@ -6770,22 +6470,17 @@
                       </a:r>
                     </a:p>
                   </a:txBody>
-                  <a:tcPr marL="73152" marR="73152" marT="18288" marB="18288" anchor="ctr">
+                  <a:tcPr anchor="ctr" marL="73152" marR="73152" marT="18288" marB="18288">
                     <a:solidFill>
                       <a:srgbClr val="F0F4F2"/>
                     </a:solidFill>
                   </a:tcPr>
                 </a:tc>
-                <a:extLst>
-                  <a:ext uri="{0D108BD9-81ED-4DB2-BD59-A6C34878D82A}">
-                    <a16:rowId xmlns:a16="http://schemas.microsoft.com/office/drawing/2014/main" val="10005"/>
-                  </a:ext>
-                </a:extLst>
               </a:tr>
               <a:tr h="338328">
                 <a:tc>
                   <a:txBody>
-                    <a:bodyPr/>
+                    <a:bodyPr wrap="square"/>
                     <a:lstStyle/>
                     <a:p>
                       <a:pPr algn="l"/>
@@ -6800,7 +6495,7 @@
                       </a:r>
                     </a:p>
                   </a:txBody>
-                  <a:tcPr marL="73152" marR="73152" marT="18288" marB="18288" anchor="ctr">
+                  <a:tcPr anchor="ctr" marL="73152" marR="73152" marT="18288" marB="18288">
                     <a:solidFill>
                       <a:srgbClr val="FFFFFF"/>
                     </a:solidFill>
@@ -6808,7 +6503,7 @@
                 </a:tc>
                 <a:tc>
                   <a:txBody>
-                    <a:bodyPr/>
+                    <a:bodyPr wrap="square"/>
                     <a:lstStyle/>
                     <a:p>
                       <a:pPr algn="l"/>
@@ -6823,7 +6518,7 @@
                       </a:r>
                     </a:p>
                   </a:txBody>
-                  <a:tcPr marL="73152" marR="73152" marT="18288" marB="18288" anchor="ctr">
+                  <a:tcPr anchor="ctr" marL="73152" marR="73152" marT="18288" marB="18288">
                     <a:solidFill>
                       <a:srgbClr val="FFFFFF"/>
                     </a:solidFill>
@@ -6831,7 +6526,7 @@
                 </a:tc>
                 <a:tc>
                   <a:txBody>
-                    <a:bodyPr/>
+                    <a:bodyPr wrap="square"/>
                     <a:lstStyle/>
                     <a:p>
                       <a:pPr algn="r"/>
@@ -6846,7 +6541,7 @@
                       </a:r>
                     </a:p>
                   </a:txBody>
-                  <a:tcPr marL="73152" marR="73152" marT="18288" marB="18288" anchor="ctr">
+                  <a:tcPr anchor="ctr" marL="73152" marR="73152" marT="18288" marB="18288">
                     <a:solidFill>
                       <a:srgbClr val="FFFFFF"/>
                     </a:solidFill>
@@ -6854,7 +6549,7 @@
                 </a:tc>
                 <a:tc>
                   <a:txBody>
-                    <a:bodyPr/>
+                    <a:bodyPr wrap="square"/>
                     <a:lstStyle/>
                     <a:p>
                       <a:pPr algn="l"/>
@@ -6869,17 +6564,12 @@
                       </a:r>
                     </a:p>
                   </a:txBody>
-                  <a:tcPr marL="73152" marR="73152" marT="18288" marB="18288" anchor="ctr">
+                  <a:tcPr anchor="ctr" marL="73152" marR="73152" marT="18288" marB="18288">
                     <a:solidFill>
                       <a:srgbClr val="FFFFFF"/>
                     </a:solidFill>
                   </a:tcPr>
                 </a:tc>
-                <a:extLst>
-                  <a:ext uri="{0D108BD9-81ED-4DB2-BD59-A6C34878D82A}">
-                    <a16:rowId xmlns:a16="http://schemas.microsoft.com/office/drawing/2014/main" val="10006"/>
-                  </a:ext>
-                </a:extLst>
               </a:tr>
             </a:tbl>
           </a:graphicData>
@@ -6902,7 +6592,7 @@
           <a:noFill/>
         </p:spPr>
         <p:txBody>
-          <a:bodyPr wrap="square" lIns="0" tIns="0" rIns="0" bIns="0" anchor="t">
+          <a:bodyPr wrap="square" anchor="t" lIns="0" rIns="0" tIns="0" bIns="0">
             <a:spAutoFit/>
           </a:bodyPr>
           <a:lstStyle/>
@@ -6949,7 +6639,7 @@
                 </a:solidFill>
                 <a:latin typeface="Malgun Gothic"/>
               </a:rPr>
-              <a:t>취소를 뺀 배송 완료 주문 96,470건, 고객 93,350명</a:t>
+              <a:t>배송 완료 주문 96,470건, 고객 93,350명 (96,096명 중 취소·배송 중 등으로 배송 완료 주문이 없는 2,746명 제외)</a:t>
             </a:r>
           </a:p>
         </p:txBody>
@@ -6963,7 +6653,7 @@
 </file>
 
 <file path=ppt/slides/slide4.xml><?xml version="1.0" encoding="utf-8"?>
-<p:sld xmlns:a="http://schemas.openxmlformats.org/drawingml/2006/main" xmlns:r="http://schemas.openxmlformats.org/officeDocument/2006/relationships" xmlns:p="http://schemas.openxmlformats.org/presentationml/2006/main">
+<p:sld xmlns:a="http://schemas.openxmlformats.org/drawingml/2006/main" xmlns:p="http://schemas.openxmlformats.org/presentationml/2006/main" xmlns:r="http://schemas.openxmlformats.org/officeDocument/2006/relationships">
   <p:cSld>
     <p:spTree>
       <p:nvGrpSpPr>
@@ -6971,14 +6661,7 @@
         <p:cNvGrpSpPr/>
         <p:nvPr/>
       </p:nvGrpSpPr>
-      <p:grpSpPr>
-        <a:xfrm>
-          <a:off x="0" y="0"/>
-          <a:ext cx="0" cy="0"/>
-          <a:chOff x="0" y="0"/>
-          <a:chExt cx="0" cy="0"/>
-        </a:xfrm>
-      </p:grpSpPr>
+      <p:grpSpPr/>
       <p:sp>
         <p:nvSpPr>
           <p:cNvPr id="2" name="Section"/>
@@ -6996,7 +6679,7 @@
           <a:noFill/>
         </p:spPr>
         <p:txBody>
-          <a:bodyPr wrap="square" lIns="0" tIns="0" rIns="0" bIns="0" anchor="t">
+          <a:bodyPr wrap="square" anchor="t" lIns="0" rIns="0" tIns="0" bIns="0">
             <a:spAutoFit/>
           </a:bodyPr>
           <a:lstStyle/>
@@ -7031,7 +6714,7 @@
           <a:noFill/>
         </p:spPr>
         <p:txBody>
-          <a:bodyPr wrap="square" lIns="0" tIns="0" rIns="0" bIns="0" anchor="t">
+          <a:bodyPr wrap="square" anchor="t" lIns="0" rIns="0" tIns="0" bIns="0">
             <a:spAutoFit/>
           </a:bodyPr>
           <a:lstStyle/>
@@ -7066,7 +6749,7 @@
           <a:noFill/>
         </p:spPr>
         <p:txBody>
-          <a:bodyPr wrap="square" lIns="0" tIns="0" rIns="0" bIns="0" anchor="t">
+          <a:bodyPr wrap="square" anchor="t" lIns="0" rIns="0" tIns="0" bIns="0">
             <a:spAutoFit/>
           </a:bodyPr>
           <a:lstStyle/>
@@ -7101,7 +6784,7 @@
           <a:noFill/>
         </p:spPr>
         <p:txBody>
-          <a:bodyPr wrap="square" lIns="0" tIns="0" rIns="0" bIns="0" anchor="t">
+          <a:bodyPr wrap="square" anchor="t" lIns="0" rIns="0" tIns="0" bIns="0">
             <a:spAutoFit/>
           </a:bodyPr>
           <a:lstStyle/>
@@ -7136,7 +6819,7 @@
           <a:noFill/>
         </p:spPr>
         <p:txBody>
-          <a:bodyPr wrap="square" lIns="0" tIns="0" rIns="0" bIns="0" anchor="t">
+          <a:bodyPr wrap="square" anchor="t" lIns="0" rIns="0" tIns="0" bIns="0">
             <a:spAutoFit/>
           </a:bodyPr>
           <a:lstStyle/>
@@ -7171,7 +6854,7 @@
           <a:noFill/>
         </p:spPr>
         <p:txBody>
-          <a:bodyPr wrap="square" lIns="0" tIns="0" rIns="0" bIns="0" anchor="t">
+          <a:bodyPr wrap="square" anchor="t" lIns="0" rIns="0" tIns="0" bIns="0">
             <a:spAutoFit/>
           </a:bodyPr>
           <a:lstStyle/>
@@ -7253,25 +6936,13 @@
                 <a:tableStyleId>{2D5ABB26-0587-4C30-8999-92F81FD0307C}</a:tableStyleId>
               </a:tblPr>
               <a:tblGrid>
-                <a:gridCol w="1280160">
-                  <a:extLst>
-                    <a:ext uri="{9D8B030D-6E8A-4147-A177-3AD203B41FA5}">
-                      <a16:colId xmlns:a16="http://schemas.microsoft.com/office/drawing/2014/main" val="20000"/>
-                    </a:ext>
-                  </a:extLst>
-                </a:gridCol>
-                <a:gridCol w="3200400">
-                  <a:extLst>
-                    <a:ext uri="{9D8B030D-6E8A-4147-A177-3AD203B41FA5}">
-                      <a16:colId xmlns:a16="http://schemas.microsoft.com/office/drawing/2014/main" val="20001"/>
-                    </a:ext>
-                  </a:extLst>
-                </a:gridCol>
+                <a:gridCol w="1280160"/>
+                <a:gridCol w="3200400"/>
               </a:tblGrid>
               <a:tr h="365760">
                 <a:tc>
                   <a:txBody>
-                    <a:bodyPr/>
+                    <a:bodyPr wrap="square"/>
                     <a:lstStyle/>
                     <a:p>
                       <a:pPr algn="l"/>
@@ -7286,7 +6957,7 @@
                       </a:r>
                     </a:p>
                   </a:txBody>
-                  <a:tcPr marL="73152" marR="73152" marT="18288" marB="18288" anchor="ctr">
+                  <a:tcPr anchor="ctr" marL="73152" marR="73152" marT="18288" marB="18288">
                     <a:solidFill>
                       <a:srgbClr val="0B3D2E"/>
                     </a:solidFill>
@@ -7294,7 +6965,7 @@
                 </a:tc>
                 <a:tc>
                   <a:txBody>
-                    <a:bodyPr/>
+                    <a:bodyPr wrap="square"/>
                     <a:lstStyle/>
                     <a:p>
                       <a:pPr algn="l"/>
@@ -7309,22 +6980,17 @@
                       </a:r>
                     </a:p>
                   </a:txBody>
-                  <a:tcPr marL="73152" marR="73152" marT="18288" marB="18288" anchor="ctr">
+                  <a:tcPr anchor="ctr" marL="73152" marR="73152" marT="18288" marB="18288">
                     <a:solidFill>
                       <a:srgbClr val="0B3D2E"/>
                     </a:solidFill>
                   </a:tcPr>
                 </a:tc>
-                <a:extLst>
-                  <a:ext uri="{0D108BD9-81ED-4DB2-BD59-A6C34878D82A}">
-                    <a16:rowId xmlns:a16="http://schemas.microsoft.com/office/drawing/2014/main" val="10000"/>
-                  </a:ext>
-                </a:extLst>
               </a:tr>
               <a:tr h="365760">
                 <a:tc>
                   <a:txBody>
-                    <a:bodyPr/>
+                    <a:bodyPr wrap="square"/>
                     <a:lstStyle/>
                     <a:p>
                       <a:pPr algn="l"/>
@@ -7339,7 +7005,7 @@
                       </a:r>
                     </a:p>
                   </a:txBody>
-                  <a:tcPr marL="73152" marR="73152" marT="18288" marB="18288" anchor="ctr">
+                  <a:tcPr anchor="ctr" marL="73152" marR="73152" marT="18288" marB="18288">
                     <a:solidFill>
                       <a:srgbClr val="F0F4F2"/>
                     </a:solidFill>
@@ -7347,7 +7013,7 @@
                 </a:tc>
                 <a:tc>
                   <a:txBody>
-                    <a:bodyPr/>
+                    <a:bodyPr wrap="square"/>
                     <a:lstStyle/>
                     <a:p>
                       <a:pPr algn="l"/>
@@ -7362,22 +7028,17 @@
                       </a:r>
                     </a:p>
                   </a:txBody>
-                  <a:tcPr marL="73152" marR="73152" marT="18288" marB="18288" anchor="ctr">
+                  <a:tcPr anchor="ctr" marL="73152" marR="73152" marT="18288" marB="18288">
                     <a:solidFill>
                       <a:srgbClr val="F0F4F2"/>
                     </a:solidFill>
                   </a:tcPr>
                 </a:tc>
-                <a:extLst>
-                  <a:ext uri="{0D108BD9-81ED-4DB2-BD59-A6C34878D82A}">
-                    <a16:rowId xmlns:a16="http://schemas.microsoft.com/office/drawing/2014/main" val="10001"/>
-                  </a:ext>
-                </a:extLst>
               </a:tr>
               <a:tr h="365760">
                 <a:tc>
                   <a:txBody>
-                    <a:bodyPr/>
+                    <a:bodyPr wrap="square"/>
                     <a:lstStyle/>
                     <a:p>
                       <a:pPr algn="l"/>
@@ -7392,7 +7053,7 @@
                       </a:r>
                     </a:p>
                   </a:txBody>
-                  <a:tcPr marL="73152" marR="73152" marT="18288" marB="18288" anchor="ctr">
+                  <a:tcPr anchor="ctr" marL="73152" marR="73152" marT="18288" marB="18288">
                     <a:solidFill>
                       <a:srgbClr val="FFFFFF"/>
                     </a:solidFill>
@@ -7400,7 +7061,7 @@
                 </a:tc>
                 <a:tc>
                   <a:txBody>
-                    <a:bodyPr/>
+                    <a:bodyPr wrap="square"/>
                     <a:lstStyle/>
                     <a:p>
                       <a:pPr algn="l"/>
@@ -7415,22 +7076,17 @@
                       </a:r>
                     </a:p>
                   </a:txBody>
-                  <a:tcPr marL="73152" marR="73152" marT="18288" marB="18288" anchor="ctr">
+                  <a:tcPr anchor="ctr" marL="73152" marR="73152" marT="18288" marB="18288">
                     <a:solidFill>
                       <a:srgbClr val="FFFFFF"/>
                     </a:solidFill>
                   </a:tcPr>
                 </a:tc>
-                <a:extLst>
-                  <a:ext uri="{0D108BD9-81ED-4DB2-BD59-A6C34878D82A}">
-                    <a16:rowId xmlns:a16="http://schemas.microsoft.com/office/drawing/2014/main" val="10002"/>
-                  </a:ext>
-                </a:extLst>
               </a:tr>
               <a:tr h="365760">
                 <a:tc>
                   <a:txBody>
-                    <a:bodyPr/>
+                    <a:bodyPr wrap="square"/>
                     <a:lstStyle/>
                     <a:p>
                       <a:pPr algn="l"/>
@@ -7445,7 +7101,7 @@
                       </a:r>
                     </a:p>
                   </a:txBody>
-                  <a:tcPr marL="73152" marR="73152" marT="18288" marB="18288" anchor="ctr">
+                  <a:tcPr anchor="ctr" marL="73152" marR="73152" marT="18288" marB="18288">
                     <a:solidFill>
                       <a:srgbClr val="F0F4F2"/>
                     </a:solidFill>
@@ -7453,7 +7109,7 @@
                 </a:tc>
                 <a:tc>
                   <a:txBody>
-                    <a:bodyPr/>
+                    <a:bodyPr wrap="square"/>
                     <a:lstStyle/>
                     <a:p>
                       <a:pPr algn="l"/>
@@ -7468,22 +7124,17 @@
                       </a:r>
                     </a:p>
                   </a:txBody>
-                  <a:tcPr marL="73152" marR="73152" marT="18288" marB="18288" anchor="ctr">
+                  <a:tcPr anchor="ctr" marL="73152" marR="73152" marT="18288" marB="18288">
                     <a:solidFill>
                       <a:srgbClr val="F0F4F2"/>
                     </a:solidFill>
                   </a:tcPr>
                 </a:tc>
-                <a:extLst>
-                  <a:ext uri="{0D108BD9-81ED-4DB2-BD59-A6C34878D82A}">
-                    <a16:rowId xmlns:a16="http://schemas.microsoft.com/office/drawing/2014/main" val="10003"/>
-                  </a:ext>
-                </a:extLst>
               </a:tr>
               <a:tr h="365760">
                 <a:tc>
                   <a:txBody>
-                    <a:bodyPr/>
+                    <a:bodyPr wrap="square"/>
                     <a:lstStyle/>
                     <a:p>
                       <a:pPr algn="l"/>
@@ -7498,7 +7149,7 @@
                       </a:r>
                     </a:p>
                   </a:txBody>
-                  <a:tcPr marL="73152" marR="73152" marT="18288" marB="18288" anchor="ctr">
+                  <a:tcPr anchor="ctr" marL="73152" marR="73152" marT="18288" marB="18288">
                     <a:solidFill>
                       <a:srgbClr val="FFFFFF"/>
                     </a:solidFill>
@@ -7506,7 +7157,7 @@
                 </a:tc>
                 <a:tc>
                   <a:txBody>
-                    <a:bodyPr/>
+                    <a:bodyPr wrap="square"/>
                     <a:lstStyle/>
                     <a:p>
                       <a:pPr algn="l"/>
@@ -7521,22 +7172,17 @@
                       </a:r>
                     </a:p>
                   </a:txBody>
-                  <a:tcPr marL="73152" marR="73152" marT="18288" marB="18288" anchor="ctr">
+                  <a:tcPr anchor="ctr" marL="73152" marR="73152" marT="18288" marB="18288">
                     <a:solidFill>
                       <a:srgbClr val="FFFFFF"/>
                     </a:solidFill>
                   </a:tcPr>
                 </a:tc>
-                <a:extLst>
-                  <a:ext uri="{0D108BD9-81ED-4DB2-BD59-A6C34878D82A}">
-                    <a16:rowId xmlns:a16="http://schemas.microsoft.com/office/drawing/2014/main" val="10004"/>
-                  </a:ext>
-                </a:extLst>
               </a:tr>
               <a:tr h="365760">
                 <a:tc>
                   <a:txBody>
-                    <a:bodyPr/>
+                    <a:bodyPr wrap="square"/>
                     <a:lstStyle/>
                     <a:p>
                       <a:pPr algn="l"/>
@@ -7551,7 +7197,7 @@
                       </a:r>
                     </a:p>
                   </a:txBody>
-                  <a:tcPr marL="73152" marR="73152" marT="18288" marB="18288" anchor="ctr">
+                  <a:tcPr anchor="ctr" marL="73152" marR="73152" marT="18288" marB="18288">
                     <a:solidFill>
                       <a:srgbClr val="F0F4F2"/>
                     </a:solidFill>
@@ -7559,7 +7205,7 @@
                 </a:tc>
                 <a:tc>
                   <a:txBody>
-                    <a:bodyPr/>
+                    <a:bodyPr wrap="square"/>
                     <a:lstStyle/>
                     <a:p>
                       <a:pPr algn="l"/>
@@ -7574,17 +7220,12 @@
                       </a:r>
                     </a:p>
                   </a:txBody>
-                  <a:tcPr marL="73152" marR="73152" marT="18288" marB="18288" anchor="ctr">
+                  <a:tcPr anchor="ctr" marL="73152" marR="73152" marT="18288" marB="18288">
                     <a:solidFill>
                       <a:srgbClr val="F0F4F2"/>
                     </a:solidFill>
                   </a:tcPr>
                 </a:tc>
-                <a:extLst>
-                  <a:ext uri="{0D108BD9-81ED-4DB2-BD59-A6C34878D82A}">
-                    <a16:rowId xmlns:a16="http://schemas.microsoft.com/office/drawing/2014/main" val="10005"/>
-                  </a:ext>
-                </a:extLst>
               </a:tr>
             </a:tbl>
           </a:graphicData>
@@ -7607,12 +7248,12 @@
           <a:noFill/>
         </p:spPr>
         <p:txBody>
-          <a:bodyPr wrap="square" lIns="0" tIns="0" rIns="0" bIns="0" anchor="t">
+          <a:bodyPr wrap="square" anchor="t" lIns="0" rIns="0" tIns="0" bIns="0">
             <a:spAutoFit/>
           </a:bodyPr>
           <a:lstStyle/>
           <a:p>
-            <a:pPr marL="146304" indent="-146304" algn="l">
+            <a:pPr algn="l" marL="146304" indent="-146304">
               <a:buChar char="-"/>
             </a:pPr>
             <a:r>
@@ -7626,7 +7267,7 @@
             </a:r>
           </a:p>
           <a:p>
-            <a:pPr marL="146304" indent="-146304" algn="l">
+            <a:pPr algn="l" marL="146304" indent="-146304">
               <a:spcBef>
                 <a:spcPts val="200"/>
               </a:spcBef>
@@ -7661,7 +7302,7 @@
           <a:noFill/>
         </p:spPr>
         <p:txBody>
-          <a:bodyPr wrap="square" lIns="0" tIns="0" rIns="0" bIns="0" anchor="t">
+          <a:bodyPr wrap="square" anchor="t" lIns="0" rIns="0" tIns="0" bIns="0">
             <a:spAutoFit/>
           </a:bodyPr>
           <a:lstStyle/>
@@ -7720,7 +7361,6 @@
           <a:lstStyle/>
           <a:p>
             <a:pPr algn="ctr"/>
-            <a:endParaRPr/>
           </a:p>
         </p:txBody>
       </p:sp>
@@ -7741,7 +7381,7 @@
           <a:noFill/>
         </p:spPr>
         <p:txBody>
-          <a:bodyPr wrap="square" lIns="0" tIns="0" rIns="0" bIns="0" anchor="t">
+          <a:bodyPr wrap="square" anchor="t" lIns="0" rIns="0" tIns="0" bIns="0">
             <a:spAutoFit/>
           </a:bodyPr>
           <a:lstStyle/>
@@ -7771,12 +7411,15 @@
           </a:p>
           <a:p>
             <a:pPr algn="l"/>
-            <a:endParaRPr sz="750" b="0">
-              <a:solidFill>
-                <a:srgbClr val="E4EEEA"/>
-              </a:solidFill>
-              <a:latin typeface="Consolas"/>
-            </a:endParaRPr>
+            <a:r>
+              <a:rPr sz="750" b="0">
+                <a:solidFill>
+                  <a:srgbClr val="E4EEEA"/>
+                </a:solidFill>
+                <a:latin typeface="Consolas"/>
+              </a:rPr>
+              <a:t/>
+            </a:r>
           </a:p>
           <a:p>
             <a:pPr algn="l"/>
@@ -7873,7 +7516,7 @@
 </file>
 
 <file path=ppt/slides/slide5.xml><?xml version="1.0" encoding="utf-8"?>
-<p:sld xmlns:a="http://schemas.openxmlformats.org/drawingml/2006/main" xmlns:r="http://schemas.openxmlformats.org/officeDocument/2006/relationships" xmlns:p="http://schemas.openxmlformats.org/presentationml/2006/main">
+<p:sld xmlns:a="http://schemas.openxmlformats.org/drawingml/2006/main" xmlns:p="http://schemas.openxmlformats.org/presentationml/2006/main" xmlns:r="http://schemas.openxmlformats.org/officeDocument/2006/relationships">
   <p:cSld>
     <p:spTree>
       <p:nvGrpSpPr>
@@ -7881,14 +7524,7 @@
         <p:cNvGrpSpPr/>
         <p:nvPr/>
       </p:nvGrpSpPr>
-      <p:grpSpPr>
-        <a:xfrm>
-          <a:off x="0" y="0"/>
-          <a:ext cx="0" cy="0"/>
-          <a:chOff x="0" y="0"/>
-          <a:chExt cx="0" cy="0"/>
-        </a:xfrm>
-      </p:grpSpPr>
+      <p:grpSpPr/>
       <p:sp>
         <p:nvSpPr>
           <p:cNvPr id="2" name="Section"/>
@@ -7906,7 +7542,7 @@
           <a:noFill/>
         </p:spPr>
         <p:txBody>
-          <a:bodyPr wrap="square" lIns="0" tIns="0" rIns="0" bIns="0" anchor="t">
+          <a:bodyPr wrap="square" anchor="t" lIns="0" rIns="0" tIns="0" bIns="0">
             <a:spAutoFit/>
           </a:bodyPr>
           <a:lstStyle/>
@@ -7941,7 +7577,7 @@
           <a:noFill/>
         </p:spPr>
         <p:txBody>
-          <a:bodyPr wrap="square" lIns="0" tIns="0" rIns="0" bIns="0" anchor="t">
+          <a:bodyPr wrap="square" anchor="t" lIns="0" rIns="0" tIns="0" bIns="0">
             <a:spAutoFit/>
           </a:bodyPr>
           <a:lstStyle/>
@@ -7976,7 +7612,7 @@
           <a:noFill/>
         </p:spPr>
         <p:txBody>
-          <a:bodyPr wrap="square" lIns="0" tIns="0" rIns="0" bIns="0" anchor="t">
+          <a:bodyPr wrap="square" anchor="t" lIns="0" rIns="0" tIns="0" bIns="0">
             <a:spAutoFit/>
           </a:bodyPr>
           <a:lstStyle/>
@@ -8011,7 +7647,7 @@
           <a:noFill/>
         </p:spPr>
         <p:txBody>
-          <a:bodyPr wrap="square" lIns="0" tIns="0" rIns="0" bIns="0" anchor="t">
+          <a:bodyPr wrap="square" anchor="t" lIns="0" rIns="0" tIns="0" bIns="0">
             <a:spAutoFit/>
           </a:bodyPr>
           <a:lstStyle/>
@@ -8043,7 +7679,7 @@
         </p:xfrm>
         <a:graphic>
           <a:graphicData uri="http://schemas.openxmlformats.org/drawingml/2006/chart">
-            <c:chart xmlns:c="http://schemas.openxmlformats.org/drawingml/2006/chart" xmlns:r="http://schemas.openxmlformats.org/officeDocument/2006/relationships" r:id="rId3"/>
+            <c:chart xmlns:c="http://schemas.openxmlformats.org/drawingml/2006/chart" r:id="rId2"/>
           </a:graphicData>
         </a:graphic>
       </p:graphicFrame>
@@ -8061,7 +7697,7 @@
         </p:xfrm>
         <a:graphic>
           <a:graphicData uri="http://schemas.openxmlformats.org/drawingml/2006/chart">
-            <c:chart xmlns:c="http://schemas.openxmlformats.org/drawingml/2006/chart" xmlns:r="http://schemas.openxmlformats.org/officeDocument/2006/relationships" r:id="rId4"/>
+            <c:chart xmlns:c="http://schemas.openxmlformats.org/drawingml/2006/chart" r:id="rId3"/>
           </a:graphicData>
         </a:graphic>
       </p:graphicFrame>
@@ -8082,12 +7718,12 @@
           <a:noFill/>
         </p:spPr>
         <p:txBody>
-          <a:bodyPr wrap="square" lIns="0" tIns="0" rIns="0" bIns="0" anchor="t">
+          <a:bodyPr wrap="square" anchor="t" lIns="0" rIns="0" tIns="0" bIns="0">
             <a:spAutoFit/>
           </a:bodyPr>
           <a:lstStyle/>
           <a:p>
-            <a:pPr marL="146304" indent="-146304" algn="l">
+            <a:pPr algn="l" marL="146304" indent="-146304">
               <a:buChar char="-"/>
             </a:pPr>
             <a:r>
@@ -8110,7 +7746,7 @@
             </a:r>
           </a:p>
           <a:p>
-            <a:pPr marL="146304" indent="-146304" algn="l">
+            <a:pPr algn="l" marL="146304" indent="-146304">
               <a:spcBef>
                 <a:spcPts val="400"/>
               </a:spcBef>
@@ -8123,7 +7759,7 @@
                 </a:solidFill>
                 <a:latin typeface="Malgun Gothic"/>
               </a:rPr>
-              <a:t>불만 때문은 아님: </a:t>
+              <a:t>첫 구매 경험: </a:t>
             </a:r>
             <a:r>
               <a:rPr sz="1150" b="0">
@@ -8132,7 +7768,7 @@
                 </a:solidFill>
                 <a:latin typeface="Malgun Gothic"/>
               </a:rPr>
-              <a:t>첫 구매 평점 4.05점 (최근 우수 4.15점), 늦은 주문 9% (최근 우수 8%)</a:t>
+              <a:t>평점 4.05점 (최근 우수 4.15점), 늦은 주문 9% (8%). 평점만으로 이탈 원인은 단정할 수 없음</a:t>
             </a:r>
           </a:p>
         </p:txBody>
@@ -8178,7 +7814,6 @@
           <a:lstStyle/>
           <a:p>
             <a:pPr algn="ctr"/>
-            <a:endParaRPr/>
           </a:p>
         </p:txBody>
       </p:sp>
@@ -8191,7 +7826,7 @@
 </file>
 
 <file path=ppt/slides/slide6.xml><?xml version="1.0" encoding="utf-8"?>
-<p:sld xmlns:a="http://schemas.openxmlformats.org/drawingml/2006/main" xmlns:r="http://schemas.openxmlformats.org/officeDocument/2006/relationships" xmlns:p="http://schemas.openxmlformats.org/presentationml/2006/main">
+<p:sld xmlns:a="http://schemas.openxmlformats.org/drawingml/2006/main" xmlns:p="http://schemas.openxmlformats.org/presentationml/2006/main" xmlns:r="http://schemas.openxmlformats.org/officeDocument/2006/relationships">
   <p:cSld>
     <p:spTree>
       <p:nvGrpSpPr>
@@ -8199,14 +7834,7 @@
         <p:cNvGrpSpPr/>
         <p:nvPr/>
       </p:nvGrpSpPr>
-      <p:grpSpPr>
-        <a:xfrm>
-          <a:off x="0" y="0"/>
-          <a:ext cx="0" cy="0"/>
-          <a:chOff x="0" y="0"/>
-          <a:chExt cx="0" cy="0"/>
-        </a:xfrm>
-      </p:grpSpPr>
+      <p:grpSpPr/>
       <p:sp>
         <p:nvSpPr>
           <p:cNvPr id="2" name="Section"/>
@@ -8224,7 +7852,7 @@
           <a:noFill/>
         </p:spPr>
         <p:txBody>
-          <a:bodyPr wrap="square" lIns="0" tIns="0" rIns="0" bIns="0" anchor="t">
+          <a:bodyPr wrap="square" anchor="t" lIns="0" rIns="0" tIns="0" bIns="0">
             <a:spAutoFit/>
           </a:bodyPr>
           <a:lstStyle/>
@@ -8259,7 +7887,7 @@
           <a:noFill/>
         </p:spPr>
         <p:txBody>
-          <a:bodyPr wrap="square" lIns="0" tIns="0" rIns="0" bIns="0" anchor="t">
+          <a:bodyPr wrap="square" anchor="t" lIns="0" rIns="0" tIns="0" bIns="0">
             <a:spAutoFit/>
           </a:bodyPr>
           <a:lstStyle/>
@@ -8294,7 +7922,7 @@
           <a:noFill/>
         </p:spPr>
         <p:txBody>
-          <a:bodyPr wrap="square" lIns="0" tIns="0" rIns="0" bIns="0" anchor="t">
+          <a:bodyPr wrap="square" anchor="t" lIns="0" rIns="0" tIns="0" bIns="0">
             <a:spAutoFit/>
           </a:bodyPr>
           <a:lstStyle/>
@@ -8329,7 +7957,7 @@
           <a:noFill/>
         </p:spPr>
         <p:txBody>
-          <a:bodyPr wrap="square" lIns="0" tIns="0" rIns="0" bIns="0" anchor="t">
+          <a:bodyPr wrap="square" anchor="t" lIns="0" rIns="0" tIns="0" bIns="0">
             <a:spAutoFit/>
           </a:bodyPr>
           <a:lstStyle/>
@@ -8366,60 +7994,18 @@
                 <a:tableStyleId>{2D5ABB26-0587-4C30-8999-92F81FD0307C}</a:tableStyleId>
               </a:tblPr>
               <a:tblGrid>
-                <a:gridCol w="640080">
-                  <a:extLst>
-                    <a:ext uri="{9D8B030D-6E8A-4147-A177-3AD203B41FA5}">
-                      <a16:colId xmlns:a16="http://schemas.microsoft.com/office/drawing/2014/main" val="20000"/>
-                    </a:ext>
-                  </a:extLst>
-                </a:gridCol>
-                <a:gridCol w="1097280">
-                  <a:extLst>
-                    <a:ext uri="{9D8B030D-6E8A-4147-A177-3AD203B41FA5}">
-                      <a16:colId xmlns:a16="http://schemas.microsoft.com/office/drawing/2014/main" val="20001"/>
-                    </a:ext>
-                  </a:extLst>
-                </a:gridCol>
-                <a:gridCol w="914400">
-                  <a:extLst>
-                    <a:ext uri="{9D8B030D-6E8A-4147-A177-3AD203B41FA5}">
-                      <a16:colId xmlns:a16="http://schemas.microsoft.com/office/drawing/2014/main" val="20002"/>
-                    </a:ext>
-                  </a:extLst>
-                </a:gridCol>
-                <a:gridCol w="822960">
-                  <a:extLst>
-                    <a:ext uri="{9D8B030D-6E8A-4147-A177-3AD203B41FA5}">
-                      <a16:colId xmlns:a16="http://schemas.microsoft.com/office/drawing/2014/main" val="20003"/>
-                    </a:ext>
-                  </a:extLst>
-                </a:gridCol>
-                <a:gridCol w="914400">
-                  <a:extLst>
-                    <a:ext uri="{9D8B030D-6E8A-4147-A177-3AD203B41FA5}">
-                      <a16:colId xmlns:a16="http://schemas.microsoft.com/office/drawing/2014/main" val="20004"/>
-                    </a:ext>
-                  </a:extLst>
-                </a:gridCol>
-                <a:gridCol w="1005840">
-                  <a:extLst>
-                    <a:ext uri="{9D8B030D-6E8A-4147-A177-3AD203B41FA5}">
-                      <a16:colId xmlns:a16="http://schemas.microsoft.com/office/drawing/2014/main" val="20005"/>
-                    </a:ext>
-                  </a:extLst>
-                </a:gridCol>
-                <a:gridCol w="2834640">
-                  <a:extLst>
-                    <a:ext uri="{9D8B030D-6E8A-4147-A177-3AD203B41FA5}">
-                      <a16:colId xmlns:a16="http://schemas.microsoft.com/office/drawing/2014/main" val="20006"/>
-                    </a:ext>
-                  </a:extLst>
-                </a:gridCol>
+                <a:gridCol w="640080"/>
+                <a:gridCol w="1097280"/>
+                <a:gridCol w="914400"/>
+                <a:gridCol w="822960"/>
+                <a:gridCol w="914400"/>
+                <a:gridCol w="1005840"/>
+                <a:gridCol w="2834640"/>
               </a:tblGrid>
               <a:tr h="429768">
                 <a:tc>
                   <a:txBody>
-                    <a:bodyPr/>
+                    <a:bodyPr wrap="square"/>
                     <a:lstStyle/>
                     <a:p>
                       <a:pPr algn="l"/>
@@ -8434,7 +8020,7 @@
                       </a:r>
                     </a:p>
                   </a:txBody>
-                  <a:tcPr marL="73152" marR="73152" marT="18288" marB="18288" anchor="ctr">
+                  <a:tcPr anchor="ctr" marL="73152" marR="73152" marT="18288" marB="18288">
                     <a:solidFill>
                       <a:srgbClr val="0B3D2E"/>
                     </a:solidFill>
@@ -8442,7 +8028,7 @@
                 </a:tc>
                 <a:tc>
                   <a:txBody>
-                    <a:bodyPr/>
+                    <a:bodyPr wrap="square"/>
                     <a:lstStyle/>
                     <a:p>
                       <a:pPr algn="l"/>
@@ -8457,7 +8043,7 @@
                       </a:r>
                     </a:p>
                   </a:txBody>
-                  <a:tcPr marL="73152" marR="73152" marT="18288" marB="18288" anchor="ctr">
+                  <a:tcPr anchor="ctr" marL="73152" marR="73152" marT="18288" marB="18288">
                     <a:solidFill>
                       <a:srgbClr val="0B3D2E"/>
                     </a:solidFill>
@@ -8465,7 +8051,7 @@
                 </a:tc>
                 <a:tc>
                   <a:txBody>
-                    <a:bodyPr/>
+                    <a:bodyPr wrap="square"/>
                     <a:lstStyle/>
                     <a:p>
                       <a:pPr algn="r"/>
@@ -8480,7 +8066,7 @@
                       </a:r>
                     </a:p>
                   </a:txBody>
-                  <a:tcPr marL="73152" marR="73152" marT="18288" marB="18288" anchor="ctr">
+                  <a:tcPr anchor="ctr" marL="73152" marR="73152" marT="18288" marB="18288">
                     <a:solidFill>
                       <a:srgbClr val="0B3D2E"/>
                     </a:solidFill>
@@ -8488,7 +8074,7 @@
                 </a:tc>
                 <a:tc>
                   <a:txBody>
-                    <a:bodyPr/>
+                    <a:bodyPr wrap="square"/>
                     <a:lstStyle/>
                     <a:p>
                       <a:pPr algn="r"/>
@@ -8503,7 +8089,7 @@
                       </a:r>
                     </a:p>
                   </a:txBody>
-                  <a:tcPr marL="73152" marR="73152" marT="18288" marB="18288" anchor="ctr">
+                  <a:tcPr anchor="ctr" marL="73152" marR="73152" marT="18288" marB="18288">
                     <a:solidFill>
                       <a:srgbClr val="0B3D2E"/>
                     </a:solidFill>
@@ -8511,7 +8097,7 @@
                 </a:tc>
                 <a:tc>
                   <a:txBody>
-                    <a:bodyPr/>
+                    <a:bodyPr wrap="square"/>
                     <a:lstStyle/>
                     <a:p>
                       <a:pPr algn="r"/>
@@ -8526,7 +8112,7 @@
                       </a:r>
                     </a:p>
                   </a:txBody>
-                  <a:tcPr marL="73152" marR="73152" marT="18288" marB="18288" anchor="ctr">
+                  <a:tcPr anchor="ctr" marL="73152" marR="73152" marT="18288" marB="18288">
                     <a:solidFill>
                       <a:srgbClr val="0B3D2E"/>
                     </a:solidFill>
@@ -8534,7 +8120,7 @@
                 </a:tc>
                 <a:tc>
                   <a:txBody>
-                    <a:bodyPr/>
+                    <a:bodyPr wrap="square"/>
                     <a:lstStyle/>
                     <a:p>
                       <a:pPr algn="r"/>
@@ -8550,7 +8136,7 @@
                       </a:r>
                     </a:p>
                   </a:txBody>
-                  <a:tcPr marL="73152" marR="73152" marT="18288" marB="18288" anchor="ctr">
+                  <a:tcPr anchor="ctr" marL="73152" marR="73152" marT="18288" marB="18288">
                     <a:solidFill>
                       <a:srgbClr val="0B3D2E"/>
                     </a:solidFill>
@@ -8558,7 +8144,7 @@
                 </a:tc>
                 <a:tc>
                   <a:txBody>
-                    <a:bodyPr/>
+                    <a:bodyPr wrap="square"/>
                     <a:lstStyle/>
                     <a:p>
                       <a:pPr algn="l"/>
@@ -8573,22 +8159,17 @@
                       </a:r>
                     </a:p>
                   </a:txBody>
-                  <a:tcPr marL="73152" marR="73152" marT="18288" marB="18288" anchor="ctr">
+                  <a:tcPr anchor="ctr" marL="73152" marR="73152" marT="18288" marB="18288">
                     <a:solidFill>
                       <a:srgbClr val="0B3D2E"/>
                     </a:solidFill>
                   </a:tcPr>
                 </a:tc>
-                <a:extLst>
-                  <a:ext uri="{0D108BD9-81ED-4DB2-BD59-A6C34878D82A}">
-                    <a16:rowId xmlns:a16="http://schemas.microsoft.com/office/drawing/2014/main" val="10000"/>
-                  </a:ext>
-                </a:extLst>
               </a:tr>
               <a:tr h="429768">
                 <a:tc>
                   <a:txBody>
-                    <a:bodyPr/>
+                    <a:bodyPr wrap="square"/>
                     <a:lstStyle/>
                     <a:p>
                       <a:pPr algn="l"/>
@@ -8603,7 +8184,7 @@
                       </a:r>
                     </a:p>
                   </a:txBody>
-                  <a:tcPr marL="73152" marR="73152" marT="18288" marB="18288" anchor="ctr">
+                  <a:tcPr anchor="ctr" marL="73152" marR="73152" marT="18288" marB="18288">
                     <a:solidFill>
                       <a:srgbClr val="F0F4F2"/>
                     </a:solidFill>
@@ -8611,7 +8192,7 @@
                 </a:tc>
                 <a:tc>
                   <a:txBody>
-                    <a:bodyPr/>
+                    <a:bodyPr wrap="square"/>
                     <a:lstStyle/>
                     <a:p>
                       <a:pPr algn="l"/>
@@ -8626,7 +8207,7 @@
                       </a:r>
                     </a:p>
                   </a:txBody>
-                  <a:tcPr marL="73152" marR="73152" marT="18288" marB="18288" anchor="ctr">
+                  <a:tcPr anchor="ctr" marL="73152" marR="73152" marT="18288" marB="18288">
                     <a:solidFill>
                       <a:srgbClr val="F0F4F2"/>
                     </a:solidFill>
@@ -8634,7 +8215,7 @@
                 </a:tc>
                 <a:tc>
                   <a:txBody>
-                    <a:bodyPr/>
+                    <a:bodyPr wrap="square"/>
                     <a:lstStyle/>
                     <a:p>
                       <a:pPr algn="r"/>
@@ -8649,7 +8230,7 @@
                       </a:r>
                     </a:p>
                   </a:txBody>
-                  <a:tcPr marL="73152" marR="73152" marT="18288" marB="18288" anchor="ctr">
+                  <a:tcPr anchor="ctr" marL="73152" marR="73152" marT="18288" marB="18288">
                     <a:solidFill>
                       <a:srgbClr val="F0F4F2"/>
                     </a:solidFill>
@@ -8657,7 +8238,7 @@
                 </a:tc>
                 <a:tc>
                   <a:txBody>
-                    <a:bodyPr/>
+                    <a:bodyPr wrap="square"/>
                     <a:lstStyle/>
                     <a:p>
                       <a:pPr algn="r"/>
@@ -8672,7 +8253,7 @@
                       </a:r>
                     </a:p>
                   </a:txBody>
-                  <a:tcPr marL="73152" marR="73152" marT="18288" marB="18288" anchor="ctr">
+                  <a:tcPr anchor="ctr" marL="73152" marR="73152" marT="18288" marB="18288">
                     <a:solidFill>
                       <a:srgbClr val="F0F4F2"/>
                     </a:solidFill>
@@ -8680,7 +8261,7 @@
                 </a:tc>
                 <a:tc>
                   <a:txBody>
-                    <a:bodyPr/>
+                    <a:bodyPr wrap="square"/>
                     <a:lstStyle/>
                     <a:p>
                       <a:pPr algn="r"/>
@@ -8695,7 +8276,7 @@
                       </a:r>
                     </a:p>
                   </a:txBody>
-                  <a:tcPr marL="73152" marR="73152" marT="18288" marB="18288" anchor="ctr">
+                  <a:tcPr anchor="ctr" marL="73152" marR="73152" marT="18288" marB="18288">
                     <a:solidFill>
                       <a:srgbClr val="F0F4F2"/>
                     </a:solidFill>
@@ -8703,7 +8284,7 @@
                 </a:tc>
                 <a:tc>
                   <a:txBody>
-                    <a:bodyPr/>
+                    <a:bodyPr wrap="square"/>
                     <a:lstStyle/>
                     <a:p>
                       <a:pPr algn="r"/>
@@ -8718,7 +8299,7 @@
                       </a:r>
                     </a:p>
                   </a:txBody>
-                  <a:tcPr marL="73152" marR="73152" marT="18288" marB="18288" anchor="ctr">
+                  <a:tcPr anchor="ctr" marL="73152" marR="73152" marT="18288" marB="18288">
                     <a:solidFill>
                       <a:srgbClr val="F0F4F2"/>
                     </a:solidFill>
@@ -8726,7 +8307,7 @@
                 </a:tc>
                 <a:tc>
                   <a:txBody>
-                    <a:bodyPr/>
+                    <a:bodyPr wrap="square"/>
                     <a:lstStyle/>
                     <a:p>
                       <a:pPr algn="l"/>
@@ -8741,22 +8322,17 @@
                       </a:r>
                     </a:p>
                   </a:txBody>
-                  <a:tcPr marL="73152" marR="73152" marT="18288" marB="18288" anchor="ctr">
+                  <a:tcPr anchor="ctr" marL="73152" marR="73152" marT="18288" marB="18288">
                     <a:solidFill>
                       <a:srgbClr val="F0F4F2"/>
                     </a:solidFill>
                   </a:tcPr>
                 </a:tc>
-                <a:extLst>
-                  <a:ext uri="{0D108BD9-81ED-4DB2-BD59-A6C34878D82A}">
-                    <a16:rowId xmlns:a16="http://schemas.microsoft.com/office/drawing/2014/main" val="10001"/>
-                  </a:ext>
-                </a:extLst>
               </a:tr>
               <a:tr h="429768">
                 <a:tc>
                   <a:txBody>
-                    <a:bodyPr/>
+                    <a:bodyPr wrap="square"/>
                     <a:lstStyle/>
                     <a:p>
                       <a:pPr algn="l"/>
@@ -8771,7 +8347,7 @@
                       </a:r>
                     </a:p>
                   </a:txBody>
-                  <a:tcPr marL="73152" marR="73152" marT="18288" marB="18288" anchor="ctr">
+                  <a:tcPr anchor="ctr" marL="73152" marR="73152" marT="18288" marB="18288">
                     <a:solidFill>
                       <a:srgbClr val="FFFFFF"/>
                     </a:solidFill>
@@ -8779,7 +8355,7 @@
                 </a:tc>
                 <a:tc>
                   <a:txBody>
-                    <a:bodyPr/>
+                    <a:bodyPr wrap="square"/>
                     <a:lstStyle/>
                     <a:p>
                       <a:pPr algn="l"/>
@@ -8794,7 +8370,7 @@
                       </a:r>
                     </a:p>
                   </a:txBody>
-                  <a:tcPr marL="73152" marR="73152" marT="18288" marB="18288" anchor="ctr">
+                  <a:tcPr anchor="ctr" marL="73152" marR="73152" marT="18288" marB="18288">
                     <a:solidFill>
                       <a:srgbClr val="FFFFFF"/>
                     </a:solidFill>
@@ -8802,7 +8378,7 @@
                 </a:tc>
                 <a:tc>
                   <a:txBody>
-                    <a:bodyPr/>
+                    <a:bodyPr wrap="square"/>
                     <a:lstStyle/>
                     <a:p>
                       <a:pPr algn="r"/>
@@ -8817,7 +8393,7 @@
                       </a:r>
                     </a:p>
                   </a:txBody>
-                  <a:tcPr marL="73152" marR="73152" marT="18288" marB="18288" anchor="ctr">
+                  <a:tcPr anchor="ctr" marL="73152" marR="73152" marT="18288" marB="18288">
                     <a:solidFill>
                       <a:srgbClr val="FFFFFF"/>
                     </a:solidFill>
@@ -8825,7 +8401,7 @@
                 </a:tc>
                 <a:tc>
                   <a:txBody>
-                    <a:bodyPr/>
+                    <a:bodyPr wrap="square"/>
                     <a:lstStyle/>
                     <a:p>
                       <a:pPr algn="r"/>
@@ -8840,7 +8416,7 @@
                       </a:r>
                     </a:p>
                   </a:txBody>
-                  <a:tcPr marL="73152" marR="73152" marT="18288" marB="18288" anchor="ctr">
+                  <a:tcPr anchor="ctr" marL="73152" marR="73152" marT="18288" marB="18288">
                     <a:solidFill>
                       <a:srgbClr val="FFFFFF"/>
                     </a:solidFill>
@@ -8848,7 +8424,7 @@
                 </a:tc>
                 <a:tc>
                   <a:txBody>
-                    <a:bodyPr/>
+                    <a:bodyPr wrap="square"/>
                     <a:lstStyle/>
                     <a:p>
                       <a:pPr algn="r"/>
@@ -8863,7 +8439,7 @@
                       </a:r>
                     </a:p>
                   </a:txBody>
-                  <a:tcPr marL="73152" marR="73152" marT="18288" marB="18288" anchor="ctr">
+                  <a:tcPr anchor="ctr" marL="73152" marR="73152" marT="18288" marB="18288">
                     <a:solidFill>
                       <a:srgbClr val="FFFFFF"/>
                     </a:solidFill>
@@ -8871,7 +8447,7 @@
                 </a:tc>
                 <a:tc>
                   <a:txBody>
-                    <a:bodyPr/>
+                    <a:bodyPr wrap="square"/>
                     <a:lstStyle/>
                     <a:p>
                       <a:pPr algn="r"/>
@@ -8886,7 +8462,7 @@
                       </a:r>
                     </a:p>
                   </a:txBody>
-                  <a:tcPr marL="73152" marR="73152" marT="18288" marB="18288" anchor="ctr">
+                  <a:tcPr anchor="ctr" marL="73152" marR="73152" marT="18288" marB="18288">
                     <a:solidFill>
                       <a:srgbClr val="FFFFFF"/>
                     </a:solidFill>
@@ -8894,7 +8470,7 @@
                 </a:tc>
                 <a:tc>
                   <a:txBody>
-                    <a:bodyPr/>
+                    <a:bodyPr wrap="square"/>
                     <a:lstStyle/>
                     <a:p>
                       <a:pPr algn="l"/>
@@ -8909,22 +8485,17 @@
                       </a:r>
                     </a:p>
                   </a:txBody>
-                  <a:tcPr marL="73152" marR="73152" marT="18288" marB="18288" anchor="ctr">
+                  <a:tcPr anchor="ctr" marL="73152" marR="73152" marT="18288" marB="18288">
                     <a:solidFill>
                       <a:srgbClr val="FFFFFF"/>
                     </a:solidFill>
                   </a:tcPr>
                 </a:tc>
-                <a:extLst>
-                  <a:ext uri="{0D108BD9-81ED-4DB2-BD59-A6C34878D82A}">
-                    <a16:rowId xmlns:a16="http://schemas.microsoft.com/office/drawing/2014/main" val="10002"/>
-                  </a:ext>
-                </a:extLst>
               </a:tr>
               <a:tr h="429768">
                 <a:tc>
                   <a:txBody>
-                    <a:bodyPr/>
+                    <a:bodyPr wrap="square"/>
                     <a:lstStyle/>
                     <a:p>
                       <a:pPr algn="l"/>
@@ -8939,7 +8510,7 @@
                       </a:r>
                     </a:p>
                   </a:txBody>
-                  <a:tcPr marL="73152" marR="73152" marT="18288" marB="18288" anchor="ctr">
+                  <a:tcPr anchor="ctr" marL="73152" marR="73152" marT="18288" marB="18288">
                     <a:solidFill>
                       <a:srgbClr val="F0F4F2"/>
                     </a:solidFill>
@@ -8947,7 +8518,7 @@
                 </a:tc>
                 <a:tc>
                   <a:txBody>
-                    <a:bodyPr/>
+                    <a:bodyPr wrap="square"/>
                     <a:lstStyle/>
                     <a:p>
                       <a:pPr algn="l"/>
@@ -8962,7 +8533,7 @@
                       </a:r>
                     </a:p>
                   </a:txBody>
-                  <a:tcPr marL="73152" marR="73152" marT="18288" marB="18288" anchor="ctr">
+                  <a:tcPr anchor="ctr" marL="73152" marR="73152" marT="18288" marB="18288">
                     <a:solidFill>
                       <a:srgbClr val="F0F4F2"/>
                     </a:solidFill>
@@ -8970,7 +8541,7 @@
                 </a:tc>
                 <a:tc>
                   <a:txBody>
-                    <a:bodyPr/>
+                    <a:bodyPr wrap="square"/>
                     <a:lstStyle/>
                     <a:p>
                       <a:pPr algn="r"/>
@@ -8985,7 +8556,7 @@
                       </a:r>
                     </a:p>
                   </a:txBody>
-                  <a:tcPr marL="73152" marR="73152" marT="18288" marB="18288" anchor="ctr">
+                  <a:tcPr anchor="ctr" marL="73152" marR="73152" marT="18288" marB="18288">
                     <a:solidFill>
                       <a:srgbClr val="F0F4F2"/>
                     </a:solidFill>
@@ -8993,7 +8564,7 @@
                 </a:tc>
                 <a:tc>
                   <a:txBody>
-                    <a:bodyPr/>
+                    <a:bodyPr wrap="square"/>
                     <a:lstStyle/>
                     <a:p>
                       <a:pPr algn="r"/>
@@ -9008,7 +8579,7 @@
                       </a:r>
                     </a:p>
                   </a:txBody>
-                  <a:tcPr marL="73152" marR="73152" marT="18288" marB="18288" anchor="ctr">
+                  <a:tcPr anchor="ctr" marL="73152" marR="73152" marT="18288" marB="18288">
                     <a:solidFill>
                       <a:srgbClr val="F0F4F2"/>
                     </a:solidFill>
@@ -9016,7 +8587,7 @@
                 </a:tc>
                 <a:tc>
                   <a:txBody>
-                    <a:bodyPr/>
+                    <a:bodyPr wrap="square"/>
                     <a:lstStyle/>
                     <a:p>
                       <a:pPr algn="r"/>
@@ -9031,7 +8602,7 @@
                       </a:r>
                     </a:p>
                   </a:txBody>
-                  <a:tcPr marL="73152" marR="73152" marT="18288" marB="18288" anchor="ctr">
+                  <a:tcPr anchor="ctr" marL="73152" marR="73152" marT="18288" marB="18288">
                     <a:solidFill>
                       <a:srgbClr val="F0F4F2"/>
                     </a:solidFill>
@@ -9039,7 +8610,7 @@
                 </a:tc>
                 <a:tc>
                   <a:txBody>
-                    <a:bodyPr/>
+                    <a:bodyPr wrap="square"/>
                     <a:lstStyle/>
                     <a:p>
                       <a:pPr algn="r"/>
@@ -9054,7 +8625,7 @@
                       </a:r>
                     </a:p>
                   </a:txBody>
-                  <a:tcPr marL="73152" marR="73152" marT="18288" marB="18288" anchor="ctr">
+                  <a:tcPr anchor="ctr" marL="73152" marR="73152" marT="18288" marB="18288">
                     <a:solidFill>
                       <a:srgbClr val="F0F4F2"/>
                     </a:solidFill>
@@ -9062,7 +8633,7 @@
                 </a:tc>
                 <a:tc>
                   <a:txBody>
-                    <a:bodyPr/>
+                    <a:bodyPr wrap="square"/>
                     <a:lstStyle/>
                     <a:p>
                       <a:pPr algn="l"/>
@@ -9077,22 +8648,17 @@
                       </a:r>
                     </a:p>
                   </a:txBody>
-                  <a:tcPr marL="73152" marR="73152" marT="18288" marB="18288" anchor="ctr">
+                  <a:tcPr anchor="ctr" marL="73152" marR="73152" marT="18288" marB="18288">
                     <a:solidFill>
                       <a:srgbClr val="F0F4F2"/>
                     </a:solidFill>
                   </a:tcPr>
                 </a:tc>
-                <a:extLst>
-                  <a:ext uri="{0D108BD9-81ED-4DB2-BD59-A6C34878D82A}">
-                    <a16:rowId xmlns:a16="http://schemas.microsoft.com/office/drawing/2014/main" val="10003"/>
-                  </a:ext>
-                </a:extLst>
               </a:tr>
               <a:tr h="429768">
                 <a:tc>
                   <a:txBody>
-                    <a:bodyPr/>
+                    <a:bodyPr wrap="square"/>
                     <a:lstStyle/>
                     <a:p>
                       <a:pPr algn="l"/>
@@ -9107,7 +8673,7 @@
                       </a:r>
                     </a:p>
                   </a:txBody>
-                  <a:tcPr marL="73152" marR="73152" marT="18288" marB="18288" anchor="ctr">
+                  <a:tcPr anchor="ctr" marL="73152" marR="73152" marT="18288" marB="18288">
                     <a:solidFill>
                       <a:srgbClr val="FFFFFF"/>
                     </a:solidFill>
@@ -9115,7 +8681,7 @@
                 </a:tc>
                 <a:tc>
                   <a:txBody>
-                    <a:bodyPr/>
+                    <a:bodyPr wrap="square"/>
                     <a:lstStyle/>
                     <a:p>
                       <a:pPr algn="l"/>
@@ -9130,7 +8696,7 @@
                       </a:r>
                     </a:p>
                   </a:txBody>
-                  <a:tcPr marL="73152" marR="73152" marT="18288" marB="18288" anchor="ctr">
+                  <a:tcPr anchor="ctr" marL="73152" marR="73152" marT="18288" marB="18288">
                     <a:solidFill>
                       <a:srgbClr val="FFFFFF"/>
                     </a:solidFill>
@@ -9138,7 +8704,7 @@
                 </a:tc>
                 <a:tc>
                   <a:txBody>
-                    <a:bodyPr/>
+                    <a:bodyPr wrap="square"/>
                     <a:lstStyle/>
                     <a:p>
                       <a:pPr algn="r"/>
@@ -9153,7 +8719,7 @@
                       </a:r>
                     </a:p>
                   </a:txBody>
-                  <a:tcPr marL="73152" marR="73152" marT="18288" marB="18288" anchor="ctr">
+                  <a:tcPr anchor="ctr" marL="73152" marR="73152" marT="18288" marB="18288">
                     <a:solidFill>
                       <a:srgbClr val="FFFFFF"/>
                     </a:solidFill>
@@ -9161,7 +8727,7 @@
                 </a:tc>
                 <a:tc>
                   <a:txBody>
-                    <a:bodyPr/>
+                    <a:bodyPr wrap="square"/>
                     <a:lstStyle/>
                     <a:p>
                       <a:pPr algn="r"/>
@@ -9176,7 +8742,7 @@
                       </a:r>
                     </a:p>
                   </a:txBody>
-                  <a:tcPr marL="73152" marR="73152" marT="18288" marB="18288" anchor="ctr">
+                  <a:tcPr anchor="ctr" marL="73152" marR="73152" marT="18288" marB="18288">
                     <a:solidFill>
                       <a:srgbClr val="FFFFFF"/>
                     </a:solidFill>
@@ -9184,7 +8750,7 @@
                 </a:tc>
                 <a:tc>
                   <a:txBody>
-                    <a:bodyPr/>
+                    <a:bodyPr wrap="square"/>
                     <a:lstStyle/>
                     <a:p>
                       <a:pPr algn="r"/>
@@ -9199,7 +8765,7 @@
                       </a:r>
                     </a:p>
                   </a:txBody>
-                  <a:tcPr marL="73152" marR="73152" marT="18288" marB="18288" anchor="ctr">
+                  <a:tcPr anchor="ctr" marL="73152" marR="73152" marT="18288" marB="18288">
                     <a:solidFill>
                       <a:srgbClr val="FFFFFF"/>
                     </a:solidFill>
@@ -9207,7 +8773,7 @@
                 </a:tc>
                 <a:tc>
                   <a:txBody>
-                    <a:bodyPr/>
+                    <a:bodyPr wrap="square"/>
                     <a:lstStyle/>
                     <a:p>
                       <a:pPr algn="r"/>
@@ -9222,7 +8788,7 @@
                       </a:r>
                     </a:p>
                   </a:txBody>
-                  <a:tcPr marL="73152" marR="73152" marT="18288" marB="18288" anchor="ctr">
+                  <a:tcPr anchor="ctr" marL="73152" marR="73152" marT="18288" marB="18288">
                     <a:solidFill>
                       <a:srgbClr val="FFFFFF"/>
                     </a:solidFill>
@@ -9230,7 +8796,7 @@
                 </a:tc>
                 <a:tc>
                   <a:txBody>
-                    <a:bodyPr/>
+                    <a:bodyPr wrap="square"/>
                     <a:lstStyle/>
                     <a:p>
                       <a:pPr algn="l"/>
@@ -9245,22 +8811,17 @@
                       </a:r>
                     </a:p>
                   </a:txBody>
-                  <a:tcPr marL="73152" marR="73152" marT="18288" marB="18288" anchor="ctr">
+                  <a:tcPr anchor="ctr" marL="73152" marR="73152" marT="18288" marB="18288">
                     <a:solidFill>
                       <a:srgbClr val="FFFFFF"/>
                     </a:solidFill>
                   </a:tcPr>
                 </a:tc>
-                <a:extLst>
-                  <a:ext uri="{0D108BD9-81ED-4DB2-BD59-A6C34878D82A}">
-                    <a16:rowId xmlns:a16="http://schemas.microsoft.com/office/drawing/2014/main" val="10004"/>
-                  </a:ext>
-                </a:extLst>
               </a:tr>
               <a:tr h="429768">
                 <a:tc>
                   <a:txBody>
-                    <a:bodyPr/>
+                    <a:bodyPr wrap="square"/>
                     <a:lstStyle/>
                     <a:p>
                       <a:pPr algn="l"/>
@@ -9275,7 +8836,7 @@
                       </a:r>
                     </a:p>
                   </a:txBody>
-                  <a:tcPr marL="73152" marR="73152" marT="18288" marB="18288" anchor="ctr">
+                  <a:tcPr anchor="ctr" marL="73152" marR="73152" marT="18288" marB="18288">
                     <a:solidFill>
                       <a:srgbClr val="F0F4F2"/>
                     </a:solidFill>
@@ -9283,7 +8844,7 @@
                 </a:tc>
                 <a:tc>
                   <a:txBody>
-                    <a:bodyPr/>
+                    <a:bodyPr wrap="square"/>
                     <a:lstStyle/>
                     <a:p>
                       <a:pPr algn="l"/>
@@ -9298,7 +8859,7 @@
                       </a:r>
                     </a:p>
                   </a:txBody>
-                  <a:tcPr marL="73152" marR="73152" marT="18288" marB="18288" anchor="ctr">
+                  <a:tcPr anchor="ctr" marL="73152" marR="73152" marT="18288" marB="18288">
                     <a:solidFill>
                       <a:srgbClr val="F0F4F2"/>
                     </a:solidFill>
@@ -9306,7 +8867,7 @@
                 </a:tc>
                 <a:tc>
                   <a:txBody>
-                    <a:bodyPr/>
+                    <a:bodyPr wrap="square"/>
                     <a:lstStyle/>
                     <a:p>
                       <a:pPr algn="r"/>
@@ -9321,7 +8882,7 @@
                       </a:r>
                     </a:p>
                   </a:txBody>
-                  <a:tcPr marL="73152" marR="73152" marT="18288" marB="18288" anchor="ctr">
+                  <a:tcPr anchor="ctr" marL="73152" marR="73152" marT="18288" marB="18288">
                     <a:solidFill>
                       <a:srgbClr val="F0F4F2"/>
                     </a:solidFill>
@@ -9329,7 +8890,7 @@
                 </a:tc>
                 <a:tc>
                   <a:txBody>
-                    <a:bodyPr/>
+                    <a:bodyPr wrap="square"/>
                     <a:lstStyle/>
                     <a:p>
                       <a:pPr algn="r"/>
@@ -9344,7 +8905,7 @@
                       </a:r>
                     </a:p>
                   </a:txBody>
-                  <a:tcPr marL="73152" marR="73152" marT="18288" marB="18288" anchor="ctr">
+                  <a:tcPr anchor="ctr" marL="73152" marR="73152" marT="18288" marB="18288">
                     <a:solidFill>
                       <a:srgbClr val="F0F4F2"/>
                     </a:solidFill>
@@ -9352,7 +8913,7 @@
                 </a:tc>
                 <a:tc>
                   <a:txBody>
-                    <a:bodyPr/>
+                    <a:bodyPr wrap="square"/>
                     <a:lstStyle/>
                     <a:p>
                       <a:pPr algn="r"/>
@@ -9367,7 +8928,7 @@
                       </a:r>
                     </a:p>
                   </a:txBody>
-                  <a:tcPr marL="73152" marR="73152" marT="18288" marB="18288" anchor="ctr">
+                  <a:tcPr anchor="ctr" marL="73152" marR="73152" marT="18288" marB="18288">
                     <a:solidFill>
                       <a:srgbClr val="F0F4F2"/>
                     </a:solidFill>
@@ -9375,7 +8936,7 @@
                 </a:tc>
                 <a:tc>
                   <a:txBody>
-                    <a:bodyPr/>
+                    <a:bodyPr wrap="square"/>
                     <a:lstStyle/>
                     <a:p>
                       <a:pPr algn="r"/>
@@ -9390,7 +8951,7 @@
                       </a:r>
                     </a:p>
                   </a:txBody>
-                  <a:tcPr marL="73152" marR="73152" marT="18288" marB="18288" anchor="ctr">
+                  <a:tcPr anchor="ctr" marL="73152" marR="73152" marT="18288" marB="18288">
                     <a:solidFill>
                       <a:srgbClr val="F0F4F2"/>
                     </a:solidFill>
@@ -9398,7 +8959,7 @@
                 </a:tc>
                 <a:tc>
                   <a:txBody>
-                    <a:bodyPr/>
+                    <a:bodyPr wrap="square"/>
                     <a:lstStyle/>
                     <a:p>
                       <a:pPr algn="l"/>
@@ -9413,17 +8974,12 @@
                       </a:r>
                     </a:p>
                   </a:txBody>
-                  <a:tcPr marL="73152" marR="73152" marT="18288" marB="18288" anchor="ctr">
+                  <a:tcPr anchor="ctr" marL="73152" marR="73152" marT="18288" marB="18288">
                     <a:solidFill>
                       <a:srgbClr val="F0F4F2"/>
                     </a:solidFill>
                   </a:tcPr>
                 </a:tc>
-                <a:extLst>
-                  <a:ext uri="{0D108BD9-81ED-4DB2-BD59-A6C34878D82A}">
-                    <a16:rowId xmlns:a16="http://schemas.microsoft.com/office/drawing/2014/main" val="10005"/>
-                  </a:ext>
-                </a:extLst>
               </a:tr>
             </a:tbl>
           </a:graphicData>
@@ -9470,7 +9026,6 @@
           <a:lstStyle/>
           <a:p>
             <a:pPr algn="ctr"/>
-            <a:endParaRPr/>
           </a:p>
         </p:txBody>
       </p:sp>
@@ -9491,12 +9046,12 @@
           <a:noFill/>
         </p:spPr>
         <p:txBody>
-          <a:bodyPr wrap="square" lIns="0" tIns="0" rIns="0" bIns="0" anchor="t">
+          <a:bodyPr wrap="square" anchor="t" lIns="0" rIns="0" tIns="0" bIns="0">
             <a:spAutoFit/>
           </a:bodyPr>
           <a:lstStyle/>
           <a:p>
-            <a:pPr marL="146304" indent="-146304" algn="l">
+            <a:pPr algn="l" marL="146304" indent="-146304">
               <a:buChar char="-"/>
             </a:pPr>
             <a:r>
@@ -9519,7 +9074,7 @@
             </a:r>
           </a:p>
           <a:p>
-            <a:pPr marL="146304" indent="-146304" algn="l">
+            <a:pPr algn="l" marL="146304" indent="-146304">
               <a:spcBef>
                 <a:spcPts val="400"/>
               </a:spcBef>
@@ -9564,7 +9119,7 @@
 </file>
 
 <file path=ppt/slides/slide7.xml><?xml version="1.0" encoding="utf-8"?>
-<p:sld xmlns:a="http://schemas.openxmlformats.org/drawingml/2006/main" xmlns:r="http://schemas.openxmlformats.org/officeDocument/2006/relationships" xmlns:p="http://schemas.openxmlformats.org/presentationml/2006/main">
+<p:sld xmlns:a="http://schemas.openxmlformats.org/drawingml/2006/main" xmlns:p="http://schemas.openxmlformats.org/presentationml/2006/main" xmlns:r="http://schemas.openxmlformats.org/officeDocument/2006/relationships">
   <p:cSld>
     <p:spTree>
       <p:nvGrpSpPr>
@@ -9572,14 +9127,7 @@
         <p:cNvGrpSpPr/>
         <p:nvPr/>
       </p:nvGrpSpPr>
-      <p:grpSpPr>
-        <a:xfrm>
-          <a:off x="0" y="0"/>
-          <a:ext cx="0" cy="0"/>
-          <a:chOff x="0" y="0"/>
-          <a:chExt cx="0" cy="0"/>
-        </a:xfrm>
-      </p:grpSpPr>
+      <p:grpSpPr/>
       <p:sp>
         <p:nvSpPr>
           <p:cNvPr id="2" name="Section"/>
@@ -9597,7 +9145,7 @@
           <a:noFill/>
         </p:spPr>
         <p:txBody>
-          <a:bodyPr wrap="square" lIns="0" tIns="0" rIns="0" bIns="0" anchor="t">
+          <a:bodyPr wrap="square" anchor="t" lIns="0" rIns="0" tIns="0" bIns="0">
             <a:spAutoFit/>
           </a:bodyPr>
           <a:lstStyle/>
@@ -9632,7 +9180,7 @@
           <a:noFill/>
         </p:spPr>
         <p:txBody>
-          <a:bodyPr wrap="square" lIns="0" tIns="0" rIns="0" bIns="0" anchor="t">
+          <a:bodyPr wrap="square" anchor="t" lIns="0" rIns="0" tIns="0" bIns="0">
             <a:spAutoFit/>
           </a:bodyPr>
           <a:lstStyle/>
@@ -9667,7 +9215,7 @@
           <a:noFill/>
         </p:spPr>
         <p:txBody>
-          <a:bodyPr wrap="square" lIns="0" tIns="0" rIns="0" bIns="0" anchor="t">
+          <a:bodyPr wrap="square" anchor="t" lIns="0" rIns="0" tIns="0" bIns="0">
             <a:spAutoFit/>
           </a:bodyPr>
           <a:lstStyle/>
@@ -9702,7 +9250,7 @@
           <a:noFill/>
         </p:spPr>
         <p:txBody>
-          <a:bodyPr wrap="square" lIns="0" tIns="0" rIns="0" bIns="0" anchor="t">
+          <a:bodyPr wrap="square" anchor="t" lIns="0" rIns="0" tIns="0" bIns="0">
             <a:spAutoFit/>
           </a:bodyPr>
           <a:lstStyle/>
@@ -9734,7 +9282,7 @@
         </p:xfrm>
         <a:graphic>
           <a:graphicData uri="http://schemas.openxmlformats.org/drawingml/2006/chart">
-            <c:chart xmlns:c="http://schemas.openxmlformats.org/drawingml/2006/chart" xmlns:r="http://schemas.openxmlformats.org/officeDocument/2006/relationships" r:id="rId3"/>
+            <c:chart xmlns:c="http://schemas.openxmlformats.org/drawingml/2006/chart" r:id="rId2"/>
           </a:graphicData>
         </a:graphic>
       </p:graphicFrame>
@@ -9779,7 +9327,6 @@
           <a:lstStyle/>
           <a:p>
             <a:pPr algn="ctr"/>
-            <a:endParaRPr/>
           </a:p>
         </p:txBody>
       </p:sp>
@@ -9800,7 +9347,7 @@
           <a:noFill/>
         </p:spPr>
         <p:txBody>
-          <a:bodyPr wrap="square" lIns="0" tIns="0" rIns="0" bIns="0" anchor="t">
+          <a:bodyPr wrap="square" anchor="t" lIns="0" rIns="0" tIns="0" bIns="0">
             <a:spAutoFit/>
           </a:bodyPr>
           <a:lstStyle/>
@@ -9939,7 +9486,6 @@
           <a:lstStyle/>
           <a:p>
             <a:pPr algn="ctr"/>
-            <a:endParaRPr/>
           </a:p>
         </p:txBody>
       </p:sp>
@@ -9960,7 +9506,7 @@
           <a:noFill/>
         </p:spPr>
         <p:txBody>
-          <a:bodyPr wrap="square" lIns="0" tIns="0" rIns="0" bIns="0" anchor="t">
+          <a:bodyPr wrap="square" anchor="t" lIns="0" rIns="0" tIns="0" bIns="0">
             <a:spAutoFit/>
           </a:bodyPr>
           <a:lstStyle/>
@@ -9999,7 +9545,7 @@
 </file>
 
 <file path=ppt/slides/slide8.xml><?xml version="1.0" encoding="utf-8"?>
-<p:sld xmlns:a="http://schemas.openxmlformats.org/drawingml/2006/main" xmlns:r="http://schemas.openxmlformats.org/officeDocument/2006/relationships" xmlns:p="http://schemas.openxmlformats.org/presentationml/2006/main">
+<p:sld xmlns:a="http://schemas.openxmlformats.org/drawingml/2006/main" xmlns:p="http://schemas.openxmlformats.org/presentationml/2006/main" xmlns:r="http://schemas.openxmlformats.org/officeDocument/2006/relationships">
   <p:cSld>
     <p:spTree>
       <p:nvGrpSpPr>
@@ -10007,14 +9553,7 @@
         <p:cNvGrpSpPr/>
         <p:nvPr/>
       </p:nvGrpSpPr>
-      <p:grpSpPr>
-        <a:xfrm>
-          <a:off x="0" y="0"/>
-          <a:ext cx="0" cy="0"/>
-          <a:chOff x="0" y="0"/>
-          <a:chExt cx="0" cy="0"/>
-        </a:xfrm>
-      </p:grpSpPr>
+      <p:grpSpPr/>
       <p:sp>
         <p:nvSpPr>
           <p:cNvPr id="2" name="Section"/>
@@ -10032,7 +9571,7 @@
           <a:noFill/>
         </p:spPr>
         <p:txBody>
-          <a:bodyPr wrap="square" lIns="0" tIns="0" rIns="0" bIns="0" anchor="t">
+          <a:bodyPr wrap="square" anchor="t" lIns="0" rIns="0" tIns="0" bIns="0">
             <a:spAutoFit/>
           </a:bodyPr>
           <a:lstStyle/>
@@ -10067,7 +9606,7 @@
           <a:noFill/>
         </p:spPr>
         <p:txBody>
-          <a:bodyPr wrap="square" lIns="0" tIns="0" rIns="0" bIns="0" anchor="t">
+          <a:bodyPr wrap="square" anchor="t" lIns="0" rIns="0" tIns="0" bIns="0">
             <a:spAutoFit/>
           </a:bodyPr>
           <a:lstStyle/>
@@ -10102,7 +9641,7 @@
           <a:noFill/>
         </p:spPr>
         <p:txBody>
-          <a:bodyPr wrap="square" lIns="0" tIns="0" rIns="0" bIns="0" anchor="t">
+          <a:bodyPr wrap="square" anchor="t" lIns="0" rIns="0" tIns="0" bIns="0">
             <a:spAutoFit/>
           </a:bodyPr>
           <a:lstStyle/>
@@ -10137,7 +9676,7 @@
           <a:noFill/>
         </p:spPr>
         <p:txBody>
-          <a:bodyPr wrap="square" lIns="0" tIns="0" rIns="0" bIns="0" anchor="t">
+          <a:bodyPr wrap="square" anchor="t" lIns="0" rIns="0" tIns="0" bIns="0">
             <a:spAutoFit/>
           </a:bodyPr>
           <a:lstStyle/>
@@ -10161,13 +9700,7 @@
           <p:cNvGraphicFramePr>
             <a:graphicFrameLocks noGrp="1"/>
           </p:cNvGraphicFramePr>
-          <p:nvPr>
-            <p:extLst>
-              <p:ext uri="{D42A27DB-BD31-4B8C-83A1-F6EECF244321}">
-                <p14:modId xmlns:p14="http://schemas.microsoft.com/office/powerpoint/2010/main" val="1482518642"/>
-              </p:ext>
-            </p:extLst>
-          </p:nvPr>
+          <p:nvPr/>
         </p:nvGraphicFramePr>
         <p:xfrm>
           <a:off x="457200" y="1188720"/>
@@ -10180,39 +9713,29 @@
                 <a:tableStyleId>{2D5ABB26-0587-4C30-8999-92F81FD0307C}</a:tableStyleId>
               </a:tblPr>
               <a:tblGrid>
-                <a:gridCol w="1005840">
-                  <a:extLst>
-                    <a:ext uri="{9D8B030D-6E8A-4147-A177-3AD203B41FA5}">
-                      <a16:colId xmlns:a16="http://schemas.microsoft.com/office/drawing/2014/main" val="20000"/>
-                    </a:ext>
-                  </a:extLst>
-                </a:gridCol>
-                <a:gridCol w="3931920">
-                  <a:extLst>
-                    <a:ext uri="{9D8B030D-6E8A-4147-A177-3AD203B41FA5}">
-                      <a16:colId xmlns:a16="http://schemas.microsoft.com/office/drawing/2014/main" val="20001"/>
-                    </a:ext>
-                  </a:extLst>
-                </a:gridCol>
-                <a:gridCol w="3291840">
-                  <a:extLst>
-                    <a:ext uri="{9D8B030D-6E8A-4147-A177-3AD203B41FA5}">
-                      <a16:colId xmlns:a16="http://schemas.microsoft.com/office/drawing/2014/main" val="20002"/>
-                    </a:ext>
-                  </a:extLst>
-                </a:gridCol>
+                <a:gridCol w="1005840"/>
+                <a:gridCol w="3931920"/>
+                <a:gridCol w="3291840"/>
               </a:tblGrid>
               <a:tr h="457200">
                 <a:tc>
                   <a:txBody>
-                    <a:bodyPr/>
+                    <a:bodyPr wrap="square"/>
                     <a:lstStyle/>
                     <a:p>
                       <a:pPr algn="l"/>
-                      <a:endParaRPr/>
+                      <a:r>
+                        <a:rPr sz="1050" b="1">
+                          <a:solidFill>
+                            <a:srgbClr val="FFFFFF"/>
+                          </a:solidFill>
+                          <a:latin typeface="Malgun Gothic"/>
+                        </a:rPr>
+                        <a:t/>
+                      </a:r>
                     </a:p>
                   </a:txBody>
-                  <a:tcPr marL="73152" marR="73152" marT="18288" marB="18288" anchor="ctr">
+                  <a:tcPr anchor="ctr" marL="73152" marR="73152" marT="18288" marB="18288">
                     <a:solidFill>
                       <a:srgbClr val="0B3D2E"/>
                     </a:solidFill>
@@ -10220,7 +9743,7 @@
                 </a:tc>
                 <a:tc>
                   <a:txBody>
-                    <a:bodyPr/>
+                    <a:bodyPr wrap="square"/>
                     <a:lstStyle/>
                     <a:p>
                       <a:pPr algn="l"/>
@@ -10235,7 +9758,7 @@
                       </a:r>
                     </a:p>
                   </a:txBody>
-                  <a:tcPr marL="73152" marR="73152" marT="18288" marB="18288" anchor="ctr">
+                  <a:tcPr anchor="ctr" marL="73152" marR="73152" marT="18288" marB="18288">
                     <a:solidFill>
                       <a:srgbClr val="0B3D2E"/>
                     </a:solidFill>
@@ -10243,7 +9766,7 @@
                 </a:tc>
                 <a:tc>
                   <a:txBody>
-                    <a:bodyPr/>
+                    <a:bodyPr wrap="square"/>
                     <a:lstStyle/>
                     <a:p>
                       <a:pPr algn="l"/>
@@ -10258,22 +9781,17 @@
                       </a:r>
                     </a:p>
                   </a:txBody>
-                  <a:tcPr marL="73152" marR="73152" marT="18288" marB="18288" anchor="ctr">
+                  <a:tcPr anchor="ctr" marL="73152" marR="73152" marT="18288" marB="18288">
                     <a:solidFill>
                       <a:srgbClr val="0B3D2E"/>
                     </a:solidFill>
                   </a:tcPr>
                 </a:tc>
-                <a:extLst>
-                  <a:ext uri="{0D108BD9-81ED-4DB2-BD59-A6C34878D82A}">
-                    <a16:rowId xmlns:a16="http://schemas.microsoft.com/office/drawing/2014/main" val="10000"/>
-                  </a:ext>
-                </a:extLst>
               </a:tr>
               <a:tr h="457200">
                 <a:tc>
                   <a:txBody>
-                    <a:bodyPr/>
+                    <a:bodyPr wrap="square"/>
                     <a:lstStyle/>
                     <a:p>
                       <a:pPr algn="l"/>
@@ -10288,7 +9806,7 @@
                       </a:r>
                     </a:p>
                   </a:txBody>
-                  <a:tcPr marL="73152" marR="73152" marT="18288" marB="18288" anchor="ctr">
+                  <a:tcPr anchor="ctr" marL="73152" marR="73152" marT="18288" marB="18288">
                     <a:solidFill>
                       <a:srgbClr val="F0F4F2"/>
                     </a:solidFill>
@@ -10296,7 +9814,7 @@
                 </a:tc>
                 <a:tc>
                   <a:txBody>
-                    <a:bodyPr/>
+                    <a:bodyPr wrap="square"/>
                     <a:lstStyle/>
                     <a:p>
                       <a:pPr algn="l"/>
@@ -10311,7 +9829,7 @@
                       </a:r>
                     </a:p>
                   </a:txBody>
-                  <a:tcPr marL="73152" marR="73152" marT="18288" marB="18288" anchor="ctr">
+                  <a:tcPr anchor="ctr" marL="73152" marR="73152" marT="18288" marB="18288">
                     <a:solidFill>
                       <a:srgbClr val="F0F4F2"/>
                     </a:solidFill>
@@ -10319,7 +9837,7 @@
                 </a:tc>
                 <a:tc>
                   <a:txBody>
-                    <a:bodyPr/>
+                    <a:bodyPr wrap="square"/>
                     <a:lstStyle/>
                     <a:p>
                       <a:pPr algn="l"/>
@@ -10334,22 +9852,17 @@
                       </a:r>
                     </a:p>
                   </a:txBody>
-                  <a:tcPr marL="73152" marR="73152" marT="18288" marB="18288" anchor="ctr">
+                  <a:tcPr anchor="ctr" marL="73152" marR="73152" marT="18288" marB="18288">
                     <a:solidFill>
                       <a:srgbClr val="F0F4F2"/>
                     </a:solidFill>
                   </a:tcPr>
                 </a:tc>
-                <a:extLst>
-                  <a:ext uri="{0D108BD9-81ED-4DB2-BD59-A6C34878D82A}">
-                    <a16:rowId xmlns:a16="http://schemas.microsoft.com/office/drawing/2014/main" val="10001"/>
-                  </a:ext>
-                </a:extLst>
               </a:tr>
               <a:tr h="457200">
                 <a:tc>
                   <a:txBody>
-                    <a:bodyPr/>
+                    <a:bodyPr wrap="square"/>
                     <a:lstStyle/>
                     <a:p>
                       <a:pPr algn="l"/>
@@ -10364,7 +9877,7 @@
                       </a:r>
                     </a:p>
                   </a:txBody>
-                  <a:tcPr marL="73152" marR="73152" marT="18288" marB="18288" anchor="ctr">
+                  <a:tcPr anchor="ctr" marL="73152" marR="73152" marT="18288" marB="18288">
                     <a:solidFill>
                       <a:srgbClr val="FFFFFF"/>
                     </a:solidFill>
@@ -10372,7 +9885,7 @@
                 </a:tc>
                 <a:tc>
                   <a:txBody>
-                    <a:bodyPr/>
+                    <a:bodyPr wrap="square"/>
                     <a:lstStyle/>
                     <a:p>
                       <a:pPr algn="l"/>
@@ -10387,7 +9900,7 @@
                       </a:r>
                     </a:p>
                   </a:txBody>
-                  <a:tcPr marL="73152" marR="73152" marT="18288" marB="18288" anchor="ctr">
+                  <a:tcPr anchor="ctr" marL="73152" marR="73152" marT="18288" marB="18288">
                     <a:solidFill>
                       <a:srgbClr val="FFFFFF"/>
                     </a:solidFill>
@@ -10395,163 +9908,32 @@
                 </a:tc>
                 <a:tc>
                   <a:txBody>
-                    <a:bodyPr/>
+                    <a:bodyPr wrap="square"/>
                     <a:lstStyle/>
                     <a:p>
                       <a:pPr algn="l"/>
                       <a:r>
-                        <a:rPr sz="1050" b="0" dirty="0" err="1">
+                        <a:rPr sz="1050" b="0">
                           <a:solidFill>
                             <a:srgbClr val="1F2D29"/>
                           </a:solidFill>
                           <a:latin typeface="Malgun Gothic"/>
                         </a:rPr>
-                        <a:t>다시</a:t>
-                      </a:r>
-                      <a:r>
-                        <a:rPr sz="1050" b="0" dirty="0">
-                          <a:solidFill>
-                            <a:srgbClr val="1F2D29"/>
-                          </a:solidFill>
-                          <a:latin typeface="Malgun Gothic"/>
-                        </a:rPr>
-                        <a:t> 살 때 39%가 </a:t>
-                      </a:r>
-                      <a:r>
-                        <a:rPr sz="1050" b="0" dirty="0" err="1">
-                          <a:solidFill>
-                            <a:srgbClr val="1F2D29"/>
-                          </a:solidFill>
-                          <a:latin typeface="Malgun Gothic"/>
-                        </a:rPr>
-                        <a:t>같은</a:t>
-                      </a:r>
-                      <a:r>
-                        <a:rPr sz="1050" b="0" dirty="0">
-                          <a:solidFill>
-                            <a:srgbClr val="1F2D29"/>
-                          </a:solidFill>
-                          <a:latin typeface="Malgun Gothic"/>
-                        </a:rPr>
-                        <a:t> </a:t>
-                      </a:r>
-                      <a:r>
-                        <a:rPr sz="1050" b="0" dirty="0" err="1">
-                          <a:solidFill>
-                            <a:srgbClr val="1F2D29"/>
-                          </a:solidFill>
-                          <a:latin typeface="Malgun Gothic"/>
-                        </a:rPr>
-                        <a:t>상품군</a:t>
-                      </a:r>
-                      <a:r>
-                        <a:rPr sz="1050" b="0" dirty="0">
-                          <a:solidFill>
-                            <a:srgbClr val="1F2D29"/>
-                          </a:solidFill>
-                          <a:latin typeface="Malgun Gothic"/>
-                        </a:rPr>
-                        <a:t> </a:t>
-                      </a:r>
-                      <a:r>
-                        <a:rPr lang="en-US" sz="1050" b="0" dirty="0">
-                          <a:solidFill>
-                            <a:srgbClr val="1F2D29"/>
-                          </a:solidFill>
-                          <a:latin typeface="Malgun Gothic"/>
-                        </a:rPr>
-                        <a:t>,</a:t>
-                      </a:r>
-                      <a:r>
-                        <a:rPr sz="1050" b="0" dirty="0" err="1">
-                          <a:solidFill>
-                            <a:srgbClr val="1F2D29"/>
-                          </a:solidFill>
-                          <a:latin typeface="Malgun Gothic"/>
-                        </a:rPr>
-                        <a:t>바우처</a:t>
-                      </a:r>
-                      <a:r>
-                        <a:rPr sz="1050" b="0" dirty="0">
-                          <a:solidFill>
-                            <a:srgbClr val="1F2D29"/>
-                          </a:solidFill>
-                          <a:latin typeface="Malgun Gothic"/>
-                        </a:rPr>
-                        <a:t> </a:t>
-                      </a:r>
-                      <a:r>
-                        <a:rPr sz="1050" b="0" dirty="0" err="1">
-                          <a:solidFill>
-                            <a:srgbClr val="1F2D29"/>
-                          </a:solidFill>
-                          <a:latin typeface="Malgun Gothic"/>
-                        </a:rPr>
-                        <a:t>사용</a:t>
-                      </a:r>
-                      <a:r>
-                        <a:rPr sz="1050" b="0" dirty="0">
-                          <a:solidFill>
-                            <a:srgbClr val="1F2D29"/>
-                          </a:solidFill>
-                          <a:latin typeface="Malgun Gothic"/>
-                        </a:rPr>
-                        <a:t> </a:t>
-                      </a:r>
-                      <a:r>
-                        <a:rPr sz="1050" b="0" dirty="0" err="1">
-                          <a:solidFill>
-                            <a:srgbClr val="1F2D29"/>
-                          </a:solidFill>
-                          <a:latin typeface="Malgun Gothic"/>
-                        </a:rPr>
-                        <a:t>고객이</a:t>
-                      </a:r>
-                      <a:r>
-                        <a:rPr sz="1050" b="0" dirty="0">
-                          <a:solidFill>
-                            <a:srgbClr val="1F2D29"/>
-                          </a:solidFill>
-                          <a:latin typeface="Malgun Gothic"/>
-                        </a:rPr>
-                        <a:t> 1.4배 더 </a:t>
-                      </a:r>
-                      <a:r>
-                        <a:rPr sz="1050" b="0" dirty="0" err="1">
-                          <a:solidFill>
-                            <a:srgbClr val="1F2D29"/>
-                          </a:solidFill>
-                          <a:latin typeface="Malgun Gothic"/>
-                        </a:rPr>
-                        <a:t>다시</a:t>
-                      </a:r>
-                      <a:r>
-                        <a:rPr sz="1050" b="0" dirty="0">
-                          <a:solidFill>
-                            <a:srgbClr val="1F2D29"/>
-                          </a:solidFill>
-                          <a:latin typeface="Malgun Gothic"/>
-                        </a:rPr>
-                        <a:t> 삼</a:t>
+                        <a:t>다시 살 때 39%가 같은 상품군 (우연이면 6%), 바우처 사용 고객이 1.4배 더 다시 삼</a:t>
                       </a:r>
                     </a:p>
                   </a:txBody>
-                  <a:tcPr marL="73152" marR="73152" marT="18288" marB="18288" anchor="ctr">
+                  <a:tcPr anchor="ctr" marL="73152" marR="73152" marT="18288" marB="18288">
                     <a:solidFill>
                       <a:srgbClr val="FFFFFF"/>
                     </a:solidFill>
                   </a:tcPr>
                 </a:tc>
-                <a:extLst>
-                  <a:ext uri="{0D108BD9-81ED-4DB2-BD59-A6C34878D82A}">
-                    <a16:rowId xmlns:a16="http://schemas.microsoft.com/office/drawing/2014/main" val="10002"/>
-                  </a:ext>
-                </a:extLst>
               </a:tr>
               <a:tr h="457200">
                 <a:tc>
                   <a:txBody>
-                    <a:bodyPr/>
+                    <a:bodyPr wrap="square"/>
                     <a:lstStyle/>
                     <a:p>
                       <a:pPr algn="l"/>
@@ -10566,7 +9948,7 @@
                       </a:r>
                     </a:p>
                   </a:txBody>
-                  <a:tcPr marL="73152" marR="73152" marT="18288" marB="18288" anchor="ctr">
+                  <a:tcPr anchor="ctr" marL="73152" marR="73152" marT="18288" marB="18288">
                     <a:solidFill>
                       <a:srgbClr val="F0F4F2"/>
                     </a:solidFill>
@@ -10574,7 +9956,7 @@
                 </a:tc>
                 <a:tc>
                   <a:txBody>
-                    <a:bodyPr/>
+                    <a:bodyPr wrap="square"/>
                     <a:lstStyle/>
                     <a:p>
                       <a:pPr algn="l"/>
@@ -10589,7 +9971,7 @@
                       </a:r>
                     </a:p>
                   </a:txBody>
-                  <a:tcPr marL="73152" marR="73152" marT="18288" marB="18288" anchor="ctr">
+                  <a:tcPr anchor="ctr" marL="73152" marR="73152" marT="18288" marB="18288">
                     <a:solidFill>
                       <a:srgbClr val="F0F4F2"/>
                     </a:solidFill>
@@ -10597,110 +9979,27 @@
                 </a:tc>
                 <a:tc>
                   <a:txBody>
-                    <a:bodyPr/>
+                    <a:bodyPr wrap="square"/>
                     <a:lstStyle/>
                     <a:p>
                       <a:pPr algn="l"/>
                       <a:r>
-                        <a:rPr sz="1050" b="0" dirty="0" err="1">
+                        <a:rPr sz="1050" b="0">
                           <a:solidFill>
                             <a:srgbClr val="1F2D29"/>
                           </a:solidFill>
                           <a:latin typeface="Malgun Gothic"/>
                         </a:rPr>
-                        <a:t>효과는</a:t>
+                        <a:t>효과는 아직 알 수 없으므로 실험으로 확인</a:t>
                       </a:r>
-                      <a:r>
-                        <a:rPr sz="1050" b="0" dirty="0">
-                          <a:solidFill>
-                            <a:srgbClr val="1F2D29"/>
-                          </a:solidFill>
-                          <a:latin typeface="Malgun Gothic"/>
-                        </a:rPr>
-                        <a:t> </a:t>
-                      </a:r>
-                      <a:r>
-                        <a:rPr sz="1050" b="0" dirty="0" err="1">
-                          <a:solidFill>
-                            <a:srgbClr val="1F2D29"/>
-                          </a:solidFill>
-                          <a:latin typeface="Malgun Gothic"/>
-                        </a:rPr>
-                        <a:t>아직</a:t>
-                      </a:r>
-                      <a:r>
-                        <a:rPr sz="1050" b="0" dirty="0">
-                          <a:solidFill>
-                            <a:srgbClr val="1F2D29"/>
-                          </a:solidFill>
-                          <a:latin typeface="Malgun Gothic"/>
-                        </a:rPr>
-                        <a:t> 알 수 </a:t>
-                      </a:r>
-                      <a:r>
-                        <a:rPr sz="1050" b="0" dirty="0" err="1">
-                          <a:solidFill>
-                            <a:srgbClr val="1F2D29"/>
-                          </a:solidFill>
-                          <a:latin typeface="Malgun Gothic"/>
-                        </a:rPr>
-                        <a:t>없으므로</a:t>
-                      </a:r>
-                      <a:r>
-                        <a:rPr sz="1050" b="0" dirty="0">
-                          <a:solidFill>
-                            <a:srgbClr val="1F2D29"/>
-                          </a:solidFill>
-                          <a:latin typeface="Malgun Gothic"/>
-                        </a:rPr>
-                        <a:t> </a:t>
-                      </a:r>
-                      <a:r>
-                        <a:rPr sz="1050" b="0" dirty="0" err="1">
-                          <a:solidFill>
-                            <a:srgbClr val="1F2D29"/>
-                          </a:solidFill>
-                          <a:latin typeface="Malgun Gothic"/>
-                        </a:rPr>
-                        <a:t>실험으로</a:t>
-                      </a:r>
-                      <a:r>
-                        <a:rPr sz="1050" b="0" dirty="0">
-                          <a:solidFill>
-                            <a:srgbClr val="1F2D29"/>
-                          </a:solidFill>
-                          <a:latin typeface="Malgun Gothic"/>
-                        </a:rPr>
-                        <a:t> </a:t>
-                      </a:r>
-                      <a:r>
-                        <a:rPr sz="1050" b="0" dirty="0" err="1">
-                          <a:solidFill>
-                            <a:srgbClr val="1F2D29"/>
-                          </a:solidFill>
-                          <a:latin typeface="Malgun Gothic"/>
-                        </a:rPr>
-                        <a:t>확인</a:t>
-                      </a:r>
-                      <a:endParaRPr sz="1050" b="0" dirty="0">
-                        <a:solidFill>
-                          <a:srgbClr val="1F2D29"/>
-                        </a:solidFill>
-                        <a:latin typeface="Malgun Gothic"/>
-                      </a:endParaRPr>
                     </a:p>
                   </a:txBody>
-                  <a:tcPr marL="73152" marR="73152" marT="18288" marB="18288" anchor="ctr">
+                  <a:tcPr anchor="ctr" marL="73152" marR="73152" marT="18288" marB="18288">
                     <a:solidFill>
                       <a:srgbClr val="F0F4F2"/>
                     </a:solidFill>
                   </a:tcPr>
                 </a:tc>
-                <a:extLst>
-                  <a:ext uri="{0D108BD9-81ED-4DB2-BD59-A6C34878D82A}">
-                    <a16:rowId xmlns:a16="http://schemas.microsoft.com/office/drawing/2014/main" val="10003"/>
-                  </a:ext>
-                </a:extLst>
               </a:tr>
             </a:tbl>
           </a:graphicData>
@@ -10723,7 +10022,7 @@
           <a:noFill/>
         </p:spPr>
         <p:txBody>
-          <a:bodyPr wrap="square" lIns="0" tIns="0" rIns="0" bIns="0" anchor="t">
+          <a:bodyPr wrap="square" anchor="t" lIns="0" rIns="0" tIns="0" bIns="0">
             <a:spAutoFit/>
           </a:bodyPr>
           <a:lstStyle/>
@@ -10760,39 +10059,15 @@
                 <a:tableStyleId>{2D5ABB26-0587-4C30-8999-92F81FD0307C}</a:tableStyleId>
               </a:tblPr>
               <a:tblGrid>
-                <a:gridCol w="2057400">
-                  <a:extLst>
-                    <a:ext uri="{9D8B030D-6E8A-4147-A177-3AD203B41FA5}">
-                      <a16:colId xmlns:a16="http://schemas.microsoft.com/office/drawing/2014/main" val="20000"/>
-                    </a:ext>
-                  </a:extLst>
-                </a:gridCol>
-                <a:gridCol w="2057400">
-                  <a:extLst>
-                    <a:ext uri="{9D8B030D-6E8A-4147-A177-3AD203B41FA5}">
-                      <a16:colId xmlns:a16="http://schemas.microsoft.com/office/drawing/2014/main" val="20001"/>
-                    </a:ext>
-                  </a:extLst>
-                </a:gridCol>
-                <a:gridCol w="2057400">
-                  <a:extLst>
-                    <a:ext uri="{9D8B030D-6E8A-4147-A177-3AD203B41FA5}">
-                      <a16:colId xmlns:a16="http://schemas.microsoft.com/office/drawing/2014/main" val="20002"/>
-                    </a:ext>
-                  </a:extLst>
-                </a:gridCol>
-                <a:gridCol w="2057400">
-                  <a:extLst>
-                    <a:ext uri="{9D8B030D-6E8A-4147-A177-3AD203B41FA5}">
-                      <a16:colId xmlns:a16="http://schemas.microsoft.com/office/drawing/2014/main" val="20003"/>
-                    </a:ext>
-                  </a:extLst>
-                </a:gridCol>
+                <a:gridCol w="2057400"/>
+                <a:gridCol w="2057400"/>
+                <a:gridCol w="2057400"/>
+                <a:gridCol w="2057400"/>
               </a:tblGrid>
               <a:tr h="256032">
                 <a:tc>
                   <a:txBody>
-                    <a:bodyPr/>
+                    <a:bodyPr wrap="square"/>
                     <a:lstStyle/>
                     <a:p>
                       <a:pPr algn="l"/>
@@ -10807,7 +10082,7 @@
                       </a:r>
                     </a:p>
                   </a:txBody>
-                  <a:tcPr marL="73152" marR="73152" marT="18288" marB="18288" anchor="ctr">
+                  <a:tcPr anchor="ctr" marL="73152" marR="73152" marT="18288" marB="18288">
                     <a:solidFill>
                       <a:srgbClr val="0B3D2E"/>
                     </a:solidFill>
@@ -10815,7 +10090,7 @@
                 </a:tc>
                 <a:tc>
                   <a:txBody>
-                    <a:bodyPr/>
+                    <a:bodyPr wrap="square"/>
                     <a:lstStyle/>
                     <a:p>
                       <a:pPr algn="r"/>
@@ -10830,7 +10105,7 @@
                       </a:r>
                     </a:p>
                   </a:txBody>
-                  <a:tcPr marL="73152" marR="73152" marT="18288" marB="18288" anchor="ctr">
+                  <a:tcPr anchor="ctr" marL="73152" marR="73152" marT="18288" marB="18288">
                     <a:solidFill>
                       <a:srgbClr val="0B3D2E"/>
                     </a:solidFill>
@@ -10838,7 +10113,7 @@
                 </a:tc>
                 <a:tc>
                   <a:txBody>
-                    <a:bodyPr/>
+                    <a:bodyPr wrap="square"/>
                     <a:lstStyle/>
                     <a:p>
                       <a:pPr algn="r"/>
@@ -10853,7 +10128,7 @@
                       </a:r>
                     </a:p>
                   </a:txBody>
-                  <a:tcPr marL="73152" marR="73152" marT="18288" marB="18288" anchor="ctr">
+                  <a:tcPr anchor="ctr" marL="73152" marR="73152" marT="18288" marB="18288">
                     <a:solidFill>
                       <a:srgbClr val="0B3D2E"/>
                     </a:solidFill>
@@ -10861,7 +10136,7 @@
                 </a:tc>
                 <a:tc>
                   <a:txBody>
-                    <a:bodyPr/>
+                    <a:bodyPr wrap="square"/>
                     <a:lstStyle/>
                     <a:p>
                       <a:pPr algn="r"/>
@@ -10876,22 +10151,17 @@
                       </a:r>
                     </a:p>
                   </a:txBody>
-                  <a:tcPr marL="73152" marR="73152" marT="18288" marB="18288" anchor="ctr">
+                  <a:tcPr anchor="ctr" marL="73152" marR="73152" marT="18288" marB="18288">
                     <a:solidFill>
                       <a:srgbClr val="0B3D2E"/>
                     </a:solidFill>
                   </a:tcPr>
                 </a:tc>
-                <a:extLst>
-                  <a:ext uri="{0D108BD9-81ED-4DB2-BD59-A6C34878D82A}">
-                    <a16:rowId xmlns:a16="http://schemas.microsoft.com/office/drawing/2014/main" val="10000"/>
-                  </a:ext>
-                </a:extLst>
               </a:tr>
               <a:tr h="256032">
                 <a:tc>
                   <a:txBody>
-                    <a:bodyPr/>
+                    <a:bodyPr wrap="square"/>
                     <a:lstStyle/>
                     <a:p>
                       <a:pPr algn="l"/>
@@ -10906,7 +10176,7 @@
                       </a:r>
                     </a:p>
                   </a:txBody>
-                  <a:tcPr marL="73152" marR="73152" marT="18288" marB="18288" anchor="ctr">
+                  <a:tcPr anchor="ctr" marL="73152" marR="73152" marT="18288" marB="18288">
                     <a:solidFill>
                       <a:srgbClr val="F0F4F2"/>
                     </a:solidFill>
@@ -10914,7 +10184,7 @@
                 </a:tc>
                 <a:tc>
                   <a:txBody>
-                    <a:bodyPr/>
+                    <a:bodyPr wrap="square"/>
                     <a:lstStyle/>
                     <a:p>
                       <a:pPr algn="r"/>
@@ -10929,7 +10199,7 @@
                       </a:r>
                     </a:p>
                   </a:txBody>
-                  <a:tcPr marL="73152" marR="73152" marT="18288" marB="18288" anchor="ctr">
+                  <a:tcPr anchor="ctr" marL="73152" marR="73152" marT="18288" marB="18288">
                     <a:solidFill>
                       <a:srgbClr val="F0F4F2"/>
                     </a:solidFill>
@@ -10937,7 +10207,7 @@
                 </a:tc>
                 <a:tc>
                   <a:txBody>
-                    <a:bodyPr/>
+                    <a:bodyPr wrap="square"/>
                     <a:lstStyle/>
                     <a:p>
                       <a:pPr algn="r"/>
@@ -10952,7 +10222,7 @@
                       </a:r>
                     </a:p>
                   </a:txBody>
-                  <a:tcPr marL="73152" marR="73152" marT="18288" marB="18288" anchor="ctr">
+                  <a:tcPr anchor="ctr" marL="73152" marR="73152" marT="18288" marB="18288">
                     <a:solidFill>
                       <a:srgbClr val="F0F4F2"/>
                     </a:solidFill>
@@ -10960,7 +10230,7 @@
                 </a:tc>
                 <a:tc>
                   <a:txBody>
-                    <a:bodyPr/>
+                    <a:bodyPr wrap="square"/>
                     <a:lstStyle/>
                     <a:p>
                       <a:pPr algn="r"/>
@@ -10975,22 +10245,17 @@
                       </a:r>
                     </a:p>
                   </a:txBody>
-                  <a:tcPr marL="73152" marR="73152" marT="18288" marB="18288" anchor="ctr">
+                  <a:tcPr anchor="ctr" marL="73152" marR="73152" marT="18288" marB="18288">
                     <a:solidFill>
                       <a:srgbClr val="F0F4F2"/>
                     </a:solidFill>
                   </a:tcPr>
                 </a:tc>
-                <a:extLst>
-                  <a:ext uri="{0D108BD9-81ED-4DB2-BD59-A6C34878D82A}">
-                    <a16:rowId xmlns:a16="http://schemas.microsoft.com/office/drawing/2014/main" val="10001"/>
-                  </a:ext>
-                </a:extLst>
               </a:tr>
               <a:tr h="256032">
                 <a:tc>
                   <a:txBody>
-                    <a:bodyPr/>
+                    <a:bodyPr wrap="square"/>
                     <a:lstStyle/>
                     <a:p>
                       <a:pPr algn="l"/>
@@ -11005,7 +10270,7 @@
                       </a:r>
                     </a:p>
                   </a:txBody>
-                  <a:tcPr marL="73152" marR="73152" marT="18288" marB="18288" anchor="ctr">
+                  <a:tcPr anchor="ctr" marL="73152" marR="73152" marT="18288" marB="18288">
                     <a:solidFill>
                       <a:srgbClr val="FFFFFF"/>
                     </a:solidFill>
@@ -11013,7 +10278,7 @@
                 </a:tc>
                 <a:tc>
                   <a:txBody>
-                    <a:bodyPr/>
+                    <a:bodyPr wrap="square"/>
                     <a:lstStyle/>
                     <a:p>
                       <a:pPr algn="r"/>
@@ -11028,7 +10293,7 @@
                       </a:r>
                     </a:p>
                   </a:txBody>
-                  <a:tcPr marL="73152" marR="73152" marT="18288" marB="18288" anchor="ctr">
+                  <a:tcPr anchor="ctr" marL="73152" marR="73152" marT="18288" marB="18288">
                     <a:solidFill>
                       <a:srgbClr val="FFFFFF"/>
                     </a:solidFill>
@@ -11036,7 +10301,7 @@
                 </a:tc>
                 <a:tc>
                   <a:txBody>
-                    <a:bodyPr/>
+                    <a:bodyPr wrap="square"/>
                     <a:lstStyle/>
                     <a:p>
                       <a:pPr algn="r"/>
@@ -11051,7 +10316,7 @@
                       </a:r>
                     </a:p>
                   </a:txBody>
-                  <a:tcPr marL="73152" marR="73152" marT="18288" marB="18288" anchor="ctr">
+                  <a:tcPr anchor="ctr" marL="73152" marR="73152" marT="18288" marB="18288">
                     <a:solidFill>
                       <a:srgbClr val="FFFFFF"/>
                     </a:solidFill>
@@ -11059,7 +10324,7 @@
                 </a:tc>
                 <a:tc>
                   <a:txBody>
-                    <a:bodyPr/>
+                    <a:bodyPr wrap="square"/>
                     <a:lstStyle/>
                     <a:p>
                       <a:pPr algn="r"/>
@@ -11074,22 +10339,17 @@
                       </a:r>
                     </a:p>
                   </a:txBody>
-                  <a:tcPr marL="73152" marR="73152" marT="18288" marB="18288" anchor="ctr">
+                  <a:tcPr anchor="ctr" marL="73152" marR="73152" marT="18288" marB="18288">
                     <a:solidFill>
                       <a:srgbClr val="FFFFFF"/>
                     </a:solidFill>
                   </a:tcPr>
                 </a:tc>
-                <a:extLst>
-                  <a:ext uri="{0D108BD9-81ED-4DB2-BD59-A6C34878D82A}">
-                    <a16:rowId xmlns:a16="http://schemas.microsoft.com/office/drawing/2014/main" val="10002"/>
-                  </a:ext>
-                </a:extLst>
               </a:tr>
               <a:tr h="256032">
                 <a:tc>
                   <a:txBody>
-                    <a:bodyPr/>
+                    <a:bodyPr wrap="square"/>
                     <a:lstStyle/>
                     <a:p>
                       <a:pPr algn="l"/>
@@ -11104,7 +10364,7 @@
                       </a:r>
                     </a:p>
                   </a:txBody>
-                  <a:tcPr marL="73152" marR="73152" marT="18288" marB="18288" anchor="ctr">
+                  <a:tcPr anchor="ctr" marL="73152" marR="73152" marT="18288" marB="18288">
                     <a:solidFill>
                       <a:srgbClr val="F0F4F2"/>
                     </a:solidFill>
@@ -11112,7 +10372,7 @@
                 </a:tc>
                 <a:tc>
                   <a:txBody>
-                    <a:bodyPr/>
+                    <a:bodyPr wrap="square"/>
                     <a:lstStyle/>
                     <a:p>
                       <a:pPr algn="r"/>
@@ -11127,7 +10387,7 @@
                       </a:r>
                     </a:p>
                   </a:txBody>
-                  <a:tcPr marL="73152" marR="73152" marT="18288" marB="18288" anchor="ctr">
+                  <a:tcPr anchor="ctr" marL="73152" marR="73152" marT="18288" marB="18288">
                     <a:solidFill>
                       <a:srgbClr val="F0F4F2"/>
                     </a:solidFill>
@@ -11135,7 +10395,7 @@
                 </a:tc>
                 <a:tc>
                   <a:txBody>
-                    <a:bodyPr/>
+                    <a:bodyPr wrap="square"/>
                     <a:lstStyle/>
                     <a:p>
                       <a:pPr algn="r"/>
@@ -11150,7 +10410,7 @@
                       </a:r>
                     </a:p>
                   </a:txBody>
-                  <a:tcPr marL="73152" marR="73152" marT="18288" marB="18288" anchor="ctr">
+                  <a:tcPr anchor="ctr" marL="73152" marR="73152" marT="18288" marB="18288">
                     <a:solidFill>
                       <a:srgbClr val="F0F4F2"/>
                     </a:solidFill>
@@ -11158,7 +10418,7 @@
                 </a:tc>
                 <a:tc>
                   <a:txBody>
-                    <a:bodyPr/>
+                    <a:bodyPr wrap="square"/>
                     <a:lstStyle/>
                     <a:p>
                       <a:pPr algn="r"/>
@@ -11173,17 +10433,12 @@
                       </a:r>
                     </a:p>
                   </a:txBody>
-                  <a:tcPr marL="73152" marR="73152" marT="18288" marB="18288" anchor="ctr">
+                  <a:tcPr anchor="ctr" marL="73152" marR="73152" marT="18288" marB="18288">
                     <a:solidFill>
                       <a:srgbClr val="F0F4F2"/>
                     </a:solidFill>
                   </a:tcPr>
                 </a:tc>
-                <a:extLst>
-                  <a:ext uri="{0D108BD9-81ED-4DB2-BD59-A6C34878D82A}">
-                    <a16:rowId xmlns:a16="http://schemas.microsoft.com/office/drawing/2014/main" val="10003"/>
-                  </a:ext>
-                </a:extLst>
               </a:tr>
             </a:tbl>
           </a:graphicData>
@@ -11230,7 +10485,6 @@
           <a:lstStyle/>
           <a:p>
             <a:pPr algn="ctr"/>
-            <a:endParaRPr/>
           </a:p>
         </p:txBody>
       </p:sp>
@@ -11251,7 +10505,7 @@
           <a:noFill/>
         </p:spPr>
         <p:txBody>
-          <a:bodyPr wrap="square" lIns="0" tIns="0" rIns="0" bIns="0" anchor="t">
+          <a:bodyPr wrap="square" anchor="t" lIns="0" rIns="0" tIns="0" bIns="0">
             <a:spAutoFit/>
           </a:bodyPr>
           <a:lstStyle/>
@@ -11278,7 +10532,7 @@
 </file>
 
 <file path=ppt/slides/slide9.xml><?xml version="1.0" encoding="utf-8"?>
-<p:sld xmlns:a="http://schemas.openxmlformats.org/drawingml/2006/main" xmlns:r="http://schemas.openxmlformats.org/officeDocument/2006/relationships" xmlns:p="http://schemas.openxmlformats.org/presentationml/2006/main">
+<p:sld xmlns:a="http://schemas.openxmlformats.org/drawingml/2006/main" xmlns:p="http://schemas.openxmlformats.org/presentationml/2006/main" xmlns:r="http://schemas.openxmlformats.org/officeDocument/2006/relationships">
   <p:cSld>
     <p:spTree>
       <p:nvGrpSpPr>
@@ -11286,14 +10540,7 @@
         <p:cNvGrpSpPr/>
         <p:nvPr/>
       </p:nvGrpSpPr>
-      <p:grpSpPr>
-        <a:xfrm>
-          <a:off x="0" y="0"/>
-          <a:ext cx="0" cy="0"/>
-          <a:chOff x="0" y="0"/>
-          <a:chExt cx="0" cy="0"/>
-        </a:xfrm>
-      </p:grpSpPr>
+      <p:grpSpPr/>
       <p:sp>
         <p:nvSpPr>
           <p:cNvPr id="2" name="Section"/>
@@ -11311,7 +10558,7 @@
           <a:noFill/>
         </p:spPr>
         <p:txBody>
-          <a:bodyPr wrap="square" lIns="0" tIns="0" rIns="0" bIns="0" anchor="t">
+          <a:bodyPr wrap="square" anchor="t" lIns="0" rIns="0" tIns="0" bIns="0">
             <a:spAutoFit/>
           </a:bodyPr>
           <a:lstStyle/>
@@ -11346,7 +10593,7 @@
           <a:noFill/>
         </p:spPr>
         <p:txBody>
-          <a:bodyPr wrap="square" lIns="0" tIns="0" rIns="0" bIns="0" anchor="t">
+          <a:bodyPr wrap="square" anchor="t" lIns="0" rIns="0" tIns="0" bIns="0">
             <a:spAutoFit/>
           </a:bodyPr>
           <a:lstStyle/>
@@ -11381,7 +10628,7 @@
           <a:noFill/>
         </p:spPr>
         <p:txBody>
-          <a:bodyPr wrap="square" lIns="0" tIns="0" rIns="0" bIns="0" anchor="t">
+          <a:bodyPr wrap="square" anchor="t" lIns="0" rIns="0" tIns="0" bIns="0">
             <a:spAutoFit/>
           </a:bodyPr>
           <a:lstStyle/>
@@ -11416,7 +10663,7 @@
           <a:noFill/>
         </p:spPr>
         <p:txBody>
-          <a:bodyPr wrap="square" lIns="0" tIns="0" rIns="0" bIns="0" anchor="t">
+          <a:bodyPr wrap="square" anchor="t" lIns="0" rIns="0" tIns="0" bIns="0">
             <a:spAutoFit/>
           </a:bodyPr>
           <a:lstStyle/>
@@ -11475,7 +10722,6 @@
           <a:lstStyle/>
           <a:p>
             <a:pPr algn="ctr"/>
-            <a:endParaRPr/>
           </a:p>
         </p:txBody>
       </p:sp>
@@ -11496,7 +10742,7 @@
           <a:noFill/>
         </p:spPr>
         <p:txBody>
-          <a:bodyPr wrap="square" lIns="0" tIns="0" rIns="0" bIns="0" anchor="t">
+          <a:bodyPr wrap="square" anchor="t" lIns="0" rIns="0" tIns="0" bIns="0">
             <a:spAutoFit/>
           </a:bodyPr>
           <a:lstStyle/>
@@ -11523,7 +10769,7 @@
         <p:spPr>
           <a:xfrm>
             <a:off x="640080" y="1874519"/>
-            <a:ext cx="2286000" cy="1115690"/>
+            <a:ext cx="2286000" cy="2560320"/>
           </a:xfrm>
           <a:prstGeom prst="rect">
             <a:avLst/>
@@ -11531,309 +10777,74 @@
           <a:noFill/>
         </p:spPr>
         <p:txBody>
-          <a:bodyPr wrap="square" lIns="0" tIns="0" rIns="0" bIns="0" anchor="t">
+          <a:bodyPr wrap="square" anchor="t" lIns="0" rIns="0" tIns="0" bIns="0">
             <a:spAutoFit/>
           </a:bodyPr>
           <a:lstStyle/>
           <a:p>
-            <a:pPr marL="146304" indent="-146304" algn="l">
+            <a:pPr algn="l" marL="146304" indent="-146304">
               <a:buChar char="-"/>
             </a:pPr>
             <a:r>
-              <a:rPr sz="1150" b="0" dirty="0" err="1">
+              <a:rPr sz="1150" b="0">
                 <a:solidFill>
                   <a:srgbClr val="1F2D29"/>
                 </a:solidFill>
                 <a:latin typeface="Malgun Gothic"/>
               </a:rPr>
-              <a:t>매출의</a:t>
-            </a:r>
-            <a:r>
-              <a:rPr sz="1150" b="0" dirty="0">
-                <a:solidFill>
-                  <a:srgbClr val="1F2D29"/>
-                </a:solidFill>
-                <a:latin typeface="Malgun Gothic"/>
-              </a:rPr>
-              <a:t> 43%가 6개월 </a:t>
-            </a:r>
-            <a:r>
-              <a:rPr sz="1150" b="0" dirty="0" err="1">
-                <a:solidFill>
-                  <a:srgbClr val="1F2D29"/>
-                </a:solidFill>
-                <a:latin typeface="Malgun Gothic"/>
-              </a:rPr>
-              <a:t>넘게</a:t>
-            </a:r>
-            <a:r>
-              <a:rPr sz="1150" b="0" dirty="0">
-                <a:solidFill>
-                  <a:srgbClr val="1F2D29"/>
-                </a:solidFill>
-                <a:latin typeface="Malgun Gothic"/>
-              </a:rPr>
-              <a:t> 안 산 </a:t>
-            </a:r>
-            <a:r>
-              <a:rPr sz="1150" b="0" dirty="0" err="1">
-                <a:solidFill>
-                  <a:srgbClr val="1F2D29"/>
-                </a:solidFill>
-                <a:latin typeface="Malgun Gothic"/>
-              </a:rPr>
-              <a:t>우수</a:t>
-            </a:r>
-            <a:r>
-              <a:rPr sz="1150" b="0" dirty="0">
-                <a:solidFill>
-                  <a:srgbClr val="1F2D29"/>
-                </a:solidFill>
-                <a:latin typeface="Malgun Gothic"/>
-              </a:rPr>
-              <a:t> </a:t>
-            </a:r>
-            <a:r>
-              <a:rPr sz="1150" b="0" dirty="0" err="1">
-                <a:solidFill>
-                  <a:srgbClr val="1F2D29"/>
-                </a:solidFill>
-                <a:latin typeface="Malgun Gothic"/>
-              </a:rPr>
-              <a:t>고객</a:t>
-            </a:r>
-            <a:endParaRPr sz="1150" b="0" dirty="0">
-              <a:solidFill>
-                <a:srgbClr val="1F2D29"/>
-              </a:solidFill>
-              <a:latin typeface="Malgun Gothic"/>
-            </a:endParaRPr>
-          </a:p>
-          <a:p>
-            <a:pPr marL="146304" indent="-146304" algn="l">
+              <a:t>매출의 43%가 6개월 넘게 안 산 우수 고객 (이탈 원인은 데이터로 확인 불가)</a:t>
+            </a:r>
+          </a:p>
+          <a:p>
+            <a:pPr algn="l" marL="146304" indent="-146304">
               <a:spcBef>
                 <a:spcPts val="900"/>
               </a:spcBef>
               <a:buChar char="-"/>
             </a:pPr>
             <a:r>
-              <a:rPr sz="1150" b="0" dirty="0" err="1">
+              <a:rPr sz="1150" b="0">
                 <a:solidFill>
                   <a:srgbClr val="1F2D29"/>
                 </a:solidFill>
                 <a:latin typeface="Malgun Gothic"/>
               </a:rPr>
-              <a:t>집중</a:t>
-            </a:r>
-            <a:r>
-              <a:rPr sz="1150" b="0" dirty="0">
-                <a:solidFill>
-                  <a:srgbClr val="1F2D29"/>
-                </a:solidFill>
-                <a:latin typeface="Malgun Gothic"/>
-              </a:rPr>
-              <a:t> </a:t>
-            </a:r>
-            <a:r>
-              <a:rPr sz="1150" b="0" dirty="0" err="1">
-                <a:solidFill>
-                  <a:srgbClr val="1F2D29"/>
-                </a:solidFill>
-                <a:latin typeface="Malgun Gothic"/>
-              </a:rPr>
-              <a:t>순서</a:t>
-            </a:r>
-            <a:r>
-              <a:rPr sz="1150" b="0" dirty="0">
-                <a:solidFill>
-                  <a:srgbClr val="1F2D29"/>
-                </a:solidFill>
-                <a:latin typeface="Malgun Gothic"/>
-              </a:rPr>
-              <a:t>: </a:t>
-            </a:r>
-            <a:r>
-              <a:rPr sz="1150" b="0" dirty="0" err="1">
-                <a:solidFill>
-                  <a:srgbClr val="1F2D29"/>
-                </a:solidFill>
-                <a:latin typeface="Malgun Gothic"/>
-              </a:rPr>
-              <a:t>휴면</a:t>
-            </a:r>
-            <a:r>
-              <a:rPr sz="1150" b="0" dirty="0">
-                <a:solidFill>
-                  <a:srgbClr val="1F2D29"/>
-                </a:solidFill>
-                <a:latin typeface="Malgun Gothic"/>
-              </a:rPr>
-              <a:t> </a:t>
-            </a:r>
-            <a:r>
-              <a:rPr sz="1150" b="0" dirty="0" err="1">
-                <a:solidFill>
-                  <a:srgbClr val="1F2D29"/>
-                </a:solidFill>
-                <a:latin typeface="Malgun Gothic"/>
-              </a:rPr>
-              <a:t>우수</a:t>
-            </a:r>
-            <a:r>
-              <a:rPr sz="1150" b="0" dirty="0">
-                <a:solidFill>
-                  <a:srgbClr val="1F2D29"/>
-                </a:solidFill>
-                <a:latin typeface="Malgun Gothic"/>
-              </a:rPr>
-              <a:t>, </a:t>
-            </a:r>
-            <a:r>
-              <a:rPr sz="1150" b="0" dirty="0" err="1">
-                <a:solidFill>
-                  <a:srgbClr val="1F2D29"/>
-                </a:solidFill>
-                <a:latin typeface="Malgun Gothic"/>
-              </a:rPr>
-              <a:t>최근</a:t>
-            </a:r>
-            <a:r>
-              <a:rPr sz="1150" b="0" dirty="0">
-                <a:solidFill>
-                  <a:srgbClr val="1F2D29"/>
-                </a:solidFill>
-                <a:latin typeface="Malgun Gothic"/>
-              </a:rPr>
-              <a:t> </a:t>
-            </a:r>
-            <a:r>
-              <a:rPr sz="1150" b="0" dirty="0" err="1">
-                <a:solidFill>
-                  <a:srgbClr val="1F2D29"/>
-                </a:solidFill>
-                <a:latin typeface="Malgun Gothic"/>
-              </a:rPr>
-              <a:t>우수</a:t>
-            </a:r>
-            <a:endParaRPr sz="1150" b="0" dirty="0">
-              <a:solidFill>
-                <a:srgbClr val="1F2D29"/>
-              </a:solidFill>
-              <a:latin typeface="Malgun Gothic"/>
-            </a:endParaRPr>
-          </a:p>
-          <a:p>
-            <a:pPr marL="146304" indent="-146304" algn="l">
+              <a:t>집중 순서: 휴면 우수, 최근 우수</a:t>
+            </a:r>
+          </a:p>
+          <a:p>
+            <a:pPr algn="l" marL="146304" indent="-146304">
               <a:spcBef>
                 <a:spcPts val="900"/>
               </a:spcBef>
               <a:buChar char="-"/>
             </a:pPr>
             <a:r>
-              <a:rPr sz="1150" b="0" dirty="0" err="1">
+              <a:rPr sz="1150" b="0">
                 <a:solidFill>
                   <a:srgbClr val="1F2D29"/>
                 </a:solidFill>
                 <a:latin typeface="Malgun Gothic"/>
               </a:rPr>
-              <a:t>휴면</a:t>
-            </a:r>
-            <a:r>
-              <a:rPr sz="1150" b="0" dirty="0">
+              <a:t>일반 그룹은 연락 비용이 크면 손해라 투자하지 않음</a:t>
+            </a:r>
+          </a:p>
+          <a:p>
+            <a:pPr algn="l" marL="146304" indent="-146304">
+              <a:spcBef>
+                <a:spcPts val="900"/>
+              </a:spcBef>
+              <a:buChar char="-"/>
+            </a:pPr>
+            <a:r>
+              <a:rPr sz="1150" b="0">
                 <a:solidFill>
                   <a:srgbClr val="1F2D29"/>
                 </a:solidFill>
                 <a:latin typeface="Malgun Gothic"/>
               </a:rPr>
-              <a:t> </a:t>
-            </a:r>
-            <a:r>
-              <a:rPr sz="1150" b="0" dirty="0" err="1">
-                <a:solidFill>
-                  <a:srgbClr val="1F2D29"/>
-                </a:solidFill>
-                <a:latin typeface="Malgun Gothic"/>
-              </a:rPr>
-              <a:t>우수는</a:t>
-            </a:r>
-            <a:r>
-              <a:rPr sz="1150" b="0" dirty="0">
-                <a:solidFill>
-                  <a:srgbClr val="1F2D29"/>
-                </a:solidFill>
-                <a:latin typeface="Malgun Gothic"/>
-              </a:rPr>
-              <a:t> 6~12개월부터 </a:t>
-            </a:r>
-            <a:r>
-              <a:rPr sz="1150" b="0" dirty="0" err="1">
-                <a:solidFill>
-                  <a:srgbClr val="1F2D29"/>
-                </a:solidFill>
-                <a:latin typeface="Malgun Gothic"/>
-              </a:rPr>
-              <a:t>같은</a:t>
-            </a:r>
-            <a:r>
-              <a:rPr sz="1150" b="0" dirty="0">
-                <a:solidFill>
-                  <a:srgbClr val="1F2D29"/>
-                </a:solidFill>
-                <a:latin typeface="Malgun Gothic"/>
-              </a:rPr>
-              <a:t> </a:t>
-            </a:r>
-            <a:r>
-              <a:rPr sz="1150" b="0" dirty="0" err="1">
-                <a:solidFill>
-                  <a:srgbClr val="1F2D29"/>
-                </a:solidFill>
-                <a:latin typeface="Malgun Gothic"/>
-              </a:rPr>
-              <a:t>상품군</a:t>
-            </a:r>
-            <a:r>
-              <a:rPr sz="1150" b="0" dirty="0">
-                <a:solidFill>
-                  <a:srgbClr val="1F2D29"/>
-                </a:solidFill>
-                <a:latin typeface="Malgun Gothic"/>
-              </a:rPr>
-              <a:t> </a:t>
-            </a:r>
-            <a:r>
-              <a:rPr sz="1150" b="0" dirty="0" err="1">
-                <a:solidFill>
-                  <a:srgbClr val="1F2D29"/>
-                </a:solidFill>
-                <a:latin typeface="Malgun Gothic"/>
-              </a:rPr>
-              <a:t>추천</a:t>
-            </a:r>
-            <a:r>
-              <a:rPr sz="1150" b="0" dirty="0">
-                <a:solidFill>
-                  <a:srgbClr val="1F2D29"/>
-                </a:solidFill>
-                <a:latin typeface="Malgun Gothic"/>
-              </a:rPr>
-              <a:t> + </a:t>
-            </a:r>
-            <a:r>
-              <a:rPr sz="1150" b="0" dirty="0" err="1">
-                <a:solidFill>
-                  <a:srgbClr val="1F2D29"/>
-                </a:solidFill>
-                <a:latin typeface="Malgun Gothic"/>
-              </a:rPr>
-              <a:t>바우처</a:t>
-            </a:r>
-            <a:endParaRPr sz="1150" b="0" dirty="0">
-              <a:solidFill>
-                <a:srgbClr val="1F2D29"/>
-              </a:solidFill>
-              <a:latin typeface="Malgun Gothic"/>
-            </a:endParaRPr>
+              <a:t>휴면 우수는 6~12개월부터 같은 상품군 추천 + 바우처</a:t>
+            </a:r>
           </a:p>
         </p:txBody>
       </p:sp>
@@ -11878,7 +10889,6 @@
           <a:lstStyle/>
           <a:p>
             <a:pPr algn="ctr"/>
-            <a:endParaRPr/>
           </a:p>
         </p:txBody>
       </p:sp>
@@ -11899,7 +10909,7 @@
           <a:noFill/>
         </p:spPr>
         <p:txBody>
-          <a:bodyPr wrap="square" lIns="0" tIns="0" rIns="0" bIns="0" anchor="t">
+          <a:bodyPr wrap="square" anchor="t" lIns="0" rIns="0" tIns="0" bIns="0">
             <a:spAutoFit/>
           </a:bodyPr>
           <a:lstStyle/>
@@ -11926,7 +10936,7 @@
         <p:spPr>
           <a:xfrm>
             <a:off x="3429000" y="1874519"/>
-            <a:ext cx="2286000" cy="1292662"/>
+            <a:ext cx="2286000" cy="2560320"/>
           </a:xfrm>
           <a:prstGeom prst="rect">
             <a:avLst/>
@@ -11934,302 +10944,73 @@
           <a:noFill/>
         </p:spPr>
         <p:txBody>
-          <a:bodyPr wrap="square" lIns="0" tIns="0" rIns="0" bIns="0" anchor="t">
+          <a:bodyPr wrap="square" anchor="t" lIns="0" rIns="0" tIns="0" bIns="0">
             <a:spAutoFit/>
           </a:bodyPr>
           <a:lstStyle/>
           <a:p>
-            <a:pPr marL="146304" indent="-146304" algn="l">
+            <a:pPr algn="l" marL="146304" indent="-146304">
               <a:buChar char="-"/>
             </a:pPr>
             <a:r>
-              <a:rPr sz="1150" b="0" dirty="0">
+              <a:rPr sz="1150" b="0">
                 <a:solidFill>
                   <a:srgbClr val="1F2D29"/>
                 </a:solidFill>
                 <a:latin typeface="Malgun Gothic"/>
               </a:rPr>
-              <a:t>2년치 </a:t>
-            </a:r>
-            <a:r>
-              <a:rPr sz="1150" b="0" dirty="0" err="1">
-                <a:solidFill>
-                  <a:srgbClr val="1F2D29"/>
-                </a:solidFill>
-                <a:latin typeface="Malgun Gothic"/>
-              </a:rPr>
-              <a:t>자료</a:t>
-            </a:r>
-            <a:r>
-              <a:rPr sz="1150" b="0" dirty="0">
-                <a:solidFill>
-                  <a:srgbClr val="1F2D29"/>
-                </a:solidFill>
-                <a:latin typeface="Malgun Gothic"/>
-              </a:rPr>
-              <a:t>, </a:t>
-            </a:r>
-            <a:r>
-              <a:rPr sz="1150" b="0" dirty="0" err="1">
-                <a:solidFill>
-                  <a:srgbClr val="1F2D29"/>
-                </a:solidFill>
-                <a:latin typeface="Malgun Gothic"/>
-              </a:rPr>
-              <a:t>떠난</a:t>
-            </a:r>
-            <a:r>
-              <a:rPr sz="1150" b="0" dirty="0">
-                <a:solidFill>
-                  <a:srgbClr val="1F2D29"/>
-                </a:solidFill>
-                <a:latin typeface="Malgun Gothic"/>
-              </a:rPr>
-              <a:t> </a:t>
-            </a:r>
-            <a:r>
-              <a:rPr sz="1150" b="0" dirty="0" err="1">
-                <a:solidFill>
-                  <a:srgbClr val="1F2D29"/>
-                </a:solidFill>
-                <a:latin typeface="Malgun Gothic"/>
-              </a:rPr>
-              <a:t>이유는</a:t>
-            </a:r>
-            <a:r>
-              <a:rPr sz="1150" b="0" dirty="0">
-                <a:solidFill>
-                  <a:srgbClr val="1F2D29"/>
-                </a:solidFill>
-                <a:latin typeface="Malgun Gothic"/>
-              </a:rPr>
-              <a:t> </a:t>
-            </a:r>
-            <a:r>
-              <a:rPr sz="1150" b="0" dirty="0" err="1">
-                <a:solidFill>
-                  <a:srgbClr val="1F2D29"/>
-                </a:solidFill>
-                <a:latin typeface="Malgun Gothic"/>
-              </a:rPr>
-              <a:t>데이터에</a:t>
-            </a:r>
-            <a:r>
-              <a:rPr sz="1150" b="0" dirty="0">
-                <a:solidFill>
-                  <a:srgbClr val="1F2D29"/>
-                </a:solidFill>
-                <a:latin typeface="Malgun Gothic"/>
-              </a:rPr>
-              <a:t> </a:t>
-            </a:r>
-            <a:r>
-              <a:rPr sz="1150" b="0" dirty="0" err="1">
-                <a:solidFill>
-                  <a:srgbClr val="1F2D29"/>
-                </a:solidFill>
-                <a:latin typeface="Malgun Gothic"/>
-              </a:rPr>
-              <a:t>없음</a:t>
-            </a:r>
-            <a:endParaRPr sz="1150" b="0" dirty="0">
-              <a:solidFill>
-                <a:srgbClr val="1F2D29"/>
-              </a:solidFill>
-              <a:latin typeface="Malgun Gothic"/>
-            </a:endParaRPr>
-          </a:p>
-          <a:p>
-            <a:pPr marL="146304" indent="-146304" algn="l">
+              <a:t>2년치 자료, 떠난 이유는 데이터에 없음</a:t>
+            </a:r>
+          </a:p>
+          <a:p>
+            <a:pPr algn="l" marL="146304" indent="-146304">
               <a:spcBef>
                 <a:spcPts val="900"/>
               </a:spcBef>
               <a:buChar char="-"/>
             </a:pPr>
             <a:r>
-              <a:rPr sz="1150" b="0" dirty="0" err="1">
+              <a:rPr sz="1150" b="0">
                 <a:solidFill>
                   <a:srgbClr val="1F2D29"/>
                 </a:solidFill>
                 <a:latin typeface="Malgun Gothic"/>
               </a:rPr>
-              <a:t>연락</a:t>
-            </a:r>
-            <a:r>
-              <a:rPr sz="1150" b="0" dirty="0">
-                <a:solidFill>
-                  <a:srgbClr val="1F2D29"/>
-                </a:solidFill>
-                <a:latin typeface="Malgun Gothic"/>
-              </a:rPr>
-              <a:t> </a:t>
-            </a:r>
-            <a:r>
-              <a:rPr sz="1150" b="0" dirty="0" err="1">
-                <a:solidFill>
-                  <a:srgbClr val="1F2D29"/>
-                </a:solidFill>
-                <a:latin typeface="Malgun Gothic"/>
-              </a:rPr>
-              <a:t>효과</a:t>
-            </a:r>
-            <a:r>
-              <a:rPr sz="1150" b="0" dirty="0">
-                <a:solidFill>
-                  <a:srgbClr val="1F2D29"/>
-                </a:solidFill>
-                <a:latin typeface="Malgun Gothic"/>
-              </a:rPr>
-              <a:t>(3%)는 </a:t>
-            </a:r>
-            <a:r>
-              <a:rPr sz="1150" b="0" dirty="0" err="1">
-                <a:solidFill>
-                  <a:srgbClr val="1F2D29"/>
-                </a:solidFill>
-                <a:latin typeface="Malgun Gothic"/>
-              </a:rPr>
-              <a:t>가정</a:t>
-            </a:r>
-            <a:r>
-              <a:rPr sz="1150" b="0" dirty="0">
-                <a:solidFill>
-                  <a:srgbClr val="1F2D29"/>
-                </a:solidFill>
-                <a:latin typeface="Malgun Gothic"/>
-              </a:rPr>
-              <a:t>, </a:t>
-            </a:r>
-            <a:r>
-              <a:rPr sz="1150" b="0" dirty="0" err="1">
-                <a:solidFill>
-                  <a:srgbClr val="1F2D29"/>
-                </a:solidFill>
-                <a:latin typeface="Malgun Gothic"/>
-              </a:rPr>
-              <a:t>순위는</a:t>
-            </a:r>
-            <a:r>
-              <a:rPr sz="1150" b="0" dirty="0">
-                <a:solidFill>
-                  <a:srgbClr val="1F2D29"/>
-                </a:solidFill>
-                <a:latin typeface="Malgun Gothic"/>
-              </a:rPr>
-              <a:t> </a:t>
-            </a:r>
-            <a:r>
-              <a:rPr sz="1150" b="0" dirty="0" err="1">
-                <a:solidFill>
-                  <a:srgbClr val="1F2D29"/>
-                </a:solidFill>
-                <a:latin typeface="Malgun Gothic"/>
-              </a:rPr>
-              <a:t>변하지</a:t>
-            </a:r>
-            <a:r>
-              <a:rPr sz="1150" b="0" dirty="0">
-                <a:solidFill>
-                  <a:srgbClr val="1F2D29"/>
-                </a:solidFill>
-                <a:latin typeface="Malgun Gothic"/>
-              </a:rPr>
-              <a:t> </a:t>
-            </a:r>
-            <a:r>
-              <a:rPr sz="1150" b="0" dirty="0" err="1">
-                <a:solidFill>
-                  <a:srgbClr val="1F2D29"/>
-                </a:solidFill>
-                <a:latin typeface="Malgun Gothic"/>
-              </a:rPr>
-              <a:t>않음</a:t>
-            </a:r>
-            <a:endParaRPr sz="1150" b="0" dirty="0">
-              <a:solidFill>
-                <a:srgbClr val="1F2D29"/>
-              </a:solidFill>
-              <a:latin typeface="Malgun Gothic"/>
-            </a:endParaRPr>
-          </a:p>
-          <a:p>
-            <a:pPr marL="146304" indent="-146304" algn="l">
+              <a:t>연락 효과(3%)는 가정, 순위는 변하지 않음</a:t>
+            </a:r>
+          </a:p>
+          <a:p>
+            <a:pPr algn="l" marL="146304" indent="-146304">
               <a:spcBef>
                 <a:spcPts val="900"/>
               </a:spcBef>
               <a:buChar char="-"/>
             </a:pPr>
             <a:r>
-              <a:rPr sz="1150" b="0" dirty="0" err="1">
+              <a:rPr sz="1150" b="0">
                 <a:solidFill>
                   <a:srgbClr val="1F2D29"/>
                 </a:solidFill>
                 <a:latin typeface="Malgun Gothic"/>
               </a:rPr>
-              <a:t>우수</a:t>
-            </a:r>
-            <a:r>
-              <a:rPr sz="1150" b="0" dirty="0">
+              <a:t>상품군, 바우처 결과는 연관성이지 효과가 아님</a:t>
+            </a:r>
+          </a:p>
+          <a:p>
+            <a:pPr algn="l" marL="146304" indent="-146304">
+              <a:spcBef>
+                <a:spcPts val="900"/>
+              </a:spcBef>
+              <a:buChar char="-"/>
+            </a:pPr>
+            <a:r>
+              <a:rPr sz="1150" b="0">
                 <a:solidFill>
                   <a:srgbClr val="1F2D29"/>
                 </a:solidFill>
                 <a:latin typeface="Malgun Gothic"/>
               </a:rPr>
-              <a:t> </a:t>
-            </a:r>
-            <a:r>
-              <a:rPr sz="1150" b="0" dirty="0" err="1">
-                <a:solidFill>
-                  <a:srgbClr val="1F2D29"/>
-                </a:solidFill>
-                <a:latin typeface="Malgun Gothic"/>
-              </a:rPr>
-              <a:t>기준</a:t>
-            </a:r>
-            <a:r>
-              <a:rPr sz="1150" b="0" dirty="0">
-                <a:solidFill>
-                  <a:srgbClr val="1F2D29"/>
-                </a:solidFill>
-                <a:latin typeface="Malgun Gothic"/>
-              </a:rPr>
-              <a:t>(R$110)은 </a:t>
-            </a:r>
-            <a:r>
-              <a:rPr sz="1150" b="0" dirty="0" err="1">
-                <a:solidFill>
-                  <a:srgbClr val="1F2D29"/>
-                </a:solidFill>
-                <a:latin typeface="Malgun Gothic"/>
-              </a:rPr>
-              <a:t>직접</a:t>
-            </a:r>
-            <a:r>
-              <a:rPr sz="1150" b="0" dirty="0">
-                <a:solidFill>
-                  <a:srgbClr val="1F2D29"/>
-                </a:solidFill>
-                <a:latin typeface="Malgun Gothic"/>
-              </a:rPr>
-              <a:t> </a:t>
-            </a:r>
-            <a:r>
-              <a:rPr sz="1150" b="0" dirty="0" err="1">
-                <a:solidFill>
-                  <a:srgbClr val="1F2D29"/>
-                </a:solidFill>
-                <a:latin typeface="Malgun Gothic"/>
-              </a:rPr>
-              <a:t>정한</a:t>
-            </a:r>
-            <a:r>
-              <a:rPr sz="1150" b="0" dirty="0">
-                <a:solidFill>
-                  <a:srgbClr val="1F2D29"/>
-                </a:solidFill>
-                <a:latin typeface="Malgun Gothic"/>
-              </a:rPr>
-              <a:t> 값</a:t>
+              <a:t>우수 기준(R$110)은 직접 정한 값</a:t>
             </a:r>
           </a:p>
         </p:txBody>
@@ -12275,7 +11056,6 @@
           <a:lstStyle/>
           <a:p>
             <a:pPr algn="ctr"/>
-            <a:endParaRPr/>
           </a:p>
         </p:txBody>
       </p:sp>
@@ -12296,7 +11076,7 @@
           <a:noFill/>
         </p:spPr>
         <p:txBody>
-          <a:bodyPr wrap="square" lIns="0" tIns="0" rIns="0" bIns="0" anchor="t">
+          <a:bodyPr wrap="square" anchor="t" lIns="0" rIns="0" tIns="0" bIns="0">
             <a:spAutoFit/>
           </a:bodyPr>
           <a:lstStyle/>
@@ -12331,12 +11111,12 @@
           <a:noFill/>
         </p:spPr>
         <p:txBody>
-          <a:bodyPr wrap="square" lIns="0" tIns="0" rIns="0" bIns="0" anchor="t">
+          <a:bodyPr wrap="square" anchor="t" lIns="0" rIns="0" tIns="0" bIns="0">
             <a:spAutoFit/>
           </a:bodyPr>
           <a:lstStyle/>
           <a:p>
-            <a:pPr marL="146304" indent="-146304" algn="l">
+            <a:pPr algn="l" marL="146304" indent="-146304">
               <a:buChar char="-"/>
             </a:pPr>
             <a:r>
@@ -12350,7 +11130,7 @@
             </a:r>
           </a:p>
           <a:p>
-            <a:pPr marL="146304" indent="-146304" algn="l">
+            <a:pPr algn="l" marL="146304" indent="-146304">
               <a:spcBef>
                 <a:spcPts val="900"/>
               </a:spcBef>
@@ -12367,7 +11147,7 @@
             </a:r>
           </a:p>
           <a:p>
-            <a:pPr marL="146304" indent="-146304" algn="l">
+            <a:pPr algn="l" marL="146304" indent="-146304">
               <a:spcBef>
                 <a:spcPts val="900"/>
               </a:spcBef>
@@ -12714,7 +11494,7 @@
 </file>
 
 <file path=ppt/theme/theme2.xml><?xml version="1.0" encoding="utf-8"?>
-<a:theme xmlns:a="http://schemas.openxmlformats.org/drawingml/2006/main" name="Office 테마">
+<a:theme xmlns:a="http://schemas.openxmlformats.org/drawingml/2006/main" name="Office Theme">
   <a:themeElements>
     <a:clrScheme name="Office">
       <a:dk1>
@@ -12724,44 +11504,44 @@
         <a:sysClr val="window" lastClr="FFFFFF"/>
       </a:lt1>
       <a:dk2>
-        <a:srgbClr val="0E2841"/>
+        <a:srgbClr val="1F497D"/>
       </a:dk2>
       <a:lt2>
-        <a:srgbClr val="E8E8E8"/>
+        <a:srgbClr val="EEECE1"/>
       </a:lt2>
       <a:accent1>
-        <a:srgbClr val="156082"/>
+        <a:srgbClr val="4F81BD"/>
       </a:accent1>
       <a:accent2>
-        <a:srgbClr val="E97132"/>
+        <a:srgbClr val="C0504D"/>
       </a:accent2>
       <a:accent3>
-        <a:srgbClr val="196B24"/>
+        <a:srgbClr val="9BBB59"/>
       </a:accent3>
       <a:accent4>
-        <a:srgbClr val="0F9ED5"/>
+        <a:srgbClr val="8064A2"/>
       </a:accent4>
       <a:accent5>
-        <a:srgbClr val="A02B93"/>
+        <a:srgbClr val="4BACC6"/>
       </a:accent5>
       <a:accent6>
-        <a:srgbClr val="4EA72E"/>
+        <a:srgbClr val="F79646"/>
       </a:accent6>
       <a:hlink>
-        <a:srgbClr val="467886"/>
+        <a:srgbClr val="0000FF"/>
       </a:hlink>
       <a:folHlink>
-        <a:srgbClr val="96607D"/>
+        <a:srgbClr val="800080"/>
       </a:folHlink>
     </a:clrScheme>
     <a:fontScheme name="Office">
       <a:majorFont>
-        <a:latin typeface="맑은 고딕" panose="02110004020202020204"/>
+        <a:latin typeface="Calibri"/>
         <a:ea typeface=""/>
         <a:cs typeface=""/>
-        <a:font script="Jpan" typeface="游ゴシック Light"/>
+        <a:font script="Jpan" typeface="ＭＳ Ｐゴシック"/>
         <a:font script="Hang" typeface="맑은 고딕"/>
-        <a:font script="Hans" typeface="等线 Light"/>
+        <a:font script="Hans" typeface="宋体"/>
         <a:font script="Hant" typeface="新細明體"/>
         <a:font script="Arab" typeface="Times New Roman"/>
         <a:font script="Hebr" typeface="Times New Roman"/>
@@ -12789,31 +11569,14 @@
         <a:font script="Viet" typeface="Times New Roman"/>
         <a:font script="Uigh" typeface="Microsoft Uighur"/>
         <a:font script="Geor" typeface="Sylfaen"/>
-        <a:font script="Armn" typeface="Arial"/>
-        <a:font script="Bugi" typeface="Leelawadee UI"/>
-        <a:font script="Bopo" typeface="Microsoft JhengHei"/>
-        <a:font script="Java" typeface="Javanese Text"/>
-        <a:font script="Lisu" typeface="Segoe UI"/>
-        <a:font script="Mymr" typeface="Myanmar Text"/>
-        <a:font script="Nkoo" typeface="Ebrima"/>
-        <a:font script="Olck" typeface="Nirmala UI"/>
-        <a:font script="Osma" typeface="Ebrima"/>
-        <a:font script="Phag" typeface="Phagspa"/>
-        <a:font script="Syrn" typeface="Estrangelo Edessa"/>
-        <a:font script="Syrj" typeface="Estrangelo Edessa"/>
-        <a:font script="Syre" typeface="Estrangelo Edessa"/>
-        <a:font script="Sora" typeface="Nirmala UI"/>
-        <a:font script="Tale" typeface="Microsoft Tai Le"/>
-        <a:font script="Talu" typeface="Microsoft New Tai Lue"/>
-        <a:font script="Tfng" typeface="Ebrima"/>
       </a:majorFont>
       <a:minorFont>
-        <a:latin typeface="맑은 고딕" panose="02110004020202020204"/>
+        <a:latin typeface="Calibri"/>
         <a:ea typeface=""/>
         <a:cs typeface=""/>
-        <a:font script="Jpan" typeface="游ゴシック"/>
+        <a:font script="Jpan" typeface="ＭＳ Ｐゴシック"/>
         <a:font script="Hang" typeface="맑은 고딕"/>
-        <a:font script="Hans" typeface="等线"/>
+        <a:font script="Hans" typeface="宋体"/>
         <a:font script="Hant" typeface="新細明體"/>
         <a:font script="Arab" typeface="Arial"/>
         <a:font script="Hebr" typeface="Arial"/>
@@ -12841,23 +11604,6 @@
         <a:font script="Viet" typeface="Arial"/>
         <a:font script="Uigh" typeface="Microsoft Uighur"/>
         <a:font script="Geor" typeface="Sylfaen"/>
-        <a:font script="Armn" typeface="Arial"/>
-        <a:font script="Bugi" typeface="Leelawadee UI"/>
-        <a:font script="Bopo" typeface="Microsoft JhengHei"/>
-        <a:font script="Java" typeface="Javanese Text"/>
-        <a:font script="Lisu" typeface="Segoe UI"/>
-        <a:font script="Mymr" typeface="Myanmar Text"/>
-        <a:font script="Nkoo" typeface="Ebrima"/>
-        <a:font script="Olck" typeface="Nirmala UI"/>
-        <a:font script="Osma" typeface="Ebrima"/>
-        <a:font script="Phag" typeface="Phagspa"/>
-        <a:font script="Syrn" typeface="Estrangelo Edessa"/>
-        <a:font script="Syrj" typeface="Estrangelo Edessa"/>
-        <a:font script="Syre" typeface="Estrangelo Edessa"/>
-        <a:font script="Sora" typeface="Nirmala UI"/>
-        <a:font script="Tale" typeface="Microsoft Tai Le"/>
-        <a:font script="Talu" typeface="Microsoft New Tai Lue"/>
-        <a:font script="Tfng" typeface="Ebrima"/>
       </a:minorFont>
     </a:fontScheme>
     <a:fmtScheme name="Office">
@@ -12869,136 +11615,180 @@
           <a:gsLst>
             <a:gs pos="0">
               <a:schemeClr val="phClr">
-                <a:lumMod val="110000"/>
-                <a:satMod val="105000"/>
-                <a:tint val="67000"/>
+                <a:tint val="50000"/>
+                <a:satMod val="300000"/>
               </a:schemeClr>
             </a:gs>
-            <a:gs pos="50000">
+            <a:gs pos="35000">
               <a:schemeClr val="phClr">
-                <a:lumMod val="105000"/>
-                <a:satMod val="103000"/>
-                <a:tint val="73000"/>
+                <a:tint val="37000"/>
+                <a:satMod val="300000"/>
               </a:schemeClr>
             </a:gs>
             <a:gs pos="100000">
               <a:schemeClr val="phClr">
-                <a:lumMod val="105000"/>
-                <a:satMod val="109000"/>
-                <a:tint val="81000"/>
+                <a:tint val="15000"/>
+                <a:satMod val="350000"/>
               </a:schemeClr>
             </a:gs>
           </a:gsLst>
-          <a:lin ang="5400000" scaled="0"/>
+          <a:lin ang="16200000" scaled="1"/>
         </a:gradFill>
         <a:gradFill rotWithShape="1">
           <a:gsLst>
             <a:gs pos="0">
               <a:schemeClr val="phClr">
-                <a:satMod val="103000"/>
-                <a:lumMod val="102000"/>
-                <a:tint val="94000"/>
-              </a:schemeClr>
-            </a:gs>
-            <a:gs pos="50000">
-              <a:schemeClr val="phClr">
-                <a:satMod val="110000"/>
-                <a:lumMod val="100000"/>
+                <a:tint val="100000"/>
                 <a:shade val="100000"/>
+                <a:satMod val="130000"/>
               </a:schemeClr>
             </a:gs>
             <a:gs pos="100000">
               <a:schemeClr val="phClr">
-                <a:lumMod val="99000"/>
-                <a:satMod val="120000"/>
-                <a:shade val="78000"/>
+                <a:tint val="50000"/>
+                <a:shade val="100000"/>
+                <a:satMod val="350000"/>
               </a:schemeClr>
             </a:gs>
           </a:gsLst>
-          <a:lin ang="5400000" scaled="0"/>
+          <a:lin ang="16200000" scaled="0"/>
         </a:gradFill>
       </a:fillStyleLst>
       <a:lnStyleLst>
-        <a:ln w="12700" cap="flat" cmpd="sng" algn="ctr">
+        <a:ln w="9525" cap="flat" cmpd="sng" algn="ctr">
           <a:solidFill>
-            <a:schemeClr val="phClr"/>
+            <a:schemeClr val="phClr">
+              <a:shade val="95000"/>
+              <a:satMod val="105000"/>
+            </a:schemeClr>
           </a:solidFill>
           <a:prstDash val="solid"/>
-          <a:miter lim="800000"/>
-        </a:ln>
-        <a:ln w="19050" cap="flat" cmpd="sng" algn="ctr">
-          <a:solidFill>
-            <a:schemeClr val="phClr"/>
-          </a:solidFill>
-          <a:prstDash val="solid"/>
-          <a:miter lim="800000"/>
         </a:ln>
         <a:ln w="25400" cap="flat" cmpd="sng" algn="ctr">
           <a:solidFill>
             <a:schemeClr val="phClr"/>
           </a:solidFill>
           <a:prstDash val="solid"/>
-          <a:miter lim="800000"/>
+        </a:ln>
+        <a:ln w="38100" cap="flat" cmpd="sng" algn="ctr">
+          <a:solidFill>
+            <a:schemeClr val="phClr"/>
+          </a:solidFill>
+          <a:prstDash val="solid"/>
         </a:ln>
       </a:lnStyleLst>
       <a:effectStyleLst>
         <a:effectStyle>
-          <a:effectLst/>
-        </a:effectStyle>
-        <a:effectStyle>
-          <a:effectLst/>
+          <a:effectLst>
+            <a:outerShdw blurRad="40000" dist="20000" dir="5400000" rotWithShape="0">
+              <a:srgbClr val="000000">
+                <a:alpha val="38000"/>
+              </a:srgbClr>
+            </a:outerShdw>
+          </a:effectLst>
         </a:effectStyle>
         <a:effectStyle>
           <a:effectLst>
-            <a:outerShdw blurRad="57150" dist="19050" dir="5400000" algn="ctr" rotWithShape="0">
+            <a:outerShdw blurRad="40000" dist="23000" dir="5400000" rotWithShape="0">
               <a:srgbClr val="000000">
-                <a:alpha val="63000"/>
+                <a:alpha val="35000"/>
               </a:srgbClr>
             </a:outerShdw>
           </a:effectLst>
+        </a:effectStyle>
+        <a:effectStyle>
+          <a:effectLst>
+            <a:outerShdw blurRad="40000" dist="23000" dir="5400000" rotWithShape="0">
+              <a:srgbClr val="000000">
+                <a:alpha val="35000"/>
+              </a:srgbClr>
+            </a:outerShdw>
+          </a:effectLst>
+          <a:scene3d>
+            <a:camera prst="orthographicFront">
+              <a:rot lat="0" lon="0" rev="0"/>
+            </a:camera>
+            <a:lightRig rig="threePt" dir="t">
+              <a:rot lat="0" lon="0" rev="1200000"/>
+            </a:lightRig>
+          </a:scene3d>
+          <a:sp3d>
+            <a:bevelT w="63500" h="25400"/>
+          </a:sp3d>
         </a:effectStyle>
       </a:effectStyleLst>
       <a:bgFillStyleLst>
         <a:solidFill>
           <a:schemeClr val="phClr"/>
         </a:solidFill>
-        <a:solidFill>
-          <a:schemeClr val="phClr">
-            <a:tint val="95000"/>
-            <a:satMod val="170000"/>
-          </a:schemeClr>
-        </a:solidFill>
         <a:gradFill rotWithShape="1">
           <a:gsLst>
             <a:gs pos="0">
               <a:schemeClr val="phClr">
-                <a:tint val="93000"/>
-                <a:satMod val="150000"/>
-                <a:shade val="98000"/>
-                <a:lumMod val="102000"/>
+                <a:tint val="40000"/>
+                <a:satMod val="350000"/>
               </a:schemeClr>
             </a:gs>
-            <a:gs pos="50000">
+            <a:gs pos="40000">
               <a:schemeClr val="phClr">
-                <a:tint val="98000"/>
-                <a:satMod val="130000"/>
-                <a:shade val="90000"/>
-                <a:lumMod val="103000"/>
+                <a:tint val="45000"/>
+                <a:shade val="99000"/>
+                <a:satMod val="350000"/>
               </a:schemeClr>
             </a:gs>
             <a:gs pos="100000">
               <a:schemeClr val="phClr">
-                <a:shade val="63000"/>
-                <a:satMod val="120000"/>
+                <a:shade val="20000"/>
+                <a:satMod val="255000"/>
               </a:schemeClr>
             </a:gs>
           </a:gsLst>
-          <a:lin ang="5400000" scaled="0"/>
+          <a:path path="circle">
+            <a:fillToRect l="50000" t="-80000" r="50000" b="180000"/>
+          </a:path>
+        </a:gradFill>
+        <a:gradFill rotWithShape="1">
+          <a:gsLst>
+            <a:gs pos="0">
+              <a:schemeClr val="phClr">
+                <a:tint val="80000"/>
+                <a:satMod val="300000"/>
+              </a:schemeClr>
+            </a:gs>
+            <a:gs pos="100000">
+              <a:schemeClr val="phClr">
+                <a:shade val="30000"/>
+                <a:satMod val="200000"/>
+              </a:schemeClr>
+            </a:gs>
+          </a:gsLst>
+          <a:path path="circle">
+            <a:fillToRect l="50000" t="50000" r="50000" b="50000"/>
+          </a:path>
         </a:gradFill>
       </a:bgFillStyleLst>
     </a:fmtScheme>
   </a:themeElements>
   <a:objectDefaults>
+    <a:spDef>
+      <a:spPr/>
+      <a:bodyPr/>
+      <a:lstStyle/>
+      <a:style>
+        <a:lnRef idx="1">
+          <a:schemeClr val="accent1"/>
+        </a:lnRef>
+        <a:fillRef idx="3">
+          <a:schemeClr val="accent1"/>
+        </a:fillRef>
+        <a:effectRef idx="2">
+          <a:schemeClr val="accent1"/>
+        </a:effectRef>
+        <a:fontRef idx="minor">
+          <a:schemeClr val="lt1"/>
+        </a:fontRef>
+      </a:style>
+    </a:spDef>
     <a:lnDef>
       <a:spPr/>
       <a:bodyPr/>
@@ -13020,10 +11810,5 @@
     </a:lnDef>
   </a:objectDefaults>
   <a:extraClrSchemeLst/>
-  <a:extLst>
-    <a:ext uri="{05A4C25C-085E-4340-85A3-A5531E510DB2}">
-      <thm15:themeFamily xmlns:thm15="http://schemas.microsoft.com/office/thememl/2012/main" name="Office Theme" id="{2E142A2C-CD16-42D6-873A-C26D2A0506FA}" vid="{1BDDFF52-6CD6-40A5-AB3C-68EB2F1E4D0A}"/>
-    </a:ext>
-  </a:extLst>
 </a:theme>
 </file>